--- a/slides/Poultry_Cohort_Results_ZH.pptx
+++ b/slides/Poultry_Cohort_Results_ZH.pptx
@@ -19,9 +19,13 @@
     <p:sldId id="267" r:id="rId13"/>
     <p:sldId id="268" r:id="rId14"/>
     <p:sldId id="269" r:id="rId15"/>
+    <p:sldId id="270" r:id="rId16"/>
+    <p:sldId id="271" r:id="rId17"/>
+    <p:sldId id="272" r:id="rId18"/>
+    <p:sldId id="273" r:id="rId19"/>
   </p:sldIdLst>
   <p:notesMasterIdLst>
-    <p:notesMasterId r:id="rId16"/>
+    <p:notesMasterId r:id="rId20"/>
   </p:notesMasterIdLst>
   <p:sldSz cx="12192000" cy="6858000"/>
   <p:notesSz cx="6858000" cy="12192000"/>
@@ -979,6 +983,358 @@
             <a:fld id="{F7021451-1387-4CA6-816F-3879F97B5CBC}" type="slidenum">
               <a:rPr lang="en-US"/>
               <a:t>14</a:t>
+            </a:fld>
+            <a:endParaRPr lang="en-US"/>
+          </a:p>
+        </p:txBody>
+      </p:sp>
+    </p:spTree>
+    <p:extLst>
+      <p:ext uri="{BB962C8B-B14F-4D97-AF65-F5344CB8AC3E}">
+        <p14:creationId xmlns:p14="http://schemas.microsoft.com/office/powerpoint/2010/main" val="1024086991"/>
+      </p:ext>
+    </p:extLst>
+  </p:cSld>
+  <p:clrMapOvr>
+    <a:masterClrMapping/>
+  </p:clrMapOvr>
+</p:notes>
+</file>
+
+<file path=ppt/notesSlides/notesSlide15.xml><?xml version="1.0" encoding="utf-8"?>
+<p:notes xmlns:a="http://schemas.openxmlformats.org/drawingml/2006/main" xmlns:r="http://schemas.openxmlformats.org/officeDocument/2006/relationships" xmlns:p="http://schemas.openxmlformats.org/presentationml/2006/main">
+  <p:cSld>
+    <p:spTree>
+      <p:nvGrpSpPr>
+        <p:cNvPr id="1" name=""/>
+        <p:cNvGrpSpPr/>
+        <p:nvPr/>
+      </p:nvGrpSpPr>
+      <p:grpSpPr>
+        <a:xfrm>
+          <a:off x="0" y="0"/>
+          <a:ext cx="0" cy="0"/>
+          <a:chOff x="0" y="0"/>
+          <a:chExt cx="0" cy="0"/>
+        </a:xfrm>
+      </p:grpSpPr>
+      <p:sp>
+        <p:nvSpPr>
+          <p:cNvPr id="2" name="Slide Image Placeholder 1"/>
+          <p:cNvSpPr>
+            <a:spLocks noGrp="1" noRot="1" noChangeAspect="1"/>
+          </p:cNvSpPr>
+          <p:nvPr>
+            <p:ph type="sldImg"/>
+          </p:nvPr>
+        </p:nvSpPr>
+        <p:spPr/>
+      </p:sp>
+      <p:sp>
+        <p:nvSpPr>
+          <p:cNvPr id="3" name="Notes Placeholder 2"/>
+          <p:cNvSpPr>
+            <a:spLocks noGrp="1"/>
+          </p:cNvSpPr>
+          <p:nvPr>
+            <p:ph type="body" idx="1"/>
+          </p:nvPr>
+        </p:nvSpPr>
+        <p:spPr/>
+        <p:txBody>
+          <a:bodyPr/>
+          <a:lstStyle/>
+          <a:p>
+            <a:r>
+              <a:rPr lang="en-US" dirty="0"/>
+              <a:t/>
+            </a:r>
+            <a:endParaRPr lang="en-US" dirty="0"/>
+          </a:p>
+        </p:txBody>
+      </p:sp>
+      <p:sp>
+        <p:nvSpPr>
+          <p:cNvPr id="4" name="Slide Number Placeholder 3"/>
+          <p:cNvSpPr>
+            <a:spLocks noGrp="1"/>
+          </p:cNvSpPr>
+          <p:nvPr>
+            <p:ph type="sldNum" sz="quarter" idx="10"/>
+          </p:nvPr>
+        </p:nvSpPr>
+        <p:spPr/>
+        <p:txBody>
+          <a:bodyPr/>
+          <a:lstStyle/>
+          <a:p>
+            <a:fld id="{F7021451-1387-4CA6-816F-3879F97B5CBC}" type="slidenum">
+              <a:rPr lang="en-US"/>
+              <a:t>15</a:t>
+            </a:fld>
+            <a:endParaRPr lang="en-US"/>
+          </a:p>
+        </p:txBody>
+      </p:sp>
+    </p:spTree>
+    <p:extLst>
+      <p:ext uri="{BB962C8B-B14F-4D97-AF65-F5344CB8AC3E}">
+        <p14:creationId xmlns:p14="http://schemas.microsoft.com/office/powerpoint/2010/main" val="1024086991"/>
+      </p:ext>
+    </p:extLst>
+  </p:cSld>
+  <p:clrMapOvr>
+    <a:masterClrMapping/>
+  </p:clrMapOvr>
+</p:notes>
+</file>
+
+<file path=ppt/notesSlides/notesSlide16.xml><?xml version="1.0" encoding="utf-8"?>
+<p:notes xmlns:a="http://schemas.openxmlformats.org/drawingml/2006/main" xmlns:r="http://schemas.openxmlformats.org/officeDocument/2006/relationships" xmlns:p="http://schemas.openxmlformats.org/presentationml/2006/main">
+  <p:cSld>
+    <p:spTree>
+      <p:nvGrpSpPr>
+        <p:cNvPr id="1" name=""/>
+        <p:cNvGrpSpPr/>
+        <p:nvPr/>
+      </p:nvGrpSpPr>
+      <p:grpSpPr>
+        <a:xfrm>
+          <a:off x="0" y="0"/>
+          <a:ext cx="0" cy="0"/>
+          <a:chOff x="0" y="0"/>
+          <a:chExt cx="0" cy="0"/>
+        </a:xfrm>
+      </p:grpSpPr>
+      <p:sp>
+        <p:nvSpPr>
+          <p:cNvPr id="2" name="Slide Image Placeholder 1"/>
+          <p:cNvSpPr>
+            <a:spLocks noGrp="1" noRot="1" noChangeAspect="1"/>
+          </p:cNvSpPr>
+          <p:nvPr>
+            <p:ph type="sldImg"/>
+          </p:nvPr>
+        </p:nvSpPr>
+        <p:spPr/>
+      </p:sp>
+      <p:sp>
+        <p:nvSpPr>
+          <p:cNvPr id="3" name="Notes Placeholder 2"/>
+          <p:cNvSpPr>
+            <a:spLocks noGrp="1"/>
+          </p:cNvSpPr>
+          <p:nvPr>
+            <p:ph type="body" idx="1"/>
+          </p:nvPr>
+        </p:nvSpPr>
+        <p:spPr/>
+        <p:txBody>
+          <a:bodyPr/>
+          <a:lstStyle/>
+          <a:p>
+            <a:r>
+              <a:rPr lang="en-US" dirty="0"/>
+              <a:t/>
+            </a:r>
+            <a:endParaRPr lang="en-US" dirty="0"/>
+          </a:p>
+        </p:txBody>
+      </p:sp>
+      <p:sp>
+        <p:nvSpPr>
+          <p:cNvPr id="4" name="Slide Number Placeholder 3"/>
+          <p:cNvSpPr>
+            <a:spLocks noGrp="1"/>
+          </p:cNvSpPr>
+          <p:nvPr>
+            <p:ph type="sldNum" sz="quarter" idx="10"/>
+          </p:nvPr>
+        </p:nvSpPr>
+        <p:spPr/>
+        <p:txBody>
+          <a:bodyPr/>
+          <a:lstStyle/>
+          <a:p>
+            <a:fld id="{F7021451-1387-4CA6-816F-3879F97B5CBC}" type="slidenum">
+              <a:rPr lang="en-US"/>
+              <a:t>16</a:t>
+            </a:fld>
+            <a:endParaRPr lang="en-US"/>
+          </a:p>
+        </p:txBody>
+      </p:sp>
+    </p:spTree>
+    <p:extLst>
+      <p:ext uri="{BB962C8B-B14F-4D97-AF65-F5344CB8AC3E}">
+        <p14:creationId xmlns:p14="http://schemas.microsoft.com/office/powerpoint/2010/main" val="1024086991"/>
+      </p:ext>
+    </p:extLst>
+  </p:cSld>
+  <p:clrMapOvr>
+    <a:masterClrMapping/>
+  </p:clrMapOvr>
+</p:notes>
+</file>
+
+<file path=ppt/notesSlides/notesSlide17.xml><?xml version="1.0" encoding="utf-8"?>
+<p:notes xmlns:a="http://schemas.openxmlformats.org/drawingml/2006/main" xmlns:r="http://schemas.openxmlformats.org/officeDocument/2006/relationships" xmlns:p="http://schemas.openxmlformats.org/presentationml/2006/main">
+  <p:cSld>
+    <p:spTree>
+      <p:nvGrpSpPr>
+        <p:cNvPr id="1" name=""/>
+        <p:cNvGrpSpPr/>
+        <p:nvPr/>
+      </p:nvGrpSpPr>
+      <p:grpSpPr>
+        <a:xfrm>
+          <a:off x="0" y="0"/>
+          <a:ext cx="0" cy="0"/>
+          <a:chOff x="0" y="0"/>
+          <a:chExt cx="0" cy="0"/>
+        </a:xfrm>
+      </p:grpSpPr>
+      <p:sp>
+        <p:nvSpPr>
+          <p:cNvPr id="2" name="Slide Image Placeholder 1"/>
+          <p:cNvSpPr>
+            <a:spLocks noGrp="1" noRot="1" noChangeAspect="1"/>
+          </p:cNvSpPr>
+          <p:nvPr>
+            <p:ph type="sldImg"/>
+          </p:nvPr>
+        </p:nvSpPr>
+        <p:spPr/>
+      </p:sp>
+      <p:sp>
+        <p:nvSpPr>
+          <p:cNvPr id="3" name="Notes Placeholder 2"/>
+          <p:cNvSpPr>
+            <a:spLocks noGrp="1"/>
+          </p:cNvSpPr>
+          <p:nvPr>
+            <p:ph type="body" idx="1"/>
+          </p:nvPr>
+        </p:nvSpPr>
+        <p:spPr/>
+        <p:txBody>
+          <a:bodyPr/>
+          <a:lstStyle/>
+          <a:p>
+            <a:r>
+              <a:rPr lang="en-US" dirty="0"/>
+              <a:t/>
+            </a:r>
+            <a:endParaRPr lang="en-US" dirty="0"/>
+          </a:p>
+        </p:txBody>
+      </p:sp>
+      <p:sp>
+        <p:nvSpPr>
+          <p:cNvPr id="4" name="Slide Number Placeholder 3"/>
+          <p:cNvSpPr>
+            <a:spLocks noGrp="1"/>
+          </p:cNvSpPr>
+          <p:nvPr>
+            <p:ph type="sldNum" sz="quarter" idx="10"/>
+          </p:nvPr>
+        </p:nvSpPr>
+        <p:spPr/>
+        <p:txBody>
+          <a:bodyPr/>
+          <a:lstStyle/>
+          <a:p>
+            <a:fld id="{F7021451-1387-4CA6-816F-3879F97B5CBC}" type="slidenum">
+              <a:rPr lang="en-US"/>
+              <a:t>17</a:t>
+            </a:fld>
+            <a:endParaRPr lang="en-US"/>
+          </a:p>
+        </p:txBody>
+      </p:sp>
+    </p:spTree>
+    <p:extLst>
+      <p:ext uri="{BB962C8B-B14F-4D97-AF65-F5344CB8AC3E}">
+        <p14:creationId xmlns:p14="http://schemas.microsoft.com/office/powerpoint/2010/main" val="1024086991"/>
+      </p:ext>
+    </p:extLst>
+  </p:cSld>
+  <p:clrMapOvr>
+    <a:masterClrMapping/>
+  </p:clrMapOvr>
+</p:notes>
+</file>
+
+<file path=ppt/notesSlides/notesSlide18.xml><?xml version="1.0" encoding="utf-8"?>
+<p:notes xmlns:a="http://schemas.openxmlformats.org/drawingml/2006/main" xmlns:r="http://schemas.openxmlformats.org/officeDocument/2006/relationships" xmlns:p="http://schemas.openxmlformats.org/presentationml/2006/main">
+  <p:cSld>
+    <p:spTree>
+      <p:nvGrpSpPr>
+        <p:cNvPr id="1" name=""/>
+        <p:cNvGrpSpPr/>
+        <p:nvPr/>
+      </p:nvGrpSpPr>
+      <p:grpSpPr>
+        <a:xfrm>
+          <a:off x="0" y="0"/>
+          <a:ext cx="0" cy="0"/>
+          <a:chOff x="0" y="0"/>
+          <a:chExt cx="0" cy="0"/>
+        </a:xfrm>
+      </p:grpSpPr>
+      <p:sp>
+        <p:nvSpPr>
+          <p:cNvPr id="2" name="Slide Image Placeholder 1"/>
+          <p:cNvSpPr>
+            <a:spLocks noGrp="1" noRot="1" noChangeAspect="1"/>
+          </p:cNvSpPr>
+          <p:nvPr>
+            <p:ph type="sldImg"/>
+          </p:nvPr>
+        </p:nvSpPr>
+        <p:spPr/>
+      </p:sp>
+      <p:sp>
+        <p:nvSpPr>
+          <p:cNvPr id="3" name="Notes Placeholder 2"/>
+          <p:cNvSpPr>
+            <a:spLocks noGrp="1"/>
+          </p:cNvSpPr>
+          <p:nvPr>
+            <p:ph type="body" idx="1"/>
+          </p:nvPr>
+        </p:nvSpPr>
+        <p:spPr/>
+        <p:txBody>
+          <a:bodyPr/>
+          <a:lstStyle/>
+          <a:p>
+            <a:r>
+              <a:rPr lang="en-US" dirty="0"/>
+              <a:t/>
+            </a:r>
+            <a:endParaRPr lang="en-US" dirty="0"/>
+          </a:p>
+        </p:txBody>
+      </p:sp>
+      <p:sp>
+        <p:nvSpPr>
+          <p:cNvPr id="4" name="Slide Number Placeholder 3"/>
+          <p:cNvSpPr>
+            <a:spLocks noGrp="1"/>
+          </p:cNvSpPr>
+          <p:nvPr>
+            <p:ph type="sldNum" sz="quarter" idx="10"/>
+          </p:nvPr>
+        </p:nvSpPr>
+        <p:spPr/>
+        <p:txBody>
+          <a:bodyPr/>
+          <a:lstStyle/>
+          <a:p>
+            <a:fld id="{F7021451-1387-4CA6-816F-3879F97B5CBC}" type="slidenum">
+              <a:rPr lang="en-US"/>
+              <a:t>18</a:t>
             </a:fld>
             <a:endParaRPr lang="en-US"/>
           </a:p>
@@ -2265,7 +2621,7 @@
                 <a:ea typeface="微软雅黑" pitchFamily="34" charset="-122"/>
                 <a:cs typeface="微软雅黑" pitchFamily="34" charset="-120"/>
               </a:rPr>
-              <a:t>结论：合并使五项指标全部下降，建议不要合并</a:t>
+              <a:t>结论：合并使五项指标全部下降；但火鸡队列内部的笼效应与感染效应同量级</a:t>
             </a:r>
             <a:endParaRPr lang="en-US" sz="1400" dirty="0"/>
           </a:p>
@@ -2343,7 +2699,7 @@
                 <a:ea typeface="微软雅黑" pitchFamily="34" charset="-122"/>
                 <a:cs typeface="微软雅黑" pitchFamily="34" charset="-120"/>
               </a:rPr>
-              <a:t>summary_Chicken_51_sample.md ｜ poultry_cohort.py</a:t>
+              <a:t>summary_Chicken_51_sample.md ｜ summary_Turkey_45_sample.md</a:t>
             </a:r>
             <a:endParaRPr lang="en-US" sz="1100" dirty="0"/>
           </a:p>
@@ -6118,6 +6474,8261 @@
                 <a:ea typeface="微软雅黑" pitchFamily="34" charset="-122"/>
                 <a:cs typeface="微软雅黑" pitchFamily="34" charset="-120"/>
               </a:rPr>
+              <a:t>队列内部的混杂</a:t>
+            </a:r>
+            <a:endParaRPr lang="en-US" sz="3800" dirty="0"/>
+          </a:p>
+        </p:txBody>
+      </p:sp>
+      <p:sp>
+        <p:nvSpPr>
+          <p:cNvPr id="5" name="Text 3"/>
+          <p:cNvSpPr/>
+          <p:nvPr/>
+        </p:nvSpPr>
+        <p:spPr>
+          <a:xfrm>
+            <a:off x="2880360" y="3154680"/>
+            <a:ext cx="8229600" cy="822960"/>
+          </a:xfrm>
+          <a:prstGeom prst="rect">
+            <a:avLst/>
+          </a:prstGeom>
+          <a:noFill/>
+          <a:ln/>
+        </p:spPr>
+        <p:txBody>
+          <a:bodyPr wrap="square" lIns="0" tIns="0" rIns="0" bIns="0" rtlCol="0" anchor="ctr"/>
+          <a:lstStyle/>
+          <a:p>
+            <a:pPr indent="0" marL="0">
+              <a:buNone/>
+            </a:pPr>
+            <a:r>
+              <a:rPr lang="en-US" sz="1500" dirty="0">
+                <a:solidFill>
+                  <a:srgbClr val="8FB996"/>
+                </a:solidFill>
+                <a:latin typeface="微软雅黑" pitchFamily="34" charset="0"/>
+                <a:ea typeface="微软雅黑" pitchFamily="34" charset="-122"/>
+                <a:cs typeface="微软雅黑" pitchFamily="34" charset="-120"/>
+              </a:rPr>
+              <a:t>把火鸡队列单独拿出来后，新的问题出现了</a:t>
+            </a:r>
+            <a:endParaRPr lang="en-US" sz="1500" dirty="0"/>
+          </a:p>
+        </p:txBody>
+      </p:sp>
+    </p:spTree>
+  </p:cSld>
+  <p:clrMapOvr>
+    <a:masterClrMapping/>
+  </p:clrMapOvr>
+</p:sld>
+</file>
+
+<file path=ppt/slides/slide13.xml><?xml version="1.0" encoding="utf-8"?>
+<p:sld xmlns:a="http://schemas.openxmlformats.org/drawingml/2006/main" xmlns:r="http://schemas.openxmlformats.org/officeDocument/2006/relationships" xmlns:p="http://schemas.openxmlformats.org/presentationml/2006/main">
+  <p:cSld name="Slide 13">
+    <p:bg>
+      <p:bgPr>
+        <a:solidFill>
+          <a:srgbClr val="FCFAF6"/>
+        </a:solidFill>
+      </p:bgPr>
+    </p:bg>
+    <p:spTree>
+      <p:nvGrpSpPr>
+        <p:cNvPr id="1" name=""/>
+        <p:cNvGrpSpPr/>
+        <p:nvPr/>
+      </p:nvGrpSpPr>
+      <p:grpSpPr>
+        <a:xfrm>
+          <a:off x="0" y="0"/>
+          <a:ext cx="0" cy="0"/>
+          <a:chOff x="0" y="0"/>
+          <a:chExt cx="0" cy="0"/>
+        </a:xfrm>
+      </p:grpSpPr>
+      <p:sp>
+        <p:nvSpPr>
+          <p:cNvPr id="2" name="Shape 0"/>
+          <p:cNvSpPr/>
+          <p:nvPr/>
+        </p:nvSpPr>
+        <p:spPr>
+          <a:xfrm>
+            <a:off x="0" y="0"/>
+            <a:ext cx="12191695" cy="54864"/>
+          </a:xfrm>
+          <a:prstGeom prst="rect">
+            <a:avLst/>
+          </a:prstGeom>
+          <a:solidFill>
+            <a:srgbClr val="18707F"/>
+          </a:solidFill>
+          <a:ln/>
+        </p:spPr>
+      </p:sp>
+      <p:sp>
+        <p:nvSpPr>
+          <p:cNvPr id="3" name="Text 1"/>
+          <p:cNvSpPr/>
+          <p:nvPr/>
+        </p:nvSpPr>
+        <p:spPr>
+          <a:xfrm>
+            <a:off x="548640" y="310896"/>
+            <a:ext cx="7315200" cy="256032"/>
+          </a:xfrm>
+          <a:prstGeom prst="rect">
+            <a:avLst/>
+          </a:prstGeom>
+          <a:noFill/>
+          <a:ln/>
+        </p:spPr>
+        <p:txBody>
+          <a:bodyPr wrap="square" lIns="0" tIns="0" rIns="0" bIns="0" rtlCol="0" anchor="ctr"/>
+          <a:lstStyle/>
+          <a:p>
+            <a:pPr indent="0" marL="0">
+              <a:buNone/>
+            </a:pPr>
+            <a:r>
+              <a:rPr lang="en-US" sz="1100" b="1" spc="200" kern="0" dirty="0">
+                <a:solidFill>
+                  <a:srgbClr val="18707F"/>
+                </a:solidFill>
+                <a:latin typeface="微软雅黑" pitchFamily="34" charset="0"/>
+                <a:ea typeface="微软雅黑" pitchFamily="34" charset="-122"/>
+                <a:cs typeface="微软雅黑" pitchFamily="34" charset="-120"/>
+              </a:rPr>
+              <a:t>混杂结构 · PRJNA644054</a:t>
+            </a:r>
+            <a:endParaRPr lang="en-US" sz="1100" dirty="0"/>
+          </a:p>
+        </p:txBody>
+      </p:sp>
+      <p:sp>
+        <p:nvSpPr>
+          <p:cNvPr id="4" name="Text 2"/>
+          <p:cNvSpPr/>
+          <p:nvPr/>
+        </p:nvSpPr>
+        <p:spPr>
+          <a:xfrm>
+            <a:off x="548640" y="566928"/>
+            <a:ext cx="11064240" cy="685800"/>
+          </a:xfrm>
+          <a:prstGeom prst="rect">
+            <a:avLst/>
+          </a:prstGeom>
+          <a:noFill/>
+          <a:ln/>
+        </p:spPr>
+        <p:txBody>
+          <a:bodyPr wrap="square" lIns="0" tIns="0" rIns="0" bIns="0" rtlCol="0" anchor="ctr"/>
+          <a:lstStyle/>
+          <a:p>
+            <a:pPr indent="0" marL="0">
+              <a:buNone/>
+            </a:pPr>
+            <a:r>
+              <a:rPr lang="en-US" sz="3000" b="1" dirty="0">
+                <a:solidFill>
+                  <a:srgbClr val="16252C"/>
+                </a:solidFill>
+                <a:latin typeface="微软雅黑" pitchFamily="34" charset="0"/>
+                <a:ea typeface="微软雅黑" pitchFamily="34" charset="-122"/>
+                <a:cs typeface="微软雅黑" pitchFamily="34" charset="-120"/>
+              </a:rPr>
+              <a:t>隔离器与感染状态完全共线</a:t>
+            </a:r>
+            <a:endParaRPr lang="en-US" sz="3000" dirty="0"/>
+          </a:p>
+        </p:txBody>
+      </p:sp>
+      <p:sp>
+        <p:nvSpPr>
+          <p:cNvPr id="5" name="Text 3"/>
+          <p:cNvSpPr/>
+          <p:nvPr/>
+        </p:nvSpPr>
+        <p:spPr>
+          <a:xfrm>
+            <a:off x="11430000" y="6355080"/>
+            <a:ext cx="411480" cy="274320"/>
+          </a:xfrm>
+          <a:prstGeom prst="rect">
+            <a:avLst/>
+          </a:prstGeom>
+          <a:noFill/>
+          <a:ln/>
+        </p:spPr>
+        <p:txBody>
+          <a:bodyPr wrap="square" lIns="0" tIns="0" rIns="0" bIns="0" rtlCol="0" anchor="ctr"/>
+          <a:lstStyle/>
+          <a:p>
+            <a:pPr algn="r" indent="0" marL="0">
+              <a:buNone/>
+            </a:pPr>
+            <a:r>
+              <a:rPr lang="en-US" sz="1000" dirty="0">
+                <a:solidFill>
+                  <a:srgbClr val="5F7580"/>
+                </a:solidFill>
+                <a:latin typeface="微软雅黑" pitchFamily="34" charset="0"/>
+                <a:ea typeface="微软雅黑" pitchFamily="34" charset="-122"/>
+                <a:cs typeface="微软雅黑" pitchFamily="34" charset="-120"/>
+              </a:rPr>
+              <a:t>13</a:t>
+            </a:r>
+            <a:endParaRPr lang="en-US" sz="1000" dirty="0"/>
+          </a:p>
+        </p:txBody>
+      </p:sp>
+      <p:sp>
+        <p:nvSpPr>
+          <p:cNvPr id="6" name="Text 4"/>
+          <p:cNvSpPr/>
+          <p:nvPr/>
+        </p:nvSpPr>
+        <p:spPr>
+          <a:xfrm>
+            <a:off x="548640" y="1298448"/>
+            <a:ext cx="11064240" cy="320040"/>
+          </a:xfrm>
+          <a:prstGeom prst="rect">
+            <a:avLst/>
+          </a:prstGeom>
+          <a:noFill/>
+          <a:ln/>
+        </p:spPr>
+        <p:txBody>
+          <a:bodyPr wrap="square" lIns="0" tIns="0" rIns="0" bIns="0" rtlCol="0" anchor="ctr"/>
+          <a:lstStyle/>
+          <a:p>
+            <a:pPr indent="0" marL="0">
+              <a:buNone/>
+            </a:pPr>
+            <a:r>
+              <a:rPr lang="en-US" sz="1250" dirty="0">
+                <a:solidFill>
+                  <a:srgbClr val="5F7580"/>
+                </a:solidFill>
+                <a:latin typeface="微软雅黑" pitchFamily="34" charset="0"/>
+                <a:ea typeface="微软雅黑" pitchFamily="34" charset="-122"/>
+                <a:cs typeface="微软雅黑" pitchFamily="34" charset="-120"/>
+              </a:rPr>
+              <a:t>前面十页只检查了「两个 project 之间」的批次效应。火鸡队列内部还有一层：饲养隔离器。</a:t>
+            </a:r>
+            <a:endParaRPr lang="en-US" sz="1250" dirty="0"/>
+          </a:p>
+        </p:txBody>
+      </p:sp>
+      <p:graphicFrame>
+        <p:nvGraphicFramePr>
+          <p:cNvPr id="14" name="Table 0"/>
+          <p:cNvGraphicFramePr>
+            <a:graphicFrameLocks noGrp="1"/>
+          </p:cNvGraphicFramePr>
+          <p:nvPr>
+            <p:extLst>
+              <p:ext uri="{D42A27DB-BD31-4B8C-83A1-F6EECF244321}">
+                <p14:modId xmlns:p14="http://schemas.microsoft.com/office/powerpoint/2010/main" val="1579011935"/>
+              </p:ext>
+            </p:extLst>
+          </p:nvPr>
+        </p:nvGraphicFramePr>
+        <p:xfrm>
+          <a:off x="548640" y="1737360"/>
+          <a:ext cx="4663440" cy="914400"/>
+        </p:xfrm>
+        <a:graphic>
+          <a:graphicData uri="http://schemas.openxmlformats.org/drawingml/2006/table">
+            <a:tbl>
+              <a:tblPr/>
+              <a:tblGrid>
+                <a:gridCol w="1554480"/>
+                <a:gridCol w="1554480"/>
+                <a:gridCol w="1554480"/>
+              </a:tblGrid>
+              <a:tr h="384048">
+                <a:tc>
+                  <a:txBody>
+                    <a:bodyPr/>
+                    <a:lstStyle/>
+                    <a:p>
+                      <a:pPr algn="ctr" indent="0" marL="0">
+                        <a:buNone/>
+                      </a:pPr>
+                      <a:r>
+                        <a:rPr lang="en-US" sz="1100" b="1" dirty="0">
+                          <a:solidFill>
+                            <a:srgbClr val="FFFFFF"/>
+                          </a:solidFill>
+                          <a:latin typeface="微软雅黑" pitchFamily="34" charset="0"/>
+                          <a:ea typeface="微软雅黑" pitchFamily="34" charset="-122"/>
+                          <a:cs typeface="微软雅黑" pitchFamily="34" charset="-120"/>
+                        </a:rPr>
+                        <a:t>Isolator</a:t>
+                      </a:r>
+                      <a:endParaRPr lang="en-US" sz="1100" dirty="0">
+                        <a:latin typeface="微软雅黑" charset="0"/>
+                        <a:ea typeface="微软雅黑" charset="0"/>
+                        <a:cs typeface="微软雅黑" charset="0"/>
+                      </a:endParaRPr>
+                    </a:p>
+                  </a:txBody>
+                  <a:tcPr marL="91440" marR="91440" marT="45720" marB="45720" anchor="ctr">
+                    <a:lnL w="6350" cap="flat" cmpd="sng" algn="ctr">
+                      <a:solidFill>
+                        <a:srgbClr val="DDE5E8"/>
+                      </a:solidFill>
+                      <a:prstDash val="solid"/>
+                      <a:round/>
+                      <a:headEnd type="none" w="med" len="med"/>
+                      <a:tailEnd type="none" w="med" len="med"/>
+                    </a:lnL>
+                    <a:lnR w="6350" cap="flat" cmpd="sng" algn="ctr">
+                      <a:solidFill>
+                        <a:srgbClr val="DDE5E8"/>
+                      </a:solidFill>
+                      <a:prstDash val="solid"/>
+                      <a:round/>
+                      <a:headEnd type="none" w="med" len="med"/>
+                      <a:tailEnd type="none" w="med" len="med"/>
+                    </a:lnR>
+                    <a:lnT w="6350" cap="flat" cmpd="sng" algn="ctr">
+                      <a:solidFill>
+                        <a:srgbClr val="DDE5E8"/>
+                      </a:solidFill>
+                      <a:prstDash val="solid"/>
+                      <a:round/>
+                      <a:headEnd type="none" w="med" len="med"/>
+                      <a:tailEnd type="none" w="med" len="med"/>
+                    </a:lnT>
+                    <a:lnB w="6350" cap="flat" cmpd="sng" algn="ctr">
+                      <a:solidFill>
+                        <a:srgbClr val="DDE5E8"/>
+                      </a:solidFill>
+                      <a:prstDash val="solid"/>
+                      <a:round/>
+                      <a:headEnd type="none" w="med" len="med"/>
+                      <a:tailEnd type="none" w="med" len="med"/>
+                    </a:lnB>
+                    <a:solidFill>
+                      <a:srgbClr val="0B3C49"/>
+                    </a:solidFill>
+                  </a:tcPr>
+                </a:tc>
+                <a:tc>
+                  <a:txBody>
+                    <a:bodyPr/>
+                    <a:lstStyle/>
+                    <a:p>
+                      <a:pPr algn="ctr" indent="0" marL="0">
+                        <a:buNone/>
+                      </a:pPr>
+                      <a:r>
+                        <a:rPr lang="en-US" sz="1100" b="1" dirty="0">
+                          <a:solidFill>
+                            <a:srgbClr val="FFFFFF"/>
+                          </a:solidFill>
+                          <a:latin typeface="微软雅黑" pitchFamily="34" charset="0"/>
+                          <a:ea typeface="微软雅黑" pitchFamily="34" charset="-122"/>
+                          <a:cs typeface="微软雅黑" pitchFamily="34" charset="-120"/>
+                        </a:rPr>
+                        <a:t>阴性</a:t>
+                      </a:r>
+                      <a:endParaRPr lang="en-US" sz="1100" dirty="0">
+                        <a:latin typeface="微软雅黑" charset="0"/>
+                        <a:ea typeface="微软雅黑" charset="0"/>
+                        <a:cs typeface="微软雅黑" charset="0"/>
+                      </a:endParaRPr>
+                    </a:p>
+                  </a:txBody>
+                  <a:tcPr marL="91440" marR="91440" marT="45720" marB="45720" anchor="ctr">
+                    <a:lnL w="6350" cap="flat" cmpd="sng" algn="ctr">
+                      <a:solidFill>
+                        <a:srgbClr val="DDE5E8"/>
+                      </a:solidFill>
+                      <a:prstDash val="solid"/>
+                      <a:round/>
+                      <a:headEnd type="none" w="med" len="med"/>
+                      <a:tailEnd type="none" w="med" len="med"/>
+                    </a:lnL>
+                    <a:lnR w="6350" cap="flat" cmpd="sng" algn="ctr">
+                      <a:solidFill>
+                        <a:srgbClr val="DDE5E8"/>
+                      </a:solidFill>
+                      <a:prstDash val="solid"/>
+                      <a:round/>
+                      <a:headEnd type="none" w="med" len="med"/>
+                      <a:tailEnd type="none" w="med" len="med"/>
+                    </a:lnR>
+                    <a:lnT w="6350" cap="flat" cmpd="sng" algn="ctr">
+                      <a:solidFill>
+                        <a:srgbClr val="DDE5E8"/>
+                      </a:solidFill>
+                      <a:prstDash val="solid"/>
+                      <a:round/>
+                      <a:headEnd type="none" w="med" len="med"/>
+                      <a:tailEnd type="none" w="med" len="med"/>
+                    </a:lnT>
+                    <a:lnB w="6350" cap="flat" cmpd="sng" algn="ctr">
+                      <a:solidFill>
+                        <a:srgbClr val="DDE5E8"/>
+                      </a:solidFill>
+                      <a:prstDash val="solid"/>
+                      <a:round/>
+                      <a:headEnd type="none" w="med" len="med"/>
+                      <a:tailEnd type="none" w="med" len="med"/>
+                    </a:lnB>
+                    <a:solidFill>
+                      <a:srgbClr val="0B3C49"/>
+                    </a:solidFill>
+                  </a:tcPr>
+                </a:tc>
+                <a:tc>
+                  <a:txBody>
+                    <a:bodyPr/>
+                    <a:lstStyle/>
+                    <a:p>
+                      <a:pPr algn="ctr" indent="0" marL="0">
+                        <a:buNone/>
+                      </a:pPr>
+                      <a:r>
+                        <a:rPr lang="en-US" sz="1100" b="1" dirty="0">
+                          <a:solidFill>
+                            <a:srgbClr val="FFFFFF"/>
+                          </a:solidFill>
+                          <a:latin typeface="微软雅黑" pitchFamily="34" charset="0"/>
+                          <a:ea typeface="微软雅黑" pitchFamily="34" charset="-122"/>
+                          <a:cs typeface="微软雅黑" pitchFamily="34" charset="-120"/>
+                        </a:rPr>
+                        <a:t>阳性</a:t>
+                      </a:r>
+                      <a:endParaRPr lang="en-US" sz="1100" dirty="0">
+                        <a:latin typeface="微软雅黑" charset="0"/>
+                        <a:ea typeface="微软雅黑" charset="0"/>
+                        <a:cs typeface="微软雅黑" charset="0"/>
+                      </a:endParaRPr>
+                    </a:p>
+                  </a:txBody>
+                  <a:tcPr marL="91440" marR="91440" marT="45720" marB="45720" anchor="ctr">
+                    <a:lnL w="6350" cap="flat" cmpd="sng" algn="ctr">
+                      <a:solidFill>
+                        <a:srgbClr val="DDE5E8"/>
+                      </a:solidFill>
+                      <a:prstDash val="solid"/>
+                      <a:round/>
+                      <a:headEnd type="none" w="med" len="med"/>
+                      <a:tailEnd type="none" w="med" len="med"/>
+                    </a:lnL>
+                    <a:lnR w="6350" cap="flat" cmpd="sng" algn="ctr">
+                      <a:solidFill>
+                        <a:srgbClr val="DDE5E8"/>
+                      </a:solidFill>
+                      <a:prstDash val="solid"/>
+                      <a:round/>
+                      <a:headEnd type="none" w="med" len="med"/>
+                      <a:tailEnd type="none" w="med" len="med"/>
+                    </a:lnR>
+                    <a:lnT w="6350" cap="flat" cmpd="sng" algn="ctr">
+                      <a:solidFill>
+                        <a:srgbClr val="DDE5E8"/>
+                      </a:solidFill>
+                      <a:prstDash val="solid"/>
+                      <a:round/>
+                      <a:headEnd type="none" w="med" len="med"/>
+                      <a:tailEnd type="none" w="med" len="med"/>
+                    </a:lnT>
+                    <a:lnB w="6350" cap="flat" cmpd="sng" algn="ctr">
+                      <a:solidFill>
+                        <a:srgbClr val="DDE5E8"/>
+                      </a:solidFill>
+                      <a:prstDash val="solid"/>
+                      <a:round/>
+                      <a:headEnd type="none" w="med" len="med"/>
+                      <a:tailEnd type="none" w="med" len="med"/>
+                    </a:lnB>
+                    <a:solidFill>
+                      <a:srgbClr val="0B3C49"/>
+                    </a:solidFill>
+                  </a:tcPr>
+                </a:tc>
+              </a:tr>
+              <a:tr h="384048">
+                <a:tc>
+                  <a:txBody>
+                    <a:bodyPr/>
+                    <a:lstStyle/>
+                    <a:p>
+                      <a:pPr algn="ctr" indent="0" marL="0">
+                        <a:buNone/>
+                      </a:pPr>
+                      <a:r>
+                        <a:rPr lang="en-US" sz="1150" dirty="0">
+                          <a:solidFill>
+                            <a:srgbClr val="16252C"/>
+                          </a:solidFill>
+                          <a:latin typeface="微软雅黑" pitchFamily="34" charset="0"/>
+                          <a:ea typeface="微软雅黑" pitchFamily="34" charset="-122"/>
+                          <a:cs typeface="微软雅黑" pitchFamily="34" charset="-120"/>
+                        </a:rPr>
+                        <a:t>1</a:t>
+                      </a:r>
+                      <a:endParaRPr lang="en-US" sz="1150" dirty="0">
+                        <a:latin typeface="微软雅黑" charset="0"/>
+                        <a:ea typeface="微软雅黑" charset="0"/>
+                        <a:cs typeface="微软雅黑" charset="0"/>
+                      </a:endParaRPr>
+                    </a:p>
+                  </a:txBody>
+                  <a:tcPr marL="91440" marR="91440" marT="45720" marB="45720" anchor="ctr">
+                    <a:lnL w="6350" cap="flat" cmpd="sng" algn="ctr">
+                      <a:solidFill>
+                        <a:srgbClr val="DDE5E8"/>
+                      </a:solidFill>
+                      <a:prstDash val="solid"/>
+                      <a:round/>
+                      <a:headEnd type="none" w="med" len="med"/>
+                      <a:tailEnd type="none" w="med" len="med"/>
+                    </a:lnL>
+                    <a:lnR w="6350" cap="flat" cmpd="sng" algn="ctr">
+                      <a:solidFill>
+                        <a:srgbClr val="DDE5E8"/>
+                      </a:solidFill>
+                      <a:prstDash val="solid"/>
+                      <a:round/>
+                      <a:headEnd type="none" w="med" len="med"/>
+                      <a:tailEnd type="none" w="med" len="med"/>
+                    </a:lnR>
+                    <a:lnT w="6350" cap="flat" cmpd="sng" algn="ctr">
+                      <a:solidFill>
+                        <a:srgbClr val="DDE5E8"/>
+                      </a:solidFill>
+                      <a:prstDash val="solid"/>
+                      <a:round/>
+                      <a:headEnd type="none" w="med" len="med"/>
+                      <a:tailEnd type="none" w="med" len="med"/>
+                    </a:lnT>
+                    <a:lnB w="6350" cap="flat" cmpd="sng" algn="ctr">
+                      <a:solidFill>
+                        <a:srgbClr val="DDE5E8"/>
+                      </a:solidFill>
+                      <a:prstDash val="solid"/>
+                      <a:round/>
+                      <a:headEnd type="none" w="med" len="med"/>
+                      <a:tailEnd type="none" w="med" len="med"/>
+                    </a:lnB>
+                  </a:tcPr>
+                </a:tc>
+                <a:tc>
+                  <a:txBody>
+                    <a:bodyPr/>
+                    <a:lstStyle/>
+                    <a:p>
+                      <a:pPr algn="ctr" indent="0" marL="0">
+                        <a:buNone/>
+                      </a:pPr>
+                      <a:r>
+                        <a:rPr lang="en-US" sz="1150" b="1" dirty="0">
+                          <a:solidFill>
+                            <a:srgbClr val="16252C"/>
+                          </a:solidFill>
+                          <a:latin typeface="微软雅黑" pitchFamily="34" charset="0"/>
+                          <a:ea typeface="微软雅黑" pitchFamily="34" charset="-122"/>
+                          <a:cs typeface="微软雅黑" pitchFamily="34" charset="-120"/>
+                        </a:rPr>
+                        <a:t>8</a:t>
+                      </a:r>
+                      <a:endParaRPr lang="en-US" sz="1150" dirty="0">
+                        <a:latin typeface="微软雅黑" charset="0"/>
+                        <a:ea typeface="微软雅黑" charset="0"/>
+                        <a:cs typeface="微软雅黑" charset="0"/>
+                      </a:endParaRPr>
+                    </a:p>
+                  </a:txBody>
+                  <a:tcPr marL="91440" marR="91440" marT="45720" marB="45720" anchor="ctr">
+                    <a:lnL w="6350" cap="flat" cmpd="sng" algn="ctr">
+                      <a:solidFill>
+                        <a:srgbClr val="DDE5E8"/>
+                      </a:solidFill>
+                      <a:prstDash val="solid"/>
+                      <a:round/>
+                      <a:headEnd type="none" w="med" len="med"/>
+                      <a:tailEnd type="none" w="med" len="med"/>
+                    </a:lnL>
+                    <a:lnR w="6350" cap="flat" cmpd="sng" algn="ctr">
+                      <a:solidFill>
+                        <a:srgbClr val="DDE5E8"/>
+                      </a:solidFill>
+                      <a:prstDash val="solid"/>
+                      <a:round/>
+                      <a:headEnd type="none" w="med" len="med"/>
+                      <a:tailEnd type="none" w="med" len="med"/>
+                    </a:lnR>
+                    <a:lnT w="6350" cap="flat" cmpd="sng" algn="ctr">
+                      <a:solidFill>
+                        <a:srgbClr val="DDE5E8"/>
+                      </a:solidFill>
+                      <a:prstDash val="solid"/>
+                      <a:round/>
+                      <a:headEnd type="none" w="med" len="med"/>
+                      <a:tailEnd type="none" w="med" len="med"/>
+                    </a:lnT>
+                    <a:lnB w="6350" cap="flat" cmpd="sng" algn="ctr">
+                      <a:solidFill>
+                        <a:srgbClr val="DDE5E8"/>
+                      </a:solidFill>
+                      <a:prstDash val="solid"/>
+                      <a:round/>
+                      <a:headEnd type="none" w="med" len="med"/>
+                      <a:tailEnd type="none" w="med" len="med"/>
+                    </a:lnB>
+                    <a:solidFill>
+                      <a:srgbClr val="E4F0F0"/>
+                    </a:solidFill>
+                  </a:tcPr>
+                </a:tc>
+                <a:tc>
+                  <a:txBody>
+                    <a:bodyPr/>
+                    <a:lstStyle/>
+                    <a:p>
+                      <a:pPr algn="ctr" indent="0" marL="0">
+                        <a:buNone/>
+                      </a:pPr>
+                      <a:r>
+                        <a:rPr lang="en-US" sz="1150" dirty="0">
+                          <a:solidFill>
+                            <a:srgbClr val="16252C"/>
+                          </a:solidFill>
+                          <a:latin typeface="微软雅黑" pitchFamily="34" charset="0"/>
+                          <a:ea typeface="微软雅黑" pitchFamily="34" charset="-122"/>
+                          <a:cs typeface="微软雅黑" pitchFamily="34" charset="-120"/>
+                        </a:rPr>
+                        <a:t>0</a:t>
+                      </a:r>
+                      <a:endParaRPr lang="en-US" sz="1150" dirty="0">
+                        <a:latin typeface="微软雅黑" charset="0"/>
+                        <a:ea typeface="微软雅黑" charset="0"/>
+                        <a:cs typeface="微软雅黑" charset="0"/>
+                      </a:endParaRPr>
+                    </a:p>
+                  </a:txBody>
+                  <a:tcPr marL="91440" marR="91440" marT="45720" marB="45720" anchor="ctr">
+                    <a:lnL w="6350" cap="flat" cmpd="sng" algn="ctr">
+                      <a:solidFill>
+                        <a:srgbClr val="DDE5E8"/>
+                      </a:solidFill>
+                      <a:prstDash val="solid"/>
+                      <a:round/>
+                      <a:headEnd type="none" w="med" len="med"/>
+                      <a:tailEnd type="none" w="med" len="med"/>
+                    </a:lnL>
+                    <a:lnR w="6350" cap="flat" cmpd="sng" algn="ctr">
+                      <a:solidFill>
+                        <a:srgbClr val="DDE5E8"/>
+                      </a:solidFill>
+                      <a:prstDash val="solid"/>
+                      <a:round/>
+                      <a:headEnd type="none" w="med" len="med"/>
+                      <a:tailEnd type="none" w="med" len="med"/>
+                    </a:lnR>
+                    <a:lnT w="6350" cap="flat" cmpd="sng" algn="ctr">
+                      <a:solidFill>
+                        <a:srgbClr val="DDE5E8"/>
+                      </a:solidFill>
+                      <a:prstDash val="solid"/>
+                      <a:round/>
+                      <a:headEnd type="none" w="med" len="med"/>
+                      <a:tailEnd type="none" w="med" len="med"/>
+                    </a:lnT>
+                    <a:lnB w="6350" cap="flat" cmpd="sng" algn="ctr">
+                      <a:solidFill>
+                        <a:srgbClr val="DDE5E8"/>
+                      </a:solidFill>
+                      <a:prstDash val="solid"/>
+                      <a:round/>
+                      <a:headEnd type="none" w="med" len="med"/>
+                      <a:tailEnd type="none" w="med" len="med"/>
+                    </a:lnB>
+                  </a:tcPr>
+                </a:tc>
+              </a:tr>
+              <a:tr h="384048">
+                <a:tc>
+                  <a:txBody>
+                    <a:bodyPr/>
+                    <a:lstStyle/>
+                    <a:p>
+                      <a:pPr algn="ctr" indent="0" marL="0">
+                        <a:buNone/>
+                      </a:pPr>
+                      <a:r>
+                        <a:rPr lang="en-US" sz="1150" dirty="0">
+                          <a:solidFill>
+                            <a:srgbClr val="16252C"/>
+                          </a:solidFill>
+                          <a:latin typeface="微软雅黑" pitchFamily="34" charset="0"/>
+                          <a:ea typeface="微软雅黑" pitchFamily="34" charset="-122"/>
+                          <a:cs typeface="微软雅黑" pitchFamily="34" charset="-120"/>
+                        </a:rPr>
+                        <a:t>2</a:t>
+                      </a:r>
+                      <a:endParaRPr lang="en-US" sz="1150" dirty="0">
+                        <a:latin typeface="微软雅黑" charset="0"/>
+                        <a:ea typeface="微软雅黑" charset="0"/>
+                        <a:cs typeface="微软雅黑" charset="0"/>
+                      </a:endParaRPr>
+                    </a:p>
+                  </a:txBody>
+                  <a:tcPr marL="91440" marR="91440" marT="45720" marB="45720" anchor="ctr">
+                    <a:lnL w="6350" cap="flat" cmpd="sng" algn="ctr">
+                      <a:solidFill>
+                        <a:srgbClr val="DDE5E8"/>
+                      </a:solidFill>
+                      <a:prstDash val="solid"/>
+                      <a:round/>
+                      <a:headEnd type="none" w="med" len="med"/>
+                      <a:tailEnd type="none" w="med" len="med"/>
+                    </a:lnL>
+                    <a:lnR w="6350" cap="flat" cmpd="sng" algn="ctr">
+                      <a:solidFill>
+                        <a:srgbClr val="DDE5E8"/>
+                      </a:solidFill>
+                      <a:prstDash val="solid"/>
+                      <a:round/>
+                      <a:headEnd type="none" w="med" len="med"/>
+                      <a:tailEnd type="none" w="med" len="med"/>
+                    </a:lnR>
+                    <a:lnT w="6350" cap="flat" cmpd="sng" algn="ctr">
+                      <a:solidFill>
+                        <a:srgbClr val="DDE5E8"/>
+                      </a:solidFill>
+                      <a:prstDash val="solid"/>
+                      <a:round/>
+                      <a:headEnd type="none" w="med" len="med"/>
+                      <a:tailEnd type="none" w="med" len="med"/>
+                    </a:lnT>
+                    <a:lnB w="6350" cap="flat" cmpd="sng" algn="ctr">
+                      <a:solidFill>
+                        <a:srgbClr val="DDE5E8"/>
+                      </a:solidFill>
+                      <a:prstDash val="solid"/>
+                      <a:round/>
+                      <a:headEnd type="none" w="med" len="med"/>
+                      <a:tailEnd type="none" w="med" len="med"/>
+                    </a:lnB>
+                  </a:tcPr>
+                </a:tc>
+                <a:tc>
+                  <a:txBody>
+                    <a:bodyPr/>
+                    <a:lstStyle/>
+                    <a:p>
+                      <a:pPr algn="ctr" indent="0" marL="0">
+                        <a:buNone/>
+                      </a:pPr>
+                      <a:r>
+                        <a:rPr lang="en-US" sz="1150" b="1" dirty="0">
+                          <a:solidFill>
+                            <a:srgbClr val="16252C"/>
+                          </a:solidFill>
+                          <a:latin typeface="微软雅黑" pitchFamily="34" charset="0"/>
+                          <a:ea typeface="微软雅黑" pitchFamily="34" charset="-122"/>
+                          <a:cs typeface="微软雅黑" pitchFamily="34" charset="-120"/>
+                        </a:rPr>
+                        <a:t>5</a:t>
+                      </a:r>
+                      <a:endParaRPr lang="en-US" sz="1150" dirty="0">
+                        <a:latin typeface="微软雅黑" charset="0"/>
+                        <a:ea typeface="微软雅黑" charset="0"/>
+                        <a:cs typeface="微软雅黑" charset="0"/>
+                      </a:endParaRPr>
+                    </a:p>
+                  </a:txBody>
+                  <a:tcPr marL="91440" marR="91440" marT="45720" marB="45720" anchor="ctr">
+                    <a:lnL w="6350" cap="flat" cmpd="sng" algn="ctr">
+                      <a:solidFill>
+                        <a:srgbClr val="DDE5E8"/>
+                      </a:solidFill>
+                      <a:prstDash val="solid"/>
+                      <a:round/>
+                      <a:headEnd type="none" w="med" len="med"/>
+                      <a:tailEnd type="none" w="med" len="med"/>
+                    </a:lnL>
+                    <a:lnR w="6350" cap="flat" cmpd="sng" algn="ctr">
+                      <a:solidFill>
+                        <a:srgbClr val="DDE5E8"/>
+                      </a:solidFill>
+                      <a:prstDash val="solid"/>
+                      <a:round/>
+                      <a:headEnd type="none" w="med" len="med"/>
+                      <a:tailEnd type="none" w="med" len="med"/>
+                    </a:lnR>
+                    <a:lnT w="6350" cap="flat" cmpd="sng" algn="ctr">
+                      <a:solidFill>
+                        <a:srgbClr val="DDE5E8"/>
+                      </a:solidFill>
+                      <a:prstDash val="solid"/>
+                      <a:round/>
+                      <a:headEnd type="none" w="med" len="med"/>
+                      <a:tailEnd type="none" w="med" len="med"/>
+                    </a:lnT>
+                    <a:lnB w="6350" cap="flat" cmpd="sng" algn="ctr">
+                      <a:solidFill>
+                        <a:srgbClr val="DDE5E8"/>
+                      </a:solidFill>
+                      <a:prstDash val="solid"/>
+                      <a:round/>
+                      <a:headEnd type="none" w="med" len="med"/>
+                      <a:tailEnd type="none" w="med" len="med"/>
+                    </a:lnB>
+                    <a:solidFill>
+                      <a:srgbClr val="E4F0F0"/>
+                    </a:solidFill>
+                  </a:tcPr>
+                </a:tc>
+                <a:tc>
+                  <a:txBody>
+                    <a:bodyPr/>
+                    <a:lstStyle/>
+                    <a:p>
+                      <a:pPr algn="ctr" indent="0" marL="0">
+                        <a:buNone/>
+                      </a:pPr>
+                      <a:r>
+                        <a:rPr lang="en-US" sz="1150" dirty="0">
+                          <a:solidFill>
+                            <a:srgbClr val="16252C"/>
+                          </a:solidFill>
+                          <a:latin typeface="微软雅黑" pitchFamily="34" charset="0"/>
+                          <a:ea typeface="微软雅黑" pitchFamily="34" charset="-122"/>
+                          <a:cs typeface="微软雅黑" pitchFamily="34" charset="-120"/>
+                        </a:rPr>
+                        <a:t>0</a:t>
+                      </a:r>
+                      <a:endParaRPr lang="en-US" sz="1150" dirty="0">
+                        <a:latin typeface="微软雅黑" charset="0"/>
+                        <a:ea typeface="微软雅黑" charset="0"/>
+                        <a:cs typeface="微软雅黑" charset="0"/>
+                      </a:endParaRPr>
+                    </a:p>
+                  </a:txBody>
+                  <a:tcPr marL="91440" marR="91440" marT="45720" marB="45720" anchor="ctr">
+                    <a:lnL w="6350" cap="flat" cmpd="sng" algn="ctr">
+                      <a:solidFill>
+                        <a:srgbClr val="DDE5E8"/>
+                      </a:solidFill>
+                      <a:prstDash val="solid"/>
+                      <a:round/>
+                      <a:headEnd type="none" w="med" len="med"/>
+                      <a:tailEnd type="none" w="med" len="med"/>
+                    </a:lnL>
+                    <a:lnR w="6350" cap="flat" cmpd="sng" algn="ctr">
+                      <a:solidFill>
+                        <a:srgbClr val="DDE5E8"/>
+                      </a:solidFill>
+                      <a:prstDash val="solid"/>
+                      <a:round/>
+                      <a:headEnd type="none" w="med" len="med"/>
+                      <a:tailEnd type="none" w="med" len="med"/>
+                    </a:lnR>
+                    <a:lnT w="6350" cap="flat" cmpd="sng" algn="ctr">
+                      <a:solidFill>
+                        <a:srgbClr val="DDE5E8"/>
+                      </a:solidFill>
+                      <a:prstDash val="solid"/>
+                      <a:round/>
+                      <a:headEnd type="none" w="med" len="med"/>
+                      <a:tailEnd type="none" w="med" len="med"/>
+                    </a:lnT>
+                    <a:lnB w="6350" cap="flat" cmpd="sng" algn="ctr">
+                      <a:solidFill>
+                        <a:srgbClr val="DDE5E8"/>
+                      </a:solidFill>
+                      <a:prstDash val="solid"/>
+                      <a:round/>
+                      <a:headEnd type="none" w="med" len="med"/>
+                      <a:tailEnd type="none" w="med" len="med"/>
+                    </a:lnB>
+                  </a:tcPr>
+                </a:tc>
+              </a:tr>
+              <a:tr h="384048">
+                <a:tc>
+                  <a:txBody>
+                    <a:bodyPr/>
+                    <a:lstStyle/>
+                    <a:p>
+                      <a:pPr algn="ctr" indent="0" marL="0">
+                        <a:buNone/>
+                      </a:pPr>
+                      <a:r>
+                        <a:rPr lang="en-US" sz="1150" dirty="0">
+                          <a:solidFill>
+                            <a:srgbClr val="16252C"/>
+                          </a:solidFill>
+                          <a:latin typeface="微软雅黑" pitchFamily="34" charset="0"/>
+                          <a:ea typeface="微软雅黑" pitchFamily="34" charset="-122"/>
+                          <a:cs typeface="微软雅黑" pitchFamily="34" charset="-120"/>
+                        </a:rPr>
+                        <a:t>3</a:t>
+                      </a:r>
+                      <a:endParaRPr lang="en-US" sz="1150" dirty="0">
+                        <a:latin typeface="微软雅黑" charset="0"/>
+                        <a:ea typeface="微软雅黑" charset="0"/>
+                        <a:cs typeface="微软雅黑" charset="0"/>
+                      </a:endParaRPr>
+                    </a:p>
+                  </a:txBody>
+                  <a:tcPr marL="91440" marR="91440" marT="45720" marB="45720" anchor="ctr">
+                    <a:lnL w="6350" cap="flat" cmpd="sng" algn="ctr">
+                      <a:solidFill>
+                        <a:srgbClr val="DDE5E8"/>
+                      </a:solidFill>
+                      <a:prstDash val="solid"/>
+                      <a:round/>
+                      <a:headEnd type="none" w="med" len="med"/>
+                      <a:tailEnd type="none" w="med" len="med"/>
+                    </a:lnL>
+                    <a:lnR w="6350" cap="flat" cmpd="sng" algn="ctr">
+                      <a:solidFill>
+                        <a:srgbClr val="DDE5E8"/>
+                      </a:solidFill>
+                      <a:prstDash val="solid"/>
+                      <a:round/>
+                      <a:headEnd type="none" w="med" len="med"/>
+                      <a:tailEnd type="none" w="med" len="med"/>
+                    </a:lnR>
+                    <a:lnT w="6350" cap="flat" cmpd="sng" algn="ctr">
+                      <a:solidFill>
+                        <a:srgbClr val="DDE5E8"/>
+                      </a:solidFill>
+                      <a:prstDash val="solid"/>
+                      <a:round/>
+                      <a:headEnd type="none" w="med" len="med"/>
+                      <a:tailEnd type="none" w="med" len="med"/>
+                    </a:lnT>
+                    <a:lnB w="6350" cap="flat" cmpd="sng" algn="ctr">
+                      <a:solidFill>
+                        <a:srgbClr val="DDE5E8"/>
+                      </a:solidFill>
+                      <a:prstDash val="solid"/>
+                      <a:round/>
+                      <a:headEnd type="none" w="med" len="med"/>
+                      <a:tailEnd type="none" w="med" len="med"/>
+                    </a:lnB>
+                  </a:tcPr>
+                </a:tc>
+                <a:tc>
+                  <a:txBody>
+                    <a:bodyPr/>
+                    <a:lstStyle/>
+                    <a:p>
+                      <a:pPr algn="ctr" indent="0" marL="0">
+                        <a:buNone/>
+                      </a:pPr>
+                      <a:r>
+                        <a:rPr lang="en-US" sz="1150" dirty="0">
+                          <a:solidFill>
+                            <a:srgbClr val="16252C"/>
+                          </a:solidFill>
+                          <a:latin typeface="微软雅黑" pitchFamily="34" charset="0"/>
+                          <a:ea typeface="微软雅黑" pitchFamily="34" charset="-122"/>
+                          <a:cs typeface="微软雅黑" pitchFamily="34" charset="-120"/>
+                        </a:rPr>
+                        <a:t>0</a:t>
+                      </a:r>
+                      <a:endParaRPr lang="en-US" sz="1150" dirty="0">
+                        <a:latin typeface="微软雅黑" charset="0"/>
+                        <a:ea typeface="微软雅黑" charset="0"/>
+                        <a:cs typeface="微软雅黑" charset="0"/>
+                      </a:endParaRPr>
+                    </a:p>
+                  </a:txBody>
+                  <a:tcPr marL="91440" marR="91440" marT="45720" marB="45720" anchor="ctr">
+                    <a:lnL w="6350" cap="flat" cmpd="sng" algn="ctr">
+                      <a:solidFill>
+                        <a:srgbClr val="DDE5E8"/>
+                      </a:solidFill>
+                      <a:prstDash val="solid"/>
+                      <a:round/>
+                      <a:headEnd type="none" w="med" len="med"/>
+                      <a:tailEnd type="none" w="med" len="med"/>
+                    </a:lnL>
+                    <a:lnR w="6350" cap="flat" cmpd="sng" algn="ctr">
+                      <a:solidFill>
+                        <a:srgbClr val="DDE5E8"/>
+                      </a:solidFill>
+                      <a:prstDash val="solid"/>
+                      <a:round/>
+                      <a:headEnd type="none" w="med" len="med"/>
+                      <a:tailEnd type="none" w="med" len="med"/>
+                    </a:lnR>
+                    <a:lnT w="6350" cap="flat" cmpd="sng" algn="ctr">
+                      <a:solidFill>
+                        <a:srgbClr val="DDE5E8"/>
+                      </a:solidFill>
+                      <a:prstDash val="solid"/>
+                      <a:round/>
+                      <a:headEnd type="none" w="med" len="med"/>
+                      <a:tailEnd type="none" w="med" len="med"/>
+                    </a:lnT>
+                    <a:lnB w="6350" cap="flat" cmpd="sng" algn="ctr">
+                      <a:solidFill>
+                        <a:srgbClr val="DDE5E8"/>
+                      </a:solidFill>
+                      <a:prstDash val="solid"/>
+                      <a:round/>
+                      <a:headEnd type="none" w="med" len="med"/>
+                      <a:tailEnd type="none" w="med" len="med"/>
+                    </a:lnB>
+                  </a:tcPr>
+                </a:tc>
+                <a:tc>
+                  <a:txBody>
+                    <a:bodyPr/>
+                    <a:lstStyle/>
+                    <a:p>
+                      <a:pPr algn="ctr" indent="0" marL="0">
+                        <a:buNone/>
+                      </a:pPr>
+                      <a:r>
+                        <a:rPr lang="en-US" sz="1150" b="1" dirty="0">
+                          <a:solidFill>
+                            <a:srgbClr val="D2603A"/>
+                          </a:solidFill>
+                          <a:latin typeface="微软雅黑" pitchFamily="34" charset="0"/>
+                          <a:ea typeface="微软雅黑" pitchFamily="34" charset="-122"/>
+                          <a:cs typeface="微软雅黑" pitchFamily="34" charset="-120"/>
+                        </a:rPr>
+                        <a:t>8</a:t>
+                      </a:r>
+                      <a:endParaRPr lang="en-US" sz="1150" dirty="0">
+                        <a:latin typeface="微软雅黑" charset="0"/>
+                        <a:ea typeface="微软雅黑" charset="0"/>
+                        <a:cs typeface="微软雅黑" charset="0"/>
+                      </a:endParaRPr>
+                    </a:p>
+                  </a:txBody>
+                  <a:tcPr marL="91440" marR="91440" marT="45720" marB="45720" anchor="ctr">
+                    <a:lnL w="6350" cap="flat" cmpd="sng" algn="ctr">
+                      <a:solidFill>
+                        <a:srgbClr val="DDE5E8"/>
+                      </a:solidFill>
+                      <a:prstDash val="solid"/>
+                      <a:round/>
+                      <a:headEnd type="none" w="med" len="med"/>
+                      <a:tailEnd type="none" w="med" len="med"/>
+                    </a:lnL>
+                    <a:lnR w="6350" cap="flat" cmpd="sng" algn="ctr">
+                      <a:solidFill>
+                        <a:srgbClr val="DDE5E8"/>
+                      </a:solidFill>
+                      <a:prstDash val="solid"/>
+                      <a:round/>
+                      <a:headEnd type="none" w="med" len="med"/>
+                      <a:tailEnd type="none" w="med" len="med"/>
+                    </a:lnR>
+                    <a:lnT w="6350" cap="flat" cmpd="sng" algn="ctr">
+                      <a:solidFill>
+                        <a:srgbClr val="DDE5E8"/>
+                      </a:solidFill>
+                      <a:prstDash val="solid"/>
+                      <a:round/>
+                      <a:headEnd type="none" w="med" len="med"/>
+                      <a:tailEnd type="none" w="med" len="med"/>
+                    </a:lnT>
+                    <a:lnB w="6350" cap="flat" cmpd="sng" algn="ctr">
+                      <a:solidFill>
+                        <a:srgbClr val="DDE5E8"/>
+                      </a:solidFill>
+                      <a:prstDash val="solid"/>
+                      <a:round/>
+                      <a:headEnd type="none" w="med" len="med"/>
+                      <a:tailEnd type="none" w="med" len="med"/>
+                    </a:lnB>
+                    <a:solidFill>
+                      <a:srgbClr val="FBEDE7"/>
+                    </a:solidFill>
+                  </a:tcPr>
+                </a:tc>
+              </a:tr>
+              <a:tr h="384048">
+                <a:tc>
+                  <a:txBody>
+                    <a:bodyPr/>
+                    <a:lstStyle/>
+                    <a:p>
+                      <a:pPr algn="ctr" indent="0" marL="0">
+                        <a:buNone/>
+                      </a:pPr>
+                      <a:r>
+                        <a:rPr lang="en-US" sz="1150" dirty="0">
+                          <a:solidFill>
+                            <a:srgbClr val="16252C"/>
+                          </a:solidFill>
+                          <a:latin typeface="微软雅黑" pitchFamily="34" charset="0"/>
+                          <a:ea typeface="微软雅黑" pitchFamily="34" charset="-122"/>
+                          <a:cs typeface="微软雅黑" pitchFamily="34" charset="-120"/>
+                        </a:rPr>
+                        <a:t>4</a:t>
+                      </a:r>
+                      <a:endParaRPr lang="en-US" sz="1150" dirty="0">
+                        <a:latin typeface="微软雅黑" charset="0"/>
+                        <a:ea typeface="微软雅黑" charset="0"/>
+                        <a:cs typeface="微软雅黑" charset="0"/>
+                      </a:endParaRPr>
+                    </a:p>
+                  </a:txBody>
+                  <a:tcPr marL="91440" marR="91440" marT="45720" marB="45720" anchor="ctr">
+                    <a:lnL w="6350" cap="flat" cmpd="sng" algn="ctr">
+                      <a:solidFill>
+                        <a:srgbClr val="DDE5E8"/>
+                      </a:solidFill>
+                      <a:prstDash val="solid"/>
+                      <a:round/>
+                      <a:headEnd type="none" w="med" len="med"/>
+                      <a:tailEnd type="none" w="med" len="med"/>
+                    </a:lnL>
+                    <a:lnR w="6350" cap="flat" cmpd="sng" algn="ctr">
+                      <a:solidFill>
+                        <a:srgbClr val="DDE5E8"/>
+                      </a:solidFill>
+                      <a:prstDash val="solid"/>
+                      <a:round/>
+                      <a:headEnd type="none" w="med" len="med"/>
+                      <a:tailEnd type="none" w="med" len="med"/>
+                    </a:lnR>
+                    <a:lnT w="6350" cap="flat" cmpd="sng" algn="ctr">
+                      <a:solidFill>
+                        <a:srgbClr val="DDE5E8"/>
+                      </a:solidFill>
+                      <a:prstDash val="solid"/>
+                      <a:round/>
+                      <a:headEnd type="none" w="med" len="med"/>
+                      <a:tailEnd type="none" w="med" len="med"/>
+                    </a:lnT>
+                    <a:lnB w="6350" cap="flat" cmpd="sng" algn="ctr">
+                      <a:solidFill>
+                        <a:srgbClr val="DDE5E8"/>
+                      </a:solidFill>
+                      <a:prstDash val="solid"/>
+                      <a:round/>
+                      <a:headEnd type="none" w="med" len="med"/>
+                      <a:tailEnd type="none" w="med" len="med"/>
+                    </a:lnB>
+                  </a:tcPr>
+                </a:tc>
+                <a:tc>
+                  <a:txBody>
+                    <a:bodyPr/>
+                    <a:lstStyle/>
+                    <a:p>
+                      <a:pPr algn="ctr" indent="0" marL="0">
+                        <a:buNone/>
+                      </a:pPr>
+                      <a:r>
+                        <a:rPr lang="en-US" sz="1150" dirty="0">
+                          <a:solidFill>
+                            <a:srgbClr val="16252C"/>
+                          </a:solidFill>
+                          <a:latin typeface="微软雅黑" pitchFamily="34" charset="0"/>
+                          <a:ea typeface="微软雅黑" pitchFamily="34" charset="-122"/>
+                          <a:cs typeface="微软雅黑" pitchFamily="34" charset="-120"/>
+                        </a:rPr>
+                        <a:t>0</a:t>
+                      </a:r>
+                      <a:endParaRPr lang="en-US" sz="1150" dirty="0">
+                        <a:latin typeface="微软雅黑" charset="0"/>
+                        <a:ea typeface="微软雅黑" charset="0"/>
+                        <a:cs typeface="微软雅黑" charset="0"/>
+                      </a:endParaRPr>
+                    </a:p>
+                  </a:txBody>
+                  <a:tcPr marL="91440" marR="91440" marT="45720" marB="45720" anchor="ctr">
+                    <a:lnL w="6350" cap="flat" cmpd="sng" algn="ctr">
+                      <a:solidFill>
+                        <a:srgbClr val="DDE5E8"/>
+                      </a:solidFill>
+                      <a:prstDash val="solid"/>
+                      <a:round/>
+                      <a:headEnd type="none" w="med" len="med"/>
+                      <a:tailEnd type="none" w="med" len="med"/>
+                    </a:lnL>
+                    <a:lnR w="6350" cap="flat" cmpd="sng" algn="ctr">
+                      <a:solidFill>
+                        <a:srgbClr val="DDE5E8"/>
+                      </a:solidFill>
+                      <a:prstDash val="solid"/>
+                      <a:round/>
+                      <a:headEnd type="none" w="med" len="med"/>
+                      <a:tailEnd type="none" w="med" len="med"/>
+                    </a:lnR>
+                    <a:lnT w="6350" cap="flat" cmpd="sng" algn="ctr">
+                      <a:solidFill>
+                        <a:srgbClr val="DDE5E8"/>
+                      </a:solidFill>
+                      <a:prstDash val="solid"/>
+                      <a:round/>
+                      <a:headEnd type="none" w="med" len="med"/>
+                      <a:tailEnd type="none" w="med" len="med"/>
+                    </a:lnT>
+                    <a:lnB w="6350" cap="flat" cmpd="sng" algn="ctr">
+                      <a:solidFill>
+                        <a:srgbClr val="DDE5E8"/>
+                      </a:solidFill>
+                      <a:prstDash val="solid"/>
+                      <a:round/>
+                      <a:headEnd type="none" w="med" len="med"/>
+                      <a:tailEnd type="none" w="med" len="med"/>
+                    </a:lnB>
+                  </a:tcPr>
+                </a:tc>
+                <a:tc>
+                  <a:txBody>
+                    <a:bodyPr/>
+                    <a:lstStyle/>
+                    <a:p>
+                      <a:pPr algn="ctr" indent="0" marL="0">
+                        <a:buNone/>
+                      </a:pPr>
+                      <a:r>
+                        <a:rPr lang="en-US" sz="1150" b="1" dirty="0">
+                          <a:solidFill>
+                            <a:srgbClr val="D2603A"/>
+                          </a:solidFill>
+                          <a:latin typeface="微软雅黑" pitchFamily="34" charset="0"/>
+                          <a:ea typeface="微软雅黑" pitchFamily="34" charset="-122"/>
+                          <a:cs typeface="微软雅黑" pitchFamily="34" charset="-120"/>
+                        </a:rPr>
+                        <a:t>8</a:t>
+                      </a:r>
+                      <a:endParaRPr lang="en-US" sz="1150" dirty="0">
+                        <a:latin typeface="微软雅黑" charset="0"/>
+                        <a:ea typeface="微软雅黑" charset="0"/>
+                        <a:cs typeface="微软雅黑" charset="0"/>
+                      </a:endParaRPr>
+                    </a:p>
+                  </a:txBody>
+                  <a:tcPr marL="91440" marR="91440" marT="45720" marB="45720" anchor="ctr">
+                    <a:lnL w="6350" cap="flat" cmpd="sng" algn="ctr">
+                      <a:solidFill>
+                        <a:srgbClr val="DDE5E8"/>
+                      </a:solidFill>
+                      <a:prstDash val="solid"/>
+                      <a:round/>
+                      <a:headEnd type="none" w="med" len="med"/>
+                      <a:tailEnd type="none" w="med" len="med"/>
+                    </a:lnL>
+                    <a:lnR w="6350" cap="flat" cmpd="sng" algn="ctr">
+                      <a:solidFill>
+                        <a:srgbClr val="DDE5E8"/>
+                      </a:solidFill>
+                      <a:prstDash val="solid"/>
+                      <a:round/>
+                      <a:headEnd type="none" w="med" len="med"/>
+                      <a:tailEnd type="none" w="med" len="med"/>
+                    </a:lnR>
+                    <a:lnT w="6350" cap="flat" cmpd="sng" algn="ctr">
+                      <a:solidFill>
+                        <a:srgbClr val="DDE5E8"/>
+                      </a:solidFill>
+                      <a:prstDash val="solid"/>
+                      <a:round/>
+                      <a:headEnd type="none" w="med" len="med"/>
+                      <a:tailEnd type="none" w="med" len="med"/>
+                    </a:lnT>
+                    <a:lnB w="6350" cap="flat" cmpd="sng" algn="ctr">
+                      <a:solidFill>
+                        <a:srgbClr val="DDE5E8"/>
+                      </a:solidFill>
+                      <a:prstDash val="solid"/>
+                      <a:round/>
+                      <a:headEnd type="none" w="med" len="med"/>
+                      <a:tailEnd type="none" w="med" len="med"/>
+                    </a:lnB>
+                    <a:solidFill>
+                      <a:srgbClr val="FBEDE7"/>
+                    </a:solidFill>
+                  </a:tcPr>
+                </a:tc>
+              </a:tr>
+              <a:tr h="384048">
+                <a:tc>
+                  <a:txBody>
+                    <a:bodyPr/>
+                    <a:lstStyle/>
+                    <a:p>
+                      <a:pPr algn="ctr" indent="0" marL="0">
+                        <a:buNone/>
+                      </a:pPr>
+                      <a:r>
+                        <a:rPr lang="en-US" sz="1150" dirty="0">
+                          <a:solidFill>
+                            <a:srgbClr val="16252C"/>
+                          </a:solidFill>
+                          <a:latin typeface="微软雅黑" pitchFamily="34" charset="0"/>
+                          <a:ea typeface="微软雅黑" pitchFamily="34" charset="-122"/>
+                          <a:cs typeface="微软雅黑" pitchFamily="34" charset="-120"/>
+                        </a:rPr>
+                        <a:t>5</a:t>
+                      </a:r>
+                      <a:endParaRPr lang="en-US" sz="1150" dirty="0">
+                        <a:latin typeface="微软雅黑" charset="0"/>
+                        <a:ea typeface="微软雅黑" charset="0"/>
+                        <a:cs typeface="微软雅黑" charset="0"/>
+                      </a:endParaRPr>
+                    </a:p>
+                  </a:txBody>
+                  <a:tcPr marL="91440" marR="91440" marT="45720" marB="45720" anchor="ctr">
+                    <a:lnL w="6350" cap="flat" cmpd="sng" algn="ctr">
+                      <a:solidFill>
+                        <a:srgbClr val="DDE5E8"/>
+                      </a:solidFill>
+                      <a:prstDash val="solid"/>
+                      <a:round/>
+                      <a:headEnd type="none" w="med" len="med"/>
+                      <a:tailEnd type="none" w="med" len="med"/>
+                    </a:lnL>
+                    <a:lnR w="6350" cap="flat" cmpd="sng" algn="ctr">
+                      <a:solidFill>
+                        <a:srgbClr val="DDE5E8"/>
+                      </a:solidFill>
+                      <a:prstDash val="solid"/>
+                      <a:round/>
+                      <a:headEnd type="none" w="med" len="med"/>
+                      <a:tailEnd type="none" w="med" len="med"/>
+                    </a:lnR>
+                    <a:lnT w="6350" cap="flat" cmpd="sng" algn="ctr">
+                      <a:solidFill>
+                        <a:srgbClr val="DDE5E8"/>
+                      </a:solidFill>
+                      <a:prstDash val="solid"/>
+                      <a:round/>
+                      <a:headEnd type="none" w="med" len="med"/>
+                      <a:tailEnd type="none" w="med" len="med"/>
+                    </a:lnT>
+                    <a:lnB w="6350" cap="flat" cmpd="sng" algn="ctr">
+                      <a:solidFill>
+                        <a:srgbClr val="DDE5E8"/>
+                      </a:solidFill>
+                      <a:prstDash val="solid"/>
+                      <a:round/>
+                      <a:headEnd type="none" w="med" len="med"/>
+                      <a:tailEnd type="none" w="med" len="med"/>
+                    </a:lnB>
+                  </a:tcPr>
+                </a:tc>
+                <a:tc>
+                  <a:txBody>
+                    <a:bodyPr/>
+                    <a:lstStyle/>
+                    <a:p>
+                      <a:pPr algn="ctr" indent="0" marL="0">
+                        <a:buNone/>
+                      </a:pPr>
+                      <a:r>
+                        <a:rPr lang="en-US" sz="1150" dirty="0">
+                          <a:solidFill>
+                            <a:srgbClr val="16252C"/>
+                          </a:solidFill>
+                          <a:latin typeface="微软雅黑" pitchFamily="34" charset="0"/>
+                          <a:ea typeface="微软雅黑" pitchFamily="34" charset="-122"/>
+                          <a:cs typeface="微软雅黑" pitchFamily="34" charset="-120"/>
+                        </a:rPr>
+                        <a:t>0</a:t>
+                      </a:r>
+                      <a:endParaRPr lang="en-US" sz="1150" dirty="0">
+                        <a:latin typeface="微软雅黑" charset="0"/>
+                        <a:ea typeface="微软雅黑" charset="0"/>
+                        <a:cs typeface="微软雅黑" charset="0"/>
+                      </a:endParaRPr>
+                    </a:p>
+                  </a:txBody>
+                  <a:tcPr marL="91440" marR="91440" marT="45720" marB="45720" anchor="ctr">
+                    <a:lnL w="6350" cap="flat" cmpd="sng" algn="ctr">
+                      <a:solidFill>
+                        <a:srgbClr val="DDE5E8"/>
+                      </a:solidFill>
+                      <a:prstDash val="solid"/>
+                      <a:round/>
+                      <a:headEnd type="none" w="med" len="med"/>
+                      <a:tailEnd type="none" w="med" len="med"/>
+                    </a:lnL>
+                    <a:lnR w="6350" cap="flat" cmpd="sng" algn="ctr">
+                      <a:solidFill>
+                        <a:srgbClr val="DDE5E8"/>
+                      </a:solidFill>
+                      <a:prstDash val="solid"/>
+                      <a:round/>
+                      <a:headEnd type="none" w="med" len="med"/>
+                      <a:tailEnd type="none" w="med" len="med"/>
+                    </a:lnR>
+                    <a:lnT w="6350" cap="flat" cmpd="sng" algn="ctr">
+                      <a:solidFill>
+                        <a:srgbClr val="DDE5E8"/>
+                      </a:solidFill>
+                      <a:prstDash val="solid"/>
+                      <a:round/>
+                      <a:headEnd type="none" w="med" len="med"/>
+                      <a:tailEnd type="none" w="med" len="med"/>
+                    </a:lnT>
+                    <a:lnB w="6350" cap="flat" cmpd="sng" algn="ctr">
+                      <a:solidFill>
+                        <a:srgbClr val="DDE5E8"/>
+                      </a:solidFill>
+                      <a:prstDash val="solid"/>
+                      <a:round/>
+                      <a:headEnd type="none" w="med" len="med"/>
+                      <a:tailEnd type="none" w="med" len="med"/>
+                    </a:lnB>
+                  </a:tcPr>
+                </a:tc>
+                <a:tc>
+                  <a:txBody>
+                    <a:bodyPr/>
+                    <a:lstStyle/>
+                    <a:p>
+                      <a:pPr algn="ctr" indent="0" marL="0">
+                        <a:buNone/>
+                      </a:pPr>
+                      <a:r>
+                        <a:rPr lang="en-US" sz="1150" b="1" dirty="0">
+                          <a:solidFill>
+                            <a:srgbClr val="D2603A"/>
+                          </a:solidFill>
+                          <a:latin typeface="微软雅黑" pitchFamily="34" charset="0"/>
+                          <a:ea typeface="微软雅黑" pitchFamily="34" charset="-122"/>
+                          <a:cs typeface="微软雅黑" pitchFamily="34" charset="-120"/>
+                        </a:rPr>
+                        <a:t>8</a:t>
+                      </a:r>
+                      <a:endParaRPr lang="en-US" sz="1150" dirty="0">
+                        <a:latin typeface="微软雅黑" charset="0"/>
+                        <a:ea typeface="微软雅黑" charset="0"/>
+                        <a:cs typeface="微软雅黑" charset="0"/>
+                      </a:endParaRPr>
+                    </a:p>
+                  </a:txBody>
+                  <a:tcPr marL="91440" marR="91440" marT="45720" marB="45720" anchor="ctr">
+                    <a:lnL w="6350" cap="flat" cmpd="sng" algn="ctr">
+                      <a:solidFill>
+                        <a:srgbClr val="DDE5E8"/>
+                      </a:solidFill>
+                      <a:prstDash val="solid"/>
+                      <a:round/>
+                      <a:headEnd type="none" w="med" len="med"/>
+                      <a:tailEnd type="none" w="med" len="med"/>
+                    </a:lnL>
+                    <a:lnR w="6350" cap="flat" cmpd="sng" algn="ctr">
+                      <a:solidFill>
+                        <a:srgbClr val="DDE5E8"/>
+                      </a:solidFill>
+                      <a:prstDash val="solid"/>
+                      <a:round/>
+                      <a:headEnd type="none" w="med" len="med"/>
+                      <a:tailEnd type="none" w="med" len="med"/>
+                    </a:lnR>
+                    <a:lnT w="6350" cap="flat" cmpd="sng" algn="ctr">
+                      <a:solidFill>
+                        <a:srgbClr val="DDE5E8"/>
+                      </a:solidFill>
+                      <a:prstDash val="solid"/>
+                      <a:round/>
+                      <a:headEnd type="none" w="med" len="med"/>
+                      <a:tailEnd type="none" w="med" len="med"/>
+                    </a:lnT>
+                    <a:lnB w="6350" cap="flat" cmpd="sng" algn="ctr">
+                      <a:solidFill>
+                        <a:srgbClr val="DDE5E8"/>
+                      </a:solidFill>
+                      <a:prstDash val="solid"/>
+                      <a:round/>
+                      <a:headEnd type="none" w="med" len="med"/>
+                      <a:tailEnd type="none" w="med" len="med"/>
+                    </a:lnB>
+                    <a:solidFill>
+                      <a:srgbClr val="FBEDE7"/>
+                    </a:solidFill>
+                  </a:tcPr>
+                </a:tc>
+              </a:tr>
+              <a:tr h="384048">
+                <a:tc>
+                  <a:txBody>
+                    <a:bodyPr/>
+                    <a:lstStyle/>
+                    <a:p>
+                      <a:pPr algn="ctr" indent="0" marL="0">
+                        <a:buNone/>
+                      </a:pPr>
+                      <a:r>
+                        <a:rPr lang="en-US" sz="1150" dirty="0">
+                          <a:solidFill>
+                            <a:srgbClr val="16252C"/>
+                          </a:solidFill>
+                          <a:latin typeface="微软雅黑" pitchFamily="34" charset="0"/>
+                          <a:ea typeface="微软雅黑" pitchFamily="34" charset="-122"/>
+                          <a:cs typeface="微软雅黑" pitchFamily="34" charset="-120"/>
+                        </a:rPr>
+                        <a:t>6</a:t>
+                      </a:r>
+                      <a:endParaRPr lang="en-US" sz="1150" dirty="0">
+                        <a:latin typeface="微软雅黑" charset="0"/>
+                        <a:ea typeface="微软雅黑" charset="0"/>
+                        <a:cs typeface="微软雅黑" charset="0"/>
+                      </a:endParaRPr>
+                    </a:p>
+                  </a:txBody>
+                  <a:tcPr marL="91440" marR="91440" marT="45720" marB="45720" anchor="ctr">
+                    <a:lnL w="6350" cap="flat" cmpd="sng" algn="ctr">
+                      <a:solidFill>
+                        <a:srgbClr val="DDE5E8"/>
+                      </a:solidFill>
+                      <a:prstDash val="solid"/>
+                      <a:round/>
+                      <a:headEnd type="none" w="med" len="med"/>
+                      <a:tailEnd type="none" w="med" len="med"/>
+                    </a:lnL>
+                    <a:lnR w="6350" cap="flat" cmpd="sng" algn="ctr">
+                      <a:solidFill>
+                        <a:srgbClr val="DDE5E8"/>
+                      </a:solidFill>
+                      <a:prstDash val="solid"/>
+                      <a:round/>
+                      <a:headEnd type="none" w="med" len="med"/>
+                      <a:tailEnd type="none" w="med" len="med"/>
+                    </a:lnR>
+                    <a:lnT w="6350" cap="flat" cmpd="sng" algn="ctr">
+                      <a:solidFill>
+                        <a:srgbClr val="DDE5E8"/>
+                      </a:solidFill>
+                      <a:prstDash val="solid"/>
+                      <a:round/>
+                      <a:headEnd type="none" w="med" len="med"/>
+                      <a:tailEnd type="none" w="med" len="med"/>
+                    </a:lnT>
+                    <a:lnB w="6350" cap="flat" cmpd="sng" algn="ctr">
+                      <a:solidFill>
+                        <a:srgbClr val="DDE5E8"/>
+                      </a:solidFill>
+                      <a:prstDash val="solid"/>
+                      <a:round/>
+                      <a:headEnd type="none" w="med" len="med"/>
+                      <a:tailEnd type="none" w="med" len="med"/>
+                    </a:lnB>
+                  </a:tcPr>
+                </a:tc>
+                <a:tc>
+                  <a:txBody>
+                    <a:bodyPr/>
+                    <a:lstStyle/>
+                    <a:p>
+                      <a:pPr algn="ctr" indent="0" marL="0">
+                        <a:buNone/>
+                      </a:pPr>
+                      <a:r>
+                        <a:rPr lang="en-US" sz="1150" dirty="0">
+                          <a:solidFill>
+                            <a:srgbClr val="16252C"/>
+                          </a:solidFill>
+                          <a:latin typeface="微软雅黑" pitchFamily="34" charset="0"/>
+                          <a:ea typeface="微软雅黑" pitchFamily="34" charset="-122"/>
+                          <a:cs typeface="微软雅黑" pitchFamily="34" charset="-120"/>
+                        </a:rPr>
+                        <a:t>0</a:t>
+                      </a:r>
+                      <a:endParaRPr lang="en-US" sz="1150" dirty="0">
+                        <a:latin typeface="微软雅黑" charset="0"/>
+                        <a:ea typeface="微软雅黑" charset="0"/>
+                        <a:cs typeface="微软雅黑" charset="0"/>
+                      </a:endParaRPr>
+                    </a:p>
+                  </a:txBody>
+                  <a:tcPr marL="91440" marR="91440" marT="45720" marB="45720" anchor="ctr">
+                    <a:lnL w="6350" cap="flat" cmpd="sng" algn="ctr">
+                      <a:solidFill>
+                        <a:srgbClr val="DDE5E8"/>
+                      </a:solidFill>
+                      <a:prstDash val="solid"/>
+                      <a:round/>
+                      <a:headEnd type="none" w="med" len="med"/>
+                      <a:tailEnd type="none" w="med" len="med"/>
+                    </a:lnL>
+                    <a:lnR w="6350" cap="flat" cmpd="sng" algn="ctr">
+                      <a:solidFill>
+                        <a:srgbClr val="DDE5E8"/>
+                      </a:solidFill>
+                      <a:prstDash val="solid"/>
+                      <a:round/>
+                      <a:headEnd type="none" w="med" len="med"/>
+                      <a:tailEnd type="none" w="med" len="med"/>
+                    </a:lnR>
+                    <a:lnT w="6350" cap="flat" cmpd="sng" algn="ctr">
+                      <a:solidFill>
+                        <a:srgbClr val="DDE5E8"/>
+                      </a:solidFill>
+                      <a:prstDash val="solid"/>
+                      <a:round/>
+                      <a:headEnd type="none" w="med" len="med"/>
+                      <a:tailEnd type="none" w="med" len="med"/>
+                    </a:lnT>
+                    <a:lnB w="6350" cap="flat" cmpd="sng" algn="ctr">
+                      <a:solidFill>
+                        <a:srgbClr val="DDE5E8"/>
+                      </a:solidFill>
+                      <a:prstDash val="solid"/>
+                      <a:round/>
+                      <a:headEnd type="none" w="med" len="med"/>
+                      <a:tailEnd type="none" w="med" len="med"/>
+                    </a:lnB>
+                  </a:tcPr>
+                </a:tc>
+                <a:tc>
+                  <a:txBody>
+                    <a:bodyPr/>
+                    <a:lstStyle/>
+                    <a:p>
+                      <a:pPr algn="ctr" indent="0" marL="0">
+                        <a:buNone/>
+                      </a:pPr>
+                      <a:r>
+                        <a:rPr lang="en-US" sz="1150" b="1" dirty="0">
+                          <a:solidFill>
+                            <a:srgbClr val="D2603A"/>
+                          </a:solidFill>
+                          <a:latin typeface="微软雅黑" pitchFamily="34" charset="0"/>
+                          <a:ea typeface="微软雅黑" pitchFamily="34" charset="-122"/>
+                          <a:cs typeface="微软雅黑" pitchFamily="34" charset="-120"/>
+                        </a:rPr>
+                        <a:t>8</a:t>
+                      </a:r>
+                      <a:endParaRPr lang="en-US" sz="1150" dirty="0">
+                        <a:latin typeface="微软雅黑" charset="0"/>
+                        <a:ea typeface="微软雅黑" charset="0"/>
+                        <a:cs typeface="微软雅黑" charset="0"/>
+                      </a:endParaRPr>
+                    </a:p>
+                  </a:txBody>
+                  <a:tcPr marL="91440" marR="91440" marT="45720" marB="45720" anchor="ctr">
+                    <a:lnL w="6350" cap="flat" cmpd="sng" algn="ctr">
+                      <a:solidFill>
+                        <a:srgbClr val="DDE5E8"/>
+                      </a:solidFill>
+                      <a:prstDash val="solid"/>
+                      <a:round/>
+                      <a:headEnd type="none" w="med" len="med"/>
+                      <a:tailEnd type="none" w="med" len="med"/>
+                    </a:lnL>
+                    <a:lnR w="6350" cap="flat" cmpd="sng" algn="ctr">
+                      <a:solidFill>
+                        <a:srgbClr val="DDE5E8"/>
+                      </a:solidFill>
+                      <a:prstDash val="solid"/>
+                      <a:round/>
+                      <a:headEnd type="none" w="med" len="med"/>
+                      <a:tailEnd type="none" w="med" len="med"/>
+                    </a:lnR>
+                    <a:lnT w="6350" cap="flat" cmpd="sng" algn="ctr">
+                      <a:solidFill>
+                        <a:srgbClr val="DDE5E8"/>
+                      </a:solidFill>
+                      <a:prstDash val="solid"/>
+                      <a:round/>
+                      <a:headEnd type="none" w="med" len="med"/>
+                      <a:tailEnd type="none" w="med" len="med"/>
+                    </a:lnT>
+                    <a:lnB w="6350" cap="flat" cmpd="sng" algn="ctr">
+                      <a:solidFill>
+                        <a:srgbClr val="DDE5E8"/>
+                      </a:solidFill>
+                      <a:prstDash val="solid"/>
+                      <a:round/>
+                      <a:headEnd type="none" w="med" len="med"/>
+                      <a:tailEnd type="none" w="med" len="med"/>
+                    </a:lnB>
+                    <a:solidFill>
+                      <a:srgbClr val="FBEDE7"/>
+                    </a:solidFill>
+                  </a:tcPr>
+                </a:tc>
+              </a:tr>
+            </a:tbl>
+          </a:graphicData>
+        </a:graphic>
+      </p:graphicFrame>
+      <p:sp>
+        <p:nvSpPr>
+          <p:cNvPr id="8" name="Shape 5"/>
+          <p:cNvSpPr/>
+          <p:nvPr/>
+        </p:nvSpPr>
+        <p:spPr>
+          <a:xfrm>
+            <a:off x="5669280" y="1737360"/>
+            <a:ext cx="5943600" cy="1572768"/>
+          </a:xfrm>
+          <a:prstGeom prst="rect">
+            <a:avLst/>
+          </a:prstGeom>
+          <a:solidFill>
+            <a:srgbClr val="FBEDE7"/>
+          </a:solidFill>
+          <a:ln/>
+          <a:effectLst>
+            <a:outerShdw sx="100000" sy="100000" kx="0" ky="0" algn="bl" rotWithShape="0" blurRad="101600" dist="25400" dir="8100000">
+              <a:srgbClr val="000000">
+                <a:alpha val="10000"/>
+              </a:srgbClr>
+            </a:outerShdw>
+          </a:effectLst>
+        </p:spPr>
+      </p:sp>
+      <p:sp>
+        <p:nvSpPr>
+          <p:cNvPr id="9" name="Shape 6"/>
+          <p:cNvSpPr/>
+          <p:nvPr/>
+        </p:nvSpPr>
+        <p:spPr>
+          <a:xfrm>
+            <a:off x="5669280" y="1737360"/>
+            <a:ext cx="68580" cy="1572768"/>
+          </a:xfrm>
+          <a:prstGeom prst="rect">
+            <a:avLst/>
+          </a:prstGeom>
+          <a:solidFill>
+            <a:srgbClr val="D2603A"/>
+          </a:solidFill>
+          <a:ln/>
+        </p:spPr>
+      </p:sp>
+      <p:sp>
+        <p:nvSpPr>
+          <p:cNvPr id="10" name="Text 7"/>
+          <p:cNvSpPr/>
+          <p:nvPr/>
+        </p:nvSpPr>
+        <p:spPr>
+          <a:xfrm>
+            <a:off x="5925312" y="1883664"/>
+            <a:ext cx="5486400" cy="329184"/>
+          </a:xfrm>
+          <a:prstGeom prst="rect">
+            <a:avLst/>
+          </a:prstGeom>
+          <a:noFill/>
+          <a:ln/>
+        </p:spPr>
+        <p:txBody>
+          <a:bodyPr wrap="square" lIns="0" tIns="0" rIns="0" bIns="0" rtlCol="0" anchor="t"/>
+          <a:lstStyle/>
+          <a:p>
+            <a:pPr indent="0" marL="0">
+              <a:buNone/>
+            </a:pPr>
+            <a:r>
+              <a:rPr lang="en-US" sz="1400" b="1" dirty="0">
+                <a:solidFill>
+                  <a:srgbClr val="16252C"/>
+                </a:solidFill>
+                <a:latin typeface="微软雅黑" pitchFamily="34" charset="0"/>
+                <a:ea typeface="微软雅黑" pitchFamily="34" charset="-122"/>
+                <a:cs typeface="微软雅黑" pitchFamily="34" charset="-120"/>
+              </a:rPr>
+              <a:t>DNA 提取批次：独立且部分共线</a:t>
+            </a:r>
+            <a:endParaRPr lang="en-US" sz="1400" dirty="0"/>
+          </a:p>
+        </p:txBody>
+      </p:sp>
+      <p:sp>
+        <p:nvSpPr>
+          <p:cNvPr id="11" name="Text 8"/>
+          <p:cNvSpPr/>
+          <p:nvPr/>
+        </p:nvSpPr>
+        <p:spPr>
+          <a:xfrm>
+            <a:off x="5925312" y="2267712"/>
+            <a:ext cx="5486400" cy="914400"/>
+          </a:xfrm>
+          <a:prstGeom prst="rect">
+            <a:avLst/>
+          </a:prstGeom>
+          <a:noFill/>
+          <a:ln/>
+        </p:spPr>
+        <p:txBody>
+          <a:bodyPr wrap="square" lIns="0" tIns="0" rIns="0" bIns="0" rtlCol="0" anchor="t"/>
+          <a:lstStyle/>
+          <a:p>
+            <a:pPr indent="0" marL="0">
+              <a:lnSpc>
+                <a:spcPct val="112000"/>
+              </a:lnSpc>
+              <a:buNone/>
+            </a:pPr>
+            <a:r>
+              <a:rPr lang="en-US" sz="1100" dirty="0">
+                <a:solidFill>
+                  <a:srgbClr val="7A2E14"/>
+                </a:solidFill>
+                <a:latin typeface="微软雅黑" pitchFamily="34" charset="0"/>
+                <a:ea typeface="微软雅黑" pitchFamily="34" charset="-122"/>
+                <a:cs typeface="微软雅黑" pitchFamily="34" charset="-120"/>
+              </a:rPr>
+              <a:t>18-11-06 批次的 16 个样本全部为阳性。</a:t>
+            </a:r>
+            <a:endParaRPr lang="en-US" sz="1100" dirty="0"/>
+          </a:p>
+          <a:p>
+            <a:pPr indent="0" marL="0">
+              <a:lnSpc>
+                <a:spcPct val="112000"/>
+              </a:lnSpc>
+              <a:buNone/>
+            </a:pPr>
+            <a:endParaRPr lang="en-US" sz="1100" dirty="0"/>
+          </a:p>
+          <a:p>
+            <a:pPr indent="0" marL="0">
+              <a:lnSpc>
+                <a:spcPct val="112000"/>
+              </a:lnSpc>
+              <a:buNone/>
+            </a:pPr>
+            <a:r>
+              <a:rPr lang="en-US" sz="1100" dirty="0">
+                <a:solidFill>
+                  <a:srgbClr val="7A2E14"/>
+                </a:solidFill>
+                <a:latin typeface="微软雅黑" pitchFamily="34" charset="0"/>
+                <a:ea typeface="微软雅黑" pitchFamily="34" charset="-122"/>
+                <a:cs typeface="微软雅黑" pitchFamily="34" charset="-120"/>
+              </a:rPr>
+              <a:t>    菌群 → 预测提取批次              AUC 0.921</a:t>
+            </a:r>
+            <a:endParaRPr lang="en-US" sz="1100" dirty="0"/>
+          </a:p>
+          <a:p>
+            <a:pPr indent="0" marL="0">
+              <a:lnSpc>
+                <a:spcPct val="112000"/>
+              </a:lnSpc>
+              <a:buNone/>
+            </a:pPr>
+            <a:r>
+              <a:rPr lang="en-US" sz="1100" dirty="0">
+                <a:solidFill>
+                  <a:srgbClr val="7A2E14"/>
+                </a:solidFill>
+                <a:latin typeface="微软雅黑" pitchFamily="34" charset="0"/>
+                <a:ea typeface="微软雅黑" pitchFamily="34" charset="-122"/>
+                <a:cs typeface="微软雅黑" pitchFamily="34" charset="-120"/>
+              </a:rPr>
+              <a:t>    仅在阳性组内（感染状态固定）      AUC 0.940</a:t>
+            </a:r>
+            <a:endParaRPr lang="en-US" sz="1100" dirty="0"/>
+          </a:p>
+          <a:p>
+            <a:pPr indent="0" marL="0">
+              <a:lnSpc>
+                <a:spcPct val="112000"/>
+              </a:lnSpc>
+              <a:buNone/>
+            </a:pPr>
+            <a:endParaRPr lang="en-US" sz="1100" dirty="0"/>
+          </a:p>
+          <a:p>
+            <a:pPr indent="0" marL="0">
+              <a:lnSpc>
+                <a:spcPct val="112000"/>
+              </a:lnSpc>
+              <a:buNone/>
+            </a:pPr>
+            <a:r>
+              <a:rPr lang="en-US" sz="1100" dirty="0">
+                <a:solidFill>
+                  <a:srgbClr val="7A2E14"/>
+                </a:solidFill>
+                <a:latin typeface="微软雅黑" pitchFamily="34" charset="0"/>
+                <a:ea typeface="微软雅黑" pitchFamily="34" charset="-122"/>
+                <a:cs typeface="微软雅黑" pitchFamily="34" charset="-120"/>
+              </a:rPr>
+              <a:t>第二个数字是关键：固定标签后批次仍高度可预测。</a:t>
+            </a:r>
+            <a:endParaRPr lang="en-US" sz="1100" dirty="0"/>
+          </a:p>
+        </p:txBody>
+      </p:sp>
+      <p:sp>
+        <p:nvSpPr>
+          <p:cNvPr id="12" name="Shape 9"/>
+          <p:cNvSpPr/>
+          <p:nvPr/>
+        </p:nvSpPr>
+        <p:spPr>
+          <a:xfrm>
+            <a:off x="5669280" y="3493008"/>
+            <a:ext cx="5943600" cy="1243584"/>
+          </a:xfrm>
+          <a:prstGeom prst="rect">
+            <a:avLst/>
+          </a:prstGeom>
+          <a:solidFill>
+            <a:srgbClr val="FFFFFF"/>
+          </a:solidFill>
+          <a:ln/>
+          <a:effectLst>
+            <a:outerShdw sx="100000" sy="100000" kx="0" ky="0" algn="bl" rotWithShape="0" blurRad="101600" dist="25400" dir="8100000">
+              <a:srgbClr val="000000">
+                <a:alpha val="10000"/>
+              </a:srgbClr>
+            </a:outerShdw>
+          </a:effectLst>
+        </p:spPr>
+      </p:sp>
+      <p:sp>
+        <p:nvSpPr>
+          <p:cNvPr id="13" name="Shape 10"/>
+          <p:cNvSpPr/>
+          <p:nvPr/>
+        </p:nvSpPr>
+        <p:spPr>
+          <a:xfrm>
+            <a:off x="5669280" y="3493008"/>
+            <a:ext cx="68580" cy="1243584"/>
+          </a:xfrm>
+          <a:prstGeom prst="rect">
+            <a:avLst/>
+          </a:prstGeom>
+          <a:solidFill>
+            <a:srgbClr val="8FB996"/>
+          </a:solidFill>
+          <a:ln/>
+        </p:spPr>
+      </p:sp>
+      <p:sp>
+        <p:nvSpPr>
+          <p:cNvPr id="14" name="Text 11"/>
+          <p:cNvSpPr/>
+          <p:nvPr/>
+        </p:nvSpPr>
+        <p:spPr>
+          <a:xfrm>
+            <a:off x="5925312" y="3639312"/>
+            <a:ext cx="5486400" cy="329184"/>
+          </a:xfrm>
+          <a:prstGeom prst="rect">
+            <a:avLst/>
+          </a:prstGeom>
+          <a:noFill/>
+          <a:ln/>
+        </p:spPr>
+        <p:txBody>
+          <a:bodyPr wrap="square" lIns="0" tIns="0" rIns="0" bIns="0" rtlCol="0" anchor="t"/>
+          <a:lstStyle/>
+          <a:p>
+            <a:pPr indent="0" marL="0">
+              <a:buNone/>
+            </a:pPr>
+            <a:r>
+              <a:rPr lang="en-US" sz="1400" b="1" dirty="0">
+                <a:solidFill>
+                  <a:srgbClr val="16252C"/>
+                </a:solidFill>
+                <a:latin typeface="微软雅黑" pitchFamily="34" charset="0"/>
+                <a:ea typeface="微软雅黑" pitchFamily="34" charset="-122"/>
+                <a:cs typeface="微软雅黑" pitchFamily="34" charset="-120"/>
+              </a:rPr>
+              <a:t>阴性对照：性别 AUC 0.454</a:t>
+            </a:r>
+            <a:endParaRPr lang="en-US" sz="1400" dirty="0"/>
+          </a:p>
+        </p:txBody>
+      </p:sp>
+      <p:sp>
+        <p:nvSpPr>
+          <p:cNvPr id="15" name="Text 12"/>
+          <p:cNvSpPr/>
+          <p:nvPr/>
+        </p:nvSpPr>
+        <p:spPr>
+          <a:xfrm>
+            <a:off x="5925312" y="4023360"/>
+            <a:ext cx="5486400" cy="585216"/>
+          </a:xfrm>
+          <a:prstGeom prst="rect">
+            <a:avLst/>
+          </a:prstGeom>
+          <a:noFill/>
+          <a:ln/>
+        </p:spPr>
+        <p:txBody>
+          <a:bodyPr wrap="square" lIns="0" tIns="0" rIns="0" bIns="0" rtlCol="0" anchor="t"/>
+          <a:lstStyle/>
+          <a:p>
+            <a:pPr indent="0" marL="0">
+              <a:lnSpc>
+                <a:spcPct val="112000"/>
+              </a:lnSpc>
+              <a:buNone/>
+            </a:pPr>
+            <a:r>
+              <a:rPr lang="en-US" sz="1100" dirty="0">
+                <a:solidFill>
+                  <a:srgbClr val="5F7580"/>
+                </a:solidFill>
+                <a:latin typeface="微软雅黑" pitchFamily="34" charset="0"/>
+                <a:ea typeface="微软雅黑" pitchFamily="34" charset="-122"/>
+                <a:cs typeface="微软雅黑" pitchFamily="34" charset="-120"/>
+              </a:rPr>
+              <a:t>性别在两组间分布均衡，菌群预测它的 AUC 接近随机。同一套流程作用在无混杂的变量上就得不出信号——前面那些高 AUC 不是方法学假象。</a:t>
+            </a:r>
+            <a:endParaRPr lang="en-US" sz="1100" dirty="0"/>
+          </a:p>
+        </p:txBody>
+      </p:sp>
+      <p:sp>
+        <p:nvSpPr>
+          <p:cNvPr id="16" name="Shape 13"/>
+          <p:cNvSpPr/>
+          <p:nvPr/>
+        </p:nvSpPr>
+        <p:spPr>
+          <a:xfrm>
+            <a:off x="548640" y="4937760"/>
+            <a:ext cx="11064240" cy="868680"/>
+          </a:xfrm>
+          <a:prstGeom prst="rect">
+            <a:avLst/>
+          </a:prstGeom>
+          <a:solidFill>
+            <a:srgbClr val="FBEDE7"/>
+          </a:solidFill>
+          <a:ln/>
+        </p:spPr>
+      </p:sp>
+      <p:sp>
+        <p:nvSpPr>
+          <p:cNvPr id="17" name="Shape 14"/>
+          <p:cNvSpPr/>
+          <p:nvPr/>
+        </p:nvSpPr>
+        <p:spPr>
+          <a:xfrm>
+            <a:off x="548640" y="4937760"/>
+            <a:ext cx="68580" cy="868680"/>
+          </a:xfrm>
+          <a:prstGeom prst="rect">
+            <a:avLst/>
+          </a:prstGeom>
+          <a:solidFill>
+            <a:srgbClr val="D2603A"/>
+          </a:solidFill>
+          <a:ln/>
+        </p:spPr>
+      </p:sp>
+      <p:sp>
+        <p:nvSpPr>
+          <p:cNvPr id="18" name="Text 15"/>
+          <p:cNvSpPr/>
+          <p:nvPr/>
+        </p:nvSpPr>
+        <p:spPr>
+          <a:xfrm>
+            <a:off x="804672" y="5029200"/>
+            <a:ext cx="10607040" cy="685800"/>
+          </a:xfrm>
+          <a:prstGeom prst="rect">
+            <a:avLst/>
+          </a:prstGeom>
+          <a:noFill/>
+          <a:ln/>
+        </p:spPr>
+        <p:txBody>
+          <a:bodyPr wrap="square" lIns="0" tIns="0" rIns="0" bIns="0" rtlCol="0" anchor="t"/>
+          <a:lstStyle/>
+          <a:p>
+            <a:pPr indent="0" marL="0">
+              <a:lnSpc>
+                <a:spcPct val="110000"/>
+              </a:lnSpc>
+              <a:buNone/>
+            </a:pPr>
+            <a:r>
+              <a:rPr lang="en-US" sz="1200" dirty="0">
+                <a:solidFill>
+                  <a:srgbClr val="7A2E14"/>
+                </a:solidFill>
+                <a:latin typeface="微软雅黑" pitchFamily="34" charset="0"/>
+                <a:ea typeface="微软雅黑" pitchFamily="34" charset="-122"/>
+                <a:cs typeface="微软雅黑" pitchFamily="34" charset="-120"/>
+              </a:rPr>
+              <a:t>每个隔离器只含一种感染状态。这是实验设计使然（对照与感染必须分笼以防交叉感染），但代价是隔离器效应与感染效应在统计上不可分离——没有任何「同笼内既有阳性又有阴性」的样本可供拆解。</a:t>
+            </a:r>
+            <a:endParaRPr lang="en-US" sz="1200" dirty="0"/>
+          </a:p>
+        </p:txBody>
+      </p:sp>
+    </p:spTree>
+  </p:cSld>
+  <p:clrMapOvr>
+    <a:masterClrMapping/>
+  </p:clrMapOvr>
+</p:sld>
+</file>
+
+<file path=ppt/slides/slide14.xml><?xml version="1.0" encoding="utf-8"?>
+<p:sld xmlns:a="http://schemas.openxmlformats.org/drawingml/2006/main" xmlns:r="http://schemas.openxmlformats.org/officeDocument/2006/relationships" xmlns:p="http://schemas.openxmlformats.org/presentationml/2006/main">
+  <p:cSld name="Slide 14">
+    <p:bg>
+      <p:bgPr>
+        <a:solidFill>
+          <a:srgbClr val="FCFAF6"/>
+        </a:solidFill>
+      </p:bgPr>
+    </p:bg>
+    <p:spTree>
+      <p:nvGrpSpPr>
+        <p:cNvPr id="1" name=""/>
+        <p:cNvGrpSpPr/>
+        <p:nvPr/>
+      </p:nvGrpSpPr>
+      <p:grpSpPr>
+        <a:xfrm>
+          <a:off x="0" y="0"/>
+          <a:ext cx="0" cy="0"/>
+          <a:chOff x="0" y="0"/>
+          <a:chExt cx="0" cy="0"/>
+        </a:xfrm>
+      </p:grpSpPr>
+      <p:sp>
+        <p:nvSpPr>
+          <p:cNvPr id="2" name="Shape 0"/>
+          <p:cNvSpPr/>
+          <p:nvPr/>
+        </p:nvSpPr>
+        <p:spPr>
+          <a:xfrm>
+            <a:off x="0" y="0"/>
+            <a:ext cx="12191695" cy="54864"/>
+          </a:xfrm>
+          <a:prstGeom prst="rect">
+            <a:avLst/>
+          </a:prstGeom>
+          <a:solidFill>
+            <a:srgbClr val="18707F"/>
+          </a:solidFill>
+          <a:ln/>
+        </p:spPr>
+      </p:sp>
+      <p:sp>
+        <p:nvSpPr>
+          <p:cNvPr id="3" name="Text 1"/>
+          <p:cNvSpPr/>
+          <p:nvPr/>
+        </p:nvSpPr>
+        <p:spPr>
+          <a:xfrm>
+            <a:off x="548640" y="310896"/>
+            <a:ext cx="7315200" cy="256032"/>
+          </a:xfrm>
+          <a:prstGeom prst="rect">
+            <a:avLst/>
+          </a:prstGeom>
+          <a:noFill/>
+          <a:ln/>
+        </p:spPr>
+        <p:txBody>
+          <a:bodyPr wrap="square" lIns="0" tIns="0" rIns="0" bIns="0" rtlCol="0" anchor="ctr"/>
+          <a:lstStyle/>
+          <a:p>
+            <a:pPr indent="0" marL="0">
+              <a:buNone/>
+            </a:pPr>
+            <a:r>
+              <a:rPr lang="en-US" sz="1100" b="1" spc="200" kern="0" dirty="0">
+                <a:solidFill>
+                  <a:srgbClr val="18707F"/>
+                </a:solidFill>
+                <a:latin typeface="微软雅黑" pitchFamily="34" charset="0"/>
+                <a:ea typeface="微软雅黑" pitchFamily="34" charset="-122"/>
+                <a:cs typeface="微软雅黑" pitchFamily="34" charset="-120"/>
+              </a:rPr>
+              <a:t>混杂结构 · 决定性检验</a:t>
+            </a:r>
+            <a:endParaRPr lang="en-US" sz="1100" dirty="0"/>
+          </a:p>
+        </p:txBody>
+      </p:sp>
+      <p:sp>
+        <p:nvSpPr>
+          <p:cNvPr id="4" name="Text 2"/>
+          <p:cNvSpPr/>
+          <p:nvPr/>
+        </p:nvSpPr>
+        <p:spPr>
+          <a:xfrm>
+            <a:off x="548640" y="566928"/>
+            <a:ext cx="11064240" cy="685800"/>
+          </a:xfrm>
+          <a:prstGeom prst="rect">
+            <a:avLst/>
+          </a:prstGeom>
+          <a:noFill/>
+          <a:ln/>
+        </p:spPr>
+        <p:txBody>
+          <a:bodyPr wrap="square" lIns="0" tIns="0" rIns="0" bIns="0" rtlCol="0" anchor="ctr"/>
+          <a:lstStyle/>
+          <a:p>
+            <a:pPr indent="0" marL="0">
+              <a:buNone/>
+            </a:pPr>
+            <a:r>
+              <a:rPr lang="en-US" sz="3000" b="1" dirty="0">
+                <a:solidFill>
+                  <a:srgbClr val="16252C"/>
+                </a:solidFill>
+                <a:latin typeface="微软雅黑" pitchFamily="34" charset="0"/>
+                <a:ea typeface="微软雅黑" pitchFamily="34" charset="-122"/>
+                <a:cs typeface="微软雅黑" pitchFamily="34" charset="-120"/>
+              </a:rPr>
+              <a:t>纯笼效应与感染效应几乎同量级</a:t>
+            </a:r>
+            <a:endParaRPr lang="en-US" sz="3000" dirty="0"/>
+          </a:p>
+        </p:txBody>
+      </p:sp>
+      <p:sp>
+        <p:nvSpPr>
+          <p:cNvPr id="5" name="Text 3"/>
+          <p:cNvSpPr/>
+          <p:nvPr/>
+        </p:nvSpPr>
+        <p:spPr>
+          <a:xfrm>
+            <a:off x="11430000" y="6355080"/>
+            <a:ext cx="411480" cy="274320"/>
+          </a:xfrm>
+          <a:prstGeom prst="rect">
+            <a:avLst/>
+          </a:prstGeom>
+          <a:noFill/>
+          <a:ln/>
+        </p:spPr>
+        <p:txBody>
+          <a:bodyPr wrap="square" lIns="0" tIns="0" rIns="0" bIns="0" rtlCol="0" anchor="ctr"/>
+          <a:lstStyle/>
+          <a:p>
+            <a:pPr algn="r" indent="0" marL="0">
+              <a:buNone/>
+            </a:pPr>
+            <a:r>
+              <a:rPr lang="en-US" sz="1000" dirty="0">
+                <a:solidFill>
+                  <a:srgbClr val="5F7580"/>
+                </a:solidFill>
+                <a:latin typeface="微软雅黑" pitchFamily="34" charset="0"/>
+                <a:ea typeface="微软雅黑" pitchFamily="34" charset="-122"/>
+                <a:cs typeface="微软雅黑" pitchFamily="34" charset="-120"/>
+              </a:rPr>
+              <a:t>14</a:t>
+            </a:r>
+            <a:endParaRPr lang="en-US" sz="1000" dirty="0"/>
+          </a:p>
+        </p:txBody>
+      </p:sp>
+      <p:sp>
+        <p:nvSpPr>
+          <p:cNvPr id="6" name="Text 4"/>
+          <p:cNvSpPr/>
+          <p:nvPr/>
+        </p:nvSpPr>
+        <p:spPr>
+          <a:xfrm>
+            <a:off x="548640" y="1298448"/>
+            <a:ext cx="11064240" cy="320040"/>
+          </a:xfrm>
+          <a:prstGeom prst="rect">
+            <a:avLst/>
+          </a:prstGeom>
+          <a:noFill/>
+          <a:ln/>
+        </p:spPr>
+        <p:txBody>
+          <a:bodyPr wrap="square" lIns="0" tIns="0" rIns="0" bIns="0" rtlCol="0" anchor="ctr"/>
+          <a:lstStyle/>
+          <a:p>
+            <a:pPr indent="0" marL="0">
+              <a:buNone/>
+            </a:pPr>
+            <a:r>
+              <a:rPr lang="en-US" sz="1250" dirty="0">
+                <a:solidFill>
+                  <a:srgbClr val="5F7580"/>
+                </a:solidFill>
+                <a:latin typeface="微软雅黑" pitchFamily="34" charset="0"/>
+                <a:ea typeface="微软雅黑" pitchFamily="34" charset="-122"/>
+                <a:cs typeface="微软雅黑" pitchFamily="34" charset="-120"/>
+              </a:rPr>
+              <a:t>共线不代表无法量化。CKPA 占据隔离器 3 与 4，因此在 3 vs 4 的对比中，毒株、批次、感染状态全部固定，只有笼号不同。</a:t>
+            </a:r>
+            <a:endParaRPr lang="en-US" sz="1250" dirty="0"/>
+          </a:p>
+        </p:txBody>
+      </p:sp>
+      <p:graphicFrame>
+        <p:nvGraphicFramePr>
+          <p:cNvPr id="15" name="Table 0"/>
+          <p:cNvGraphicFramePr>
+            <a:graphicFrameLocks noGrp="1"/>
+          </p:cNvGraphicFramePr>
+          <p:nvPr>
+            <p:extLst>
+              <p:ext uri="{D42A27DB-BD31-4B8C-83A1-F6EECF244321}">
+                <p14:modId xmlns:p14="http://schemas.microsoft.com/office/powerpoint/2010/main" val="1579011935"/>
+              </p:ext>
+            </p:extLst>
+          </p:nvPr>
+        </p:nvGraphicFramePr>
+        <p:xfrm>
+          <a:off x="548640" y="1755648"/>
+          <a:ext cx="11064240" cy="914400"/>
+        </p:xfrm>
+        <a:graphic>
+          <a:graphicData uri="http://schemas.openxmlformats.org/drawingml/2006/table">
+            <a:tbl>
+              <a:tblPr/>
+              <a:tblGrid>
+                <a:gridCol w="2286000"/>
+                <a:gridCol w="3749040"/>
+                <a:gridCol w="914400"/>
+                <a:gridCol w="1554480"/>
+                <a:gridCol w="1645920"/>
+                <a:gridCol w="914400"/>
+              </a:tblGrid>
+              <a:tr h="420624">
+                <a:tc>
+                  <a:txBody>
+                    <a:bodyPr/>
+                    <a:lstStyle/>
+                    <a:p>
+                      <a:pPr algn="ctr" indent="0" marL="0">
+                        <a:buNone/>
+                      </a:pPr>
+                      <a:r>
+                        <a:rPr lang="en-US" sz="1100" b="1" dirty="0">
+                          <a:solidFill>
+                            <a:srgbClr val="FFFFFF"/>
+                          </a:solidFill>
+                          <a:latin typeface="微软雅黑" pitchFamily="34" charset="0"/>
+                          <a:ea typeface="微软雅黑" pitchFamily="34" charset="-122"/>
+                          <a:cs typeface="微软雅黑" pitchFamily="34" charset="-120"/>
+                        </a:rPr>
+                        <a:t>对比</a:t>
+                      </a:r>
+                      <a:endParaRPr lang="en-US" sz="1100" dirty="0">
+                        <a:latin typeface="微软雅黑" charset="0"/>
+                        <a:ea typeface="微软雅黑" charset="0"/>
+                        <a:cs typeface="微软雅黑" charset="0"/>
+                      </a:endParaRPr>
+                    </a:p>
+                  </a:txBody>
+                  <a:tcPr marL="91440" marR="91440" marT="45720" marB="45720" anchor="ctr">
+                    <a:lnL w="6350" cap="flat" cmpd="sng" algn="ctr">
+                      <a:solidFill>
+                        <a:srgbClr val="DDE5E8"/>
+                      </a:solidFill>
+                      <a:prstDash val="solid"/>
+                      <a:round/>
+                      <a:headEnd type="none" w="med" len="med"/>
+                      <a:tailEnd type="none" w="med" len="med"/>
+                    </a:lnL>
+                    <a:lnR w="6350" cap="flat" cmpd="sng" algn="ctr">
+                      <a:solidFill>
+                        <a:srgbClr val="DDE5E8"/>
+                      </a:solidFill>
+                      <a:prstDash val="solid"/>
+                      <a:round/>
+                      <a:headEnd type="none" w="med" len="med"/>
+                      <a:tailEnd type="none" w="med" len="med"/>
+                    </a:lnR>
+                    <a:lnT w="6350" cap="flat" cmpd="sng" algn="ctr">
+                      <a:solidFill>
+                        <a:srgbClr val="DDE5E8"/>
+                      </a:solidFill>
+                      <a:prstDash val="solid"/>
+                      <a:round/>
+                      <a:headEnd type="none" w="med" len="med"/>
+                      <a:tailEnd type="none" w="med" len="med"/>
+                    </a:lnT>
+                    <a:lnB w="6350" cap="flat" cmpd="sng" algn="ctr">
+                      <a:solidFill>
+                        <a:srgbClr val="DDE5E8"/>
+                      </a:solidFill>
+                      <a:prstDash val="solid"/>
+                      <a:round/>
+                      <a:headEnd type="none" w="med" len="med"/>
+                      <a:tailEnd type="none" w="med" len="med"/>
+                    </a:lnB>
+                    <a:solidFill>
+                      <a:srgbClr val="0B3C49"/>
+                    </a:solidFill>
+                  </a:tcPr>
+                </a:tc>
+                <a:tc>
+                  <a:txBody>
+                    <a:bodyPr/>
+                    <a:lstStyle/>
+                    <a:p>
+                      <a:pPr algn="ctr" indent="0" marL="0">
+                        <a:buNone/>
+                      </a:pPr>
+                      <a:r>
+                        <a:rPr lang="en-US" sz="1100" b="1" dirty="0">
+                          <a:solidFill>
+                            <a:srgbClr val="FFFFFF"/>
+                          </a:solidFill>
+                          <a:latin typeface="微软雅黑" pitchFamily="34" charset="0"/>
+                          <a:ea typeface="微软雅黑" pitchFamily="34" charset="-122"/>
+                          <a:cs typeface="微软雅黑" pitchFamily="34" charset="-120"/>
+                        </a:rPr>
+                        <a:t>固定条件</a:t>
+                      </a:r>
+                      <a:endParaRPr lang="en-US" sz="1100" dirty="0">
+                        <a:latin typeface="微软雅黑" charset="0"/>
+                        <a:ea typeface="微软雅黑" charset="0"/>
+                        <a:cs typeface="微软雅黑" charset="0"/>
+                      </a:endParaRPr>
+                    </a:p>
+                  </a:txBody>
+                  <a:tcPr marL="91440" marR="91440" marT="45720" marB="45720" anchor="ctr">
+                    <a:lnL w="6350" cap="flat" cmpd="sng" algn="ctr">
+                      <a:solidFill>
+                        <a:srgbClr val="DDE5E8"/>
+                      </a:solidFill>
+                      <a:prstDash val="solid"/>
+                      <a:round/>
+                      <a:headEnd type="none" w="med" len="med"/>
+                      <a:tailEnd type="none" w="med" len="med"/>
+                    </a:lnL>
+                    <a:lnR w="6350" cap="flat" cmpd="sng" algn="ctr">
+                      <a:solidFill>
+                        <a:srgbClr val="DDE5E8"/>
+                      </a:solidFill>
+                      <a:prstDash val="solid"/>
+                      <a:round/>
+                      <a:headEnd type="none" w="med" len="med"/>
+                      <a:tailEnd type="none" w="med" len="med"/>
+                    </a:lnR>
+                    <a:lnT w="6350" cap="flat" cmpd="sng" algn="ctr">
+                      <a:solidFill>
+                        <a:srgbClr val="DDE5E8"/>
+                      </a:solidFill>
+                      <a:prstDash val="solid"/>
+                      <a:round/>
+                      <a:headEnd type="none" w="med" len="med"/>
+                      <a:tailEnd type="none" w="med" len="med"/>
+                    </a:lnT>
+                    <a:lnB w="6350" cap="flat" cmpd="sng" algn="ctr">
+                      <a:solidFill>
+                        <a:srgbClr val="DDE5E8"/>
+                      </a:solidFill>
+                      <a:prstDash val="solid"/>
+                      <a:round/>
+                      <a:headEnd type="none" w="med" len="med"/>
+                      <a:tailEnd type="none" w="med" len="med"/>
+                    </a:lnB>
+                    <a:solidFill>
+                      <a:srgbClr val="0B3C49"/>
+                    </a:solidFill>
+                  </a:tcPr>
+                </a:tc>
+                <a:tc>
+                  <a:txBody>
+                    <a:bodyPr/>
+                    <a:lstStyle/>
+                    <a:p>
+                      <a:pPr algn="ctr" indent="0" marL="0">
+                        <a:buNone/>
+                      </a:pPr>
+                      <a:r>
+                        <a:rPr lang="en-US" sz="1100" b="1" dirty="0">
+                          <a:solidFill>
+                            <a:srgbClr val="FFFFFF"/>
+                          </a:solidFill>
+                          <a:latin typeface="微软雅黑" pitchFamily="34" charset="0"/>
+                          <a:ea typeface="微软雅黑" pitchFamily="34" charset="-122"/>
+                          <a:cs typeface="微软雅黑" pitchFamily="34" charset="-120"/>
+                        </a:rPr>
+                        <a:t>n</a:t>
+                      </a:r>
+                      <a:endParaRPr lang="en-US" sz="1100" dirty="0">
+                        <a:latin typeface="微软雅黑" charset="0"/>
+                        <a:ea typeface="微软雅黑" charset="0"/>
+                        <a:cs typeface="微软雅黑" charset="0"/>
+                      </a:endParaRPr>
+                    </a:p>
+                  </a:txBody>
+                  <a:tcPr marL="91440" marR="91440" marT="45720" marB="45720" anchor="ctr">
+                    <a:lnL w="6350" cap="flat" cmpd="sng" algn="ctr">
+                      <a:solidFill>
+                        <a:srgbClr val="DDE5E8"/>
+                      </a:solidFill>
+                      <a:prstDash val="solid"/>
+                      <a:round/>
+                      <a:headEnd type="none" w="med" len="med"/>
+                      <a:tailEnd type="none" w="med" len="med"/>
+                    </a:lnL>
+                    <a:lnR w="6350" cap="flat" cmpd="sng" algn="ctr">
+                      <a:solidFill>
+                        <a:srgbClr val="DDE5E8"/>
+                      </a:solidFill>
+                      <a:prstDash val="solid"/>
+                      <a:round/>
+                      <a:headEnd type="none" w="med" len="med"/>
+                      <a:tailEnd type="none" w="med" len="med"/>
+                    </a:lnR>
+                    <a:lnT w="6350" cap="flat" cmpd="sng" algn="ctr">
+                      <a:solidFill>
+                        <a:srgbClr val="DDE5E8"/>
+                      </a:solidFill>
+                      <a:prstDash val="solid"/>
+                      <a:round/>
+                      <a:headEnd type="none" w="med" len="med"/>
+                      <a:tailEnd type="none" w="med" len="med"/>
+                    </a:lnT>
+                    <a:lnB w="6350" cap="flat" cmpd="sng" algn="ctr">
+                      <a:solidFill>
+                        <a:srgbClr val="DDE5E8"/>
+                      </a:solidFill>
+                      <a:prstDash val="solid"/>
+                      <a:round/>
+                      <a:headEnd type="none" w="med" len="med"/>
+                      <a:tailEnd type="none" w="med" len="med"/>
+                    </a:lnB>
+                    <a:solidFill>
+                      <a:srgbClr val="0B3C49"/>
+                    </a:solidFill>
+                  </a:tcPr>
+                </a:tc>
+                <a:tc>
+                  <a:txBody>
+                    <a:bodyPr/>
+                    <a:lstStyle/>
+                    <a:p>
+                      <a:pPr algn="ctr" indent="0" marL="0">
+                        <a:buNone/>
+                      </a:pPr>
+                      <a:r>
+                        <a:rPr lang="en-US" sz="1100" b="1" dirty="0">
+                          <a:solidFill>
+                            <a:srgbClr val="FFFFFF"/>
+                          </a:solidFill>
+                          <a:latin typeface="微软雅黑" pitchFamily="34" charset="0"/>
+                          <a:ea typeface="微软雅黑" pitchFamily="34" charset="-122"/>
+                          <a:cs typeface="微软雅黑" pitchFamily="34" charset="-120"/>
+                        </a:rPr>
+                        <a:t>AUC</a:t>
+                      </a:r>
+                      <a:endParaRPr lang="en-US" sz="1100" dirty="0">
+                        <a:latin typeface="微软雅黑" charset="0"/>
+                        <a:ea typeface="微软雅黑" charset="0"/>
+                        <a:cs typeface="微软雅黑" charset="0"/>
+                      </a:endParaRPr>
+                    </a:p>
+                  </a:txBody>
+                  <a:tcPr marL="91440" marR="91440" marT="45720" marB="45720" anchor="ctr">
+                    <a:lnL w="6350" cap="flat" cmpd="sng" algn="ctr">
+                      <a:solidFill>
+                        <a:srgbClr val="DDE5E8"/>
+                      </a:solidFill>
+                      <a:prstDash val="solid"/>
+                      <a:round/>
+                      <a:headEnd type="none" w="med" len="med"/>
+                      <a:tailEnd type="none" w="med" len="med"/>
+                    </a:lnL>
+                    <a:lnR w="6350" cap="flat" cmpd="sng" algn="ctr">
+                      <a:solidFill>
+                        <a:srgbClr val="DDE5E8"/>
+                      </a:solidFill>
+                      <a:prstDash val="solid"/>
+                      <a:round/>
+                      <a:headEnd type="none" w="med" len="med"/>
+                      <a:tailEnd type="none" w="med" len="med"/>
+                    </a:lnR>
+                    <a:lnT w="6350" cap="flat" cmpd="sng" algn="ctr">
+                      <a:solidFill>
+                        <a:srgbClr val="DDE5E8"/>
+                      </a:solidFill>
+                      <a:prstDash val="solid"/>
+                      <a:round/>
+                      <a:headEnd type="none" w="med" len="med"/>
+                      <a:tailEnd type="none" w="med" len="med"/>
+                    </a:lnT>
+                    <a:lnB w="6350" cap="flat" cmpd="sng" algn="ctr">
+                      <a:solidFill>
+                        <a:srgbClr val="DDE5E8"/>
+                      </a:solidFill>
+                      <a:prstDash val="solid"/>
+                      <a:round/>
+                      <a:headEnd type="none" w="med" len="med"/>
+                      <a:tailEnd type="none" w="med" len="med"/>
+                    </a:lnB>
+                    <a:solidFill>
+                      <a:srgbClr val="0B3C49"/>
+                    </a:solidFill>
+                  </a:tcPr>
+                </a:tc>
+                <a:tc>
+                  <a:txBody>
+                    <a:bodyPr/>
+                    <a:lstStyle/>
+                    <a:p>
+                      <a:pPr algn="ctr" indent="0" marL="0">
+                        <a:buNone/>
+                      </a:pPr>
+                      <a:r>
+                        <a:rPr lang="en-US" sz="1100" b="1" dirty="0">
+                          <a:solidFill>
+                            <a:srgbClr val="FFFFFF"/>
+                          </a:solidFill>
+                          <a:latin typeface="微软雅黑" pitchFamily="34" charset="0"/>
+                          <a:ea typeface="微软雅黑" pitchFamily="34" charset="-122"/>
+                          <a:cs typeface="微软雅黑" pitchFamily="34" charset="-120"/>
+                        </a:rPr>
+                        <a:t>零分布最大</a:t>
+                      </a:r>
+                      <a:endParaRPr lang="en-US" sz="1100" dirty="0">
+                        <a:latin typeface="微软雅黑" charset="0"/>
+                        <a:ea typeface="微软雅黑" charset="0"/>
+                        <a:cs typeface="微软雅黑" charset="0"/>
+                      </a:endParaRPr>
+                    </a:p>
+                  </a:txBody>
+                  <a:tcPr marL="91440" marR="91440" marT="45720" marB="45720" anchor="ctr">
+                    <a:lnL w="6350" cap="flat" cmpd="sng" algn="ctr">
+                      <a:solidFill>
+                        <a:srgbClr val="DDE5E8"/>
+                      </a:solidFill>
+                      <a:prstDash val="solid"/>
+                      <a:round/>
+                      <a:headEnd type="none" w="med" len="med"/>
+                      <a:tailEnd type="none" w="med" len="med"/>
+                    </a:lnL>
+                    <a:lnR w="6350" cap="flat" cmpd="sng" algn="ctr">
+                      <a:solidFill>
+                        <a:srgbClr val="DDE5E8"/>
+                      </a:solidFill>
+                      <a:prstDash val="solid"/>
+                      <a:round/>
+                      <a:headEnd type="none" w="med" len="med"/>
+                      <a:tailEnd type="none" w="med" len="med"/>
+                    </a:lnR>
+                    <a:lnT w="6350" cap="flat" cmpd="sng" algn="ctr">
+                      <a:solidFill>
+                        <a:srgbClr val="DDE5E8"/>
+                      </a:solidFill>
+                      <a:prstDash val="solid"/>
+                      <a:round/>
+                      <a:headEnd type="none" w="med" len="med"/>
+                      <a:tailEnd type="none" w="med" len="med"/>
+                    </a:lnT>
+                    <a:lnB w="6350" cap="flat" cmpd="sng" algn="ctr">
+                      <a:solidFill>
+                        <a:srgbClr val="DDE5E8"/>
+                      </a:solidFill>
+                      <a:prstDash val="solid"/>
+                      <a:round/>
+                      <a:headEnd type="none" w="med" len="med"/>
+                      <a:tailEnd type="none" w="med" len="med"/>
+                    </a:lnB>
+                    <a:solidFill>
+                      <a:srgbClr val="0B3C49"/>
+                    </a:solidFill>
+                  </a:tcPr>
+                </a:tc>
+                <a:tc>
+                  <a:txBody>
+                    <a:bodyPr/>
+                    <a:lstStyle/>
+                    <a:p>
+                      <a:pPr algn="ctr" indent="0" marL="0">
+                        <a:buNone/>
+                      </a:pPr>
+                      <a:r>
+                        <a:rPr lang="en-US" sz="1100" b="1" dirty="0">
+                          <a:solidFill>
+                            <a:srgbClr val="FFFFFF"/>
+                          </a:solidFill>
+                          <a:latin typeface="微软雅黑" pitchFamily="34" charset="0"/>
+                          <a:ea typeface="微软雅黑" pitchFamily="34" charset="-122"/>
+                          <a:cs typeface="微软雅黑" pitchFamily="34" charset="-120"/>
+                        </a:rPr>
+                        <a:t>p</a:t>
+                      </a:r>
+                      <a:endParaRPr lang="en-US" sz="1100" dirty="0">
+                        <a:latin typeface="微软雅黑" charset="0"/>
+                        <a:ea typeface="微软雅黑" charset="0"/>
+                        <a:cs typeface="微软雅黑" charset="0"/>
+                      </a:endParaRPr>
+                    </a:p>
+                  </a:txBody>
+                  <a:tcPr marL="91440" marR="91440" marT="45720" marB="45720" anchor="ctr">
+                    <a:lnL w="6350" cap="flat" cmpd="sng" algn="ctr">
+                      <a:solidFill>
+                        <a:srgbClr val="DDE5E8"/>
+                      </a:solidFill>
+                      <a:prstDash val="solid"/>
+                      <a:round/>
+                      <a:headEnd type="none" w="med" len="med"/>
+                      <a:tailEnd type="none" w="med" len="med"/>
+                    </a:lnL>
+                    <a:lnR w="6350" cap="flat" cmpd="sng" algn="ctr">
+                      <a:solidFill>
+                        <a:srgbClr val="DDE5E8"/>
+                      </a:solidFill>
+                      <a:prstDash val="solid"/>
+                      <a:round/>
+                      <a:headEnd type="none" w="med" len="med"/>
+                      <a:tailEnd type="none" w="med" len="med"/>
+                    </a:lnR>
+                    <a:lnT w="6350" cap="flat" cmpd="sng" algn="ctr">
+                      <a:solidFill>
+                        <a:srgbClr val="DDE5E8"/>
+                      </a:solidFill>
+                      <a:prstDash val="solid"/>
+                      <a:round/>
+                      <a:headEnd type="none" w="med" len="med"/>
+                      <a:tailEnd type="none" w="med" len="med"/>
+                    </a:lnT>
+                    <a:lnB w="6350" cap="flat" cmpd="sng" algn="ctr">
+                      <a:solidFill>
+                        <a:srgbClr val="DDE5E8"/>
+                      </a:solidFill>
+                      <a:prstDash val="solid"/>
+                      <a:round/>
+                      <a:headEnd type="none" w="med" len="med"/>
+                      <a:tailEnd type="none" w="med" len="med"/>
+                    </a:lnB>
+                    <a:solidFill>
+                      <a:srgbClr val="0B3C49"/>
+                    </a:solidFill>
+                  </a:tcPr>
+                </a:tc>
+              </a:tr>
+              <a:tr h="420624">
+                <a:tc>
+                  <a:txBody>
+                    <a:bodyPr/>
+                    <a:lstStyle/>
+                    <a:p>
+                      <a:pPr algn="ctr" indent="0" marL="0">
+                        <a:buNone/>
+                      </a:pPr>
+                      <a:r>
+                        <a:rPr lang="en-US" sz="1150" dirty="0">
+                          <a:solidFill>
+                            <a:srgbClr val="16252C"/>
+                          </a:solidFill>
+                          <a:latin typeface="微软雅黑" pitchFamily="34" charset="0"/>
+                          <a:ea typeface="微软雅黑" pitchFamily="34" charset="-122"/>
+                          <a:cs typeface="微软雅黑" pitchFamily="34" charset="-120"/>
+                        </a:rPr>
+                        <a:t>隔离器 3 vs 4</a:t>
+                      </a:r>
+                      <a:endParaRPr lang="en-US" sz="1150" dirty="0">
+                        <a:latin typeface="微软雅黑" charset="0"/>
+                        <a:ea typeface="微软雅黑" charset="0"/>
+                        <a:cs typeface="微软雅黑" charset="0"/>
+                      </a:endParaRPr>
+                    </a:p>
+                  </a:txBody>
+                  <a:tcPr marL="91440" marR="91440" marT="45720" marB="45720" anchor="ctr">
+                    <a:lnL w="6350" cap="flat" cmpd="sng" algn="ctr">
+                      <a:solidFill>
+                        <a:srgbClr val="DDE5E8"/>
+                      </a:solidFill>
+                      <a:prstDash val="solid"/>
+                      <a:round/>
+                      <a:headEnd type="none" w="med" len="med"/>
+                      <a:tailEnd type="none" w="med" len="med"/>
+                    </a:lnL>
+                    <a:lnR w="6350" cap="flat" cmpd="sng" algn="ctr">
+                      <a:solidFill>
+                        <a:srgbClr val="DDE5E8"/>
+                      </a:solidFill>
+                      <a:prstDash val="solid"/>
+                      <a:round/>
+                      <a:headEnd type="none" w="med" len="med"/>
+                      <a:tailEnd type="none" w="med" len="med"/>
+                    </a:lnR>
+                    <a:lnT w="6350" cap="flat" cmpd="sng" algn="ctr">
+                      <a:solidFill>
+                        <a:srgbClr val="DDE5E8"/>
+                      </a:solidFill>
+                      <a:prstDash val="solid"/>
+                      <a:round/>
+                      <a:headEnd type="none" w="med" len="med"/>
+                      <a:tailEnd type="none" w="med" len="med"/>
+                    </a:lnT>
+                    <a:lnB w="6350" cap="flat" cmpd="sng" algn="ctr">
+                      <a:solidFill>
+                        <a:srgbClr val="DDE5E8"/>
+                      </a:solidFill>
+                      <a:prstDash val="solid"/>
+                      <a:round/>
+                      <a:headEnd type="none" w="med" len="med"/>
+                      <a:tailEnd type="none" w="med" len="med"/>
+                    </a:lnB>
+                  </a:tcPr>
+                </a:tc>
+                <a:tc>
+                  <a:txBody>
+                    <a:bodyPr/>
+                    <a:lstStyle/>
+                    <a:p>
+                      <a:pPr algn="ctr" indent="0" marL="0">
+                        <a:buNone/>
+                      </a:pPr>
+                      <a:r>
+                        <a:rPr lang="en-US" sz="1150" dirty="0">
+                          <a:solidFill>
+                            <a:srgbClr val="16252C"/>
+                          </a:solidFill>
+                          <a:latin typeface="微软雅黑" pitchFamily="34" charset="0"/>
+                          <a:ea typeface="微软雅黑" pitchFamily="34" charset="-122"/>
+                          <a:cs typeface="微软雅黑" pitchFamily="34" charset="-120"/>
+                        </a:rPr>
+                        <a:t>同 CKPA、同 10-30、同阳性</a:t>
+                      </a:r>
+                      <a:endParaRPr lang="en-US" sz="1150" dirty="0">
+                        <a:latin typeface="微软雅黑" charset="0"/>
+                        <a:ea typeface="微软雅黑" charset="0"/>
+                        <a:cs typeface="微软雅黑" charset="0"/>
+                      </a:endParaRPr>
+                    </a:p>
+                  </a:txBody>
+                  <a:tcPr marL="91440" marR="91440" marT="45720" marB="45720" anchor="ctr">
+                    <a:lnL w="6350" cap="flat" cmpd="sng" algn="ctr">
+                      <a:solidFill>
+                        <a:srgbClr val="DDE5E8"/>
+                      </a:solidFill>
+                      <a:prstDash val="solid"/>
+                      <a:round/>
+                      <a:headEnd type="none" w="med" len="med"/>
+                      <a:tailEnd type="none" w="med" len="med"/>
+                    </a:lnL>
+                    <a:lnR w="6350" cap="flat" cmpd="sng" algn="ctr">
+                      <a:solidFill>
+                        <a:srgbClr val="DDE5E8"/>
+                      </a:solidFill>
+                      <a:prstDash val="solid"/>
+                      <a:round/>
+                      <a:headEnd type="none" w="med" len="med"/>
+                      <a:tailEnd type="none" w="med" len="med"/>
+                    </a:lnR>
+                    <a:lnT w="6350" cap="flat" cmpd="sng" algn="ctr">
+                      <a:solidFill>
+                        <a:srgbClr val="DDE5E8"/>
+                      </a:solidFill>
+                      <a:prstDash val="solid"/>
+                      <a:round/>
+                      <a:headEnd type="none" w="med" len="med"/>
+                      <a:tailEnd type="none" w="med" len="med"/>
+                    </a:lnT>
+                    <a:lnB w="6350" cap="flat" cmpd="sng" algn="ctr">
+                      <a:solidFill>
+                        <a:srgbClr val="DDE5E8"/>
+                      </a:solidFill>
+                      <a:prstDash val="solid"/>
+                      <a:round/>
+                      <a:headEnd type="none" w="med" len="med"/>
+                      <a:tailEnd type="none" w="med" len="med"/>
+                    </a:lnB>
+                  </a:tcPr>
+                </a:tc>
+                <a:tc>
+                  <a:txBody>
+                    <a:bodyPr/>
+                    <a:lstStyle/>
+                    <a:p>
+                      <a:pPr algn="ctr" indent="0" marL="0">
+                        <a:buNone/>
+                      </a:pPr>
+                      <a:r>
+                        <a:rPr lang="en-US" sz="1150" dirty="0">
+                          <a:solidFill>
+                            <a:srgbClr val="16252C"/>
+                          </a:solidFill>
+                          <a:latin typeface="微软雅黑" pitchFamily="34" charset="0"/>
+                          <a:ea typeface="微软雅黑" pitchFamily="34" charset="-122"/>
+                          <a:cs typeface="微软雅黑" pitchFamily="34" charset="-120"/>
+                        </a:rPr>
+                        <a:t>16</a:t>
+                      </a:r>
+                      <a:endParaRPr lang="en-US" sz="1150" dirty="0">
+                        <a:latin typeface="微软雅黑" charset="0"/>
+                        <a:ea typeface="微软雅黑" charset="0"/>
+                        <a:cs typeface="微软雅黑" charset="0"/>
+                      </a:endParaRPr>
+                    </a:p>
+                  </a:txBody>
+                  <a:tcPr marL="91440" marR="91440" marT="45720" marB="45720" anchor="ctr">
+                    <a:lnL w="6350" cap="flat" cmpd="sng" algn="ctr">
+                      <a:solidFill>
+                        <a:srgbClr val="DDE5E8"/>
+                      </a:solidFill>
+                      <a:prstDash val="solid"/>
+                      <a:round/>
+                      <a:headEnd type="none" w="med" len="med"/>
+                      <a:tailEnd type="none" w="med" len="med"/>
+                    </a:lnL>
+                    <a:lnR w="6350" cap="flat" cmpd="sng" algn="ctr">
+                      <a:solidFill>
+                        <a:srgbClr val="DDE5E8"/>
+                      </a:solidFill>
+                      <a:prstDash val="solid"/>
+                      <a:round/>
+                      <a:headEnd type="none" w="med" len="med"/>
+                      <a:tailEnd type="none" w="med" len="med"/>
+                    </a:lnR>
+                    <a:lnT w="6350" cap="flat" cmpd="sng" algn="ctr">
+                      <a:solidFill>
+                        <a:srgbClr val="DDE5E8"/>
+                      </a:solidFill>
+                      <a:prstDash val="solid"/>
+                      <a:round/>
+                      <a:headEnd type="none" w="med" len="med"/>
+                      <a:tailEnd type="none" w="med" len="med"/>
+                    </a:lnT>
+                    <a:lnB w="6350" cap="flat" cmpd="sng" algn="ctr">
+                      <a:solidFill>
+                        <a:srgbClr val="DDE5E8"/>
+                      </a:solidFill>
+                      <a:prstDash val="solid"/>
+                      <a:round/>
+                      <a:headEnd type="none" w="med" len="med"/>
+                      <a:tailEnd type="none" w="med" len="med"/>
+                    </a:lnB>
+                  </a:tcPr>
+                </a:tc>
+                <a:tc>
+                  <a:txBody>
+                    <a:bodyPr/>
+                    <a:lstStyle/>
+                    <a:p>
+                      <a:pPr algn="ctr" indent="0" marL="0">
+                        <a:buNone/>
+                      </a:pPr>
+                      <a:r>
+                        <a:rPr lang="en-US" sz="1150" b="1" dirty="0">
+                          <a:solidFill>
+                            <a:srgbClr val="D2603A"/>
+                          </a:solidFill>
+                          <a:latin typeface="微软雅黑" pitchFamily="34" charset="0"/>
+                          <a:ea typeface="微软雅黑" pitchFamily="34" charset="-122"/>
+                          <a:cs typeface="微软雅黑" pitchFamily="34" charset="-120"/>
+                        </a:rPr>
+                        <a:t>0.919</a:t>
+                      </a:r>
+                      <a:endParaRPr lang="en-US" sz="1150" dirty="0">
+                        <a:latin typeface="微软雅黑" charset="0"/>
+                        <a:ea typeface="微软雅黑" charset="0"/>
+                        <a:cs typeface="微软雅黑" charset="0"/>
+                      </a:endParaRPr>
+                    </a:p>
+                  </a:txBody>
+                  <a:tcPr marL="91440" marR="91440" marT="45720" marB="45720" anchor="ctr">
+                    <a:lnL w="6350" cap="flat" cmpd="sng" algn="ctr">
+                      <a:solidFill>
+                        <a:srgbClr val="DDE5E8"/>
+                      </a:solidFill>
+                      <a:prstDash val="solid"/>
+                      <a:round/>
+                      <a:headEnd type="none" w="med" len="med"/>
+                      <a:tailEnd type="none" w="med" len="med"/>
+                    </a:lnL>
+                    <a:lnR w="6350" cap="flat" cmpd="sng" algn="ctr">
+                      <a:solidFill>
+                        <a:srgbClr val="DDE5E8"/>
+                      </a:solidFill>
+                      <a:prstDash val="solid"/>
+                      <a:round/>
+                      <a:headEnd type="none" w="med" len="med"/>
+                      <a:tailEnd type="none" w="med" len="med"/>
+                    </a:lnR>
+                    <a:lnT w="6350" cap="flat" cmpd="sng" algn="ctr">
+                      <a:solidFill>
+                        <a:srgbClr val="DDE5E8"/>
+                      </a:solidFill>
+                      <a:prstDash val="solid"/>
+                      <a:round/>
+                      <a:headEnd type="none" w="med" len="med"/>
+                      <a:tailEnd type="none" w="med" len="med"/>
+                    </a:lnT>
+                    <a:lnB w="6350" cap="flat" cmpd="sng" algn="ctr">
+                      <a:solidFill>
+                        <a:srgbClr val="DDE5E8"/>
+                      </a:solidFill>
+                      <a:prstDash val="solid"/>
+                      <a:round/>
+                      <a:headEnd type="none" w="med" len="med"/>
+                      <a:tailEnd type="none" w="med" len="med"/>
+                    </a:lnB>
+                    <a:solidFill>
+                      <a:srgbClr val="FBEDE7"/>
+                    </a:solidFill>
+                  </a:tcPr>
+                </a:tc>
+                <a:tc>
+                  <a:txBody>
+                    <a:bodyPr/>
+                    <a:lstStyle/>
+                    <a:p>
+                      <a:pPr algn="ctr" indent="0" marL="0">
+                        <a:buNone/>
+                      </a:pPr>
+                      <a:r>
+                        <a:rPr lang="en-US" sz="1150" dirty="0">
+                          <a:solidFill>
+                            <a:srgbClr val="16252C"/>
+                          </a:solidFill>
+                          <a:latin typeface="微软雅黑" pitchFamily="34" charset="0"/>
+                          <a:ea typeface="微软雅黑" pitchFamily="34" charset="-122"/>
+                          <a:cs typeface="微软雅黑" pitchFamily="34" charset="-120"/>
+                        </a:rPr>
+                        <a:t>0.938</a:t>
+                      </a:r>
+                      <a:endParaRPr lang="en-US" sz="1150" dirty="0">
+                        <a:latin typeface="微软雅黑" charset="0"/>
+                        <a:ea typeface="微软雅黑" charset="0"/>
+                        <a:cs typeface="微软雅黑" charset="0"/>
+                      </a:endParaRPr>
+                    </a:p>
+                  </a:txBody>
+                  <a:tcPr marL="91440" marR="91440" marT="45720" marB="45720" anchor="ctr">
+                    <a:lnL w="6350" cap="flat" cmpd="sng" algn="ctr">
+                      <a:solidFill>
+                        <a:srgbClr val="DDE5E8"/>
+                      </a:solidFill>
+                      <a:prstDash val="solid"/>
+                      <a:round/>
+                      <a:headEnd type="none" w="med" len="med"/>
+                      <a:tailEnd type="none" w="med" len="med"/>
+                    </a:lnL>
+                    <a:lnR w="6350" cap="flat" cmpd="sng" algn="ctr">
+                      <a:solidFill>
+                        <a:srgbClr val="DDE5E8"/>
+                      </a:solidFill>
+                      <a:prstDash val="solid"/>
+                      <a:round/>
+                      <a:headEnd type="none" w="med" len="med"/>
+                      <a:tailEnd type="none" w="med" len="med"/>
+                    </a:lnR>
+                    <a:lnT w="6350" cap="flat" cmpd="sng" algn="ctr">
+                      <a:solidFill>
+                        <a:srgbClr val="DDE5E8"/>
+                      </a:solidFill>
+                      <a:prstDash val="solid"/>
+                      <a:round/>
+                      <a:headEnd type="none" w="med" len="med"/>
+                      <a:tailEnd type="none" w="med" len="med"/>
+                    </a:lnT>
+                    <a:lnB w="6350" cap="flat" cmpd="sng" algn="ctr">
+                      <a:solidFill>
+                        <a:srgbClr val="DDE5E8"/>
+                      </a:solidFill>
+                      <a:prstDash val="solid"/>
+                      <a:round/>
+                      <a:headEnd type="none" w="med" len="med"/>
+                      <a:tailEnd type="none" w="med" len="med"/>
+                    </a:lnB>
+                  </a:tcPr>
+                </a:tc>
+                <a:tc>
+                  <a:txBody>
+                    <a:bodyPr/>
+                    <a:lstStyle/>
+                    <a:p>
+                      <a:pPr algn="ctr" indent="0" marL="0">
+                        <a:buNone/>
+                      </a:pPr>
+                      <a:r>
+                        <a:rPr lang="en-US" sz="1150" dirty="0">
+                          <a:solidFill>
+                            <a:srgbClr val="16252C"/>
+                          </a:solidFill>
+                          <a:latin typeface="微软雅黑" pitchFamily="34" charset="0"/>
+                          <a:ea typeface="微软雅黑" pitchFamily="34" charset="-122"/>
+                          <a:cs typeface="微软雅黑" pitchFamily="34" charset="-120"/>
+                        </a:rPr>
+                        <a:t>0.0066</a:t>
+                      </a:r>
+                      <a:endParaRPr lang="en-US" sz="1150" dirty="0">
+                        <a:latin typeface="微软雅黑" charset="0"/>
+                        <a:ea typeface="微软雅黑" charset="0"/>
+                        <a:cs typeface="微软雅黑" charset="0"/>
+                      </a:endParaRPr>
+                    </a:p>
+                  </a:txBody>
+                  <a:tcPr marL="91440" marR="91440" marT="45720" marB="45720" anchor="ctr">
+                    <a:lnL w="6350" cap="flat" cmpd="sng" algn="ctr">
+                      <a:solidFill>
+                        <a:srgbClr val="DDE5E8"/>
+                      </a:solidFill>
+                      <a:prstDash val="solid"/>
+                      <a:round/>
+                      <a:headEnd type="none" w="med" len="med"/>
+                      <a:tailEnd type="none" w="med" len="med"/>
+                    </a:lnL>
+                    <a:lnR w="6350" cap="flat" cmpd="sng" algn="ctr">
+                      <a:solidFill>
+                        <a:srgbClr val="DDE5E8"/>
+                      </a:solidFill>
+                      <a:prstDash val="solid"/>
+                      <a:round/>
+                      <a:headEnd type="none" w="med" len="med"/>
+                      <a:tailEnd type="none" w="med" len="med"/>
+                    </a:lnR>
+                    <a:lnT w="6350" cap="flat" cmpd="sng" algn="ctr">
+                      <a:solidFill>
+                        <a:srgbClr val="DDE5E8"/>
+                      </a:solidFill>
+                      <a:prstDash val="solid"/>
+                      <a:round/>
+                      <a:headEnd type="none" w="med" len="med"/>
+                      <a:tailEnd type="none" w="med" len="med"/>
+                    </a:lnT>
+                    <a:lnB w="6350" cap="flat" cmpd="sng" algn="ctr">
+                      <a:solidFill>
+                        <a:srgbClr val="DDE5E8"/>
+                      </a:solidFill>
+                      <a:prstDash val="solid"/>
+                      <a:round/>
+                      <a:headEnd type="none" w="med" len="med"/>
+                      <a:tailEnd type="none" w="med" len="med"/>
+                    </a:lnB>
+                  </a:tcPr>
+                </a:tc>
+              </a:tr>
+              <a:tr h="420624">
+                <a:tc>
+                  <a:txBody>
+                    <a:bodyPr/>
+                    <a:lstStyle/>
+                    <a:p>
+                      <a:pPr algn="ctr" indent="0" marL="0">
+                        <a:buNone/>
+                      </a:pPr>
+                      <a:r>
+                        <a:rPr lang="en-US" sz="1150" dirty="0">
+                          <a:solidFill>
+                            <a:srgbClr val="16252C"/>
+                          </a:solidFill>
+                          <a:latin typeface="微软雅黑" pitchFamily="34" charset="0"/>
+                          <a:ea typeface="微软雅黑" pitchFamily="34" charset="-122"/>
+                          <a:cs typeface="微软雅黑" pitchFamily="34" charset="-120"/>
+                        </a:rPr>
+                        <a:t>隔离器 5 vs 6</a:t>
+                      </a:r>
+                      <a:endParaRPr lang="en-US" sz="1150" dirty="0">
+                        <a:latin typeface="微软雅黑" charset="0"/>
+                        <a:ea typeface="微软雅黑" charset="0"/>
+                        <a:cs typeface="微软雅黑" charset="0"/>
+                      </a:endParaRPr>
+                    </a:p>
+                  </a:txBody>
+                  <a:tcPr marL="91440" marR="91440" marT="45720" marB="45720" anchor="ctr">
+                    <a:lnL w="6350" cap="flat" cmpd="sng" algn="ctr">
+                      <a:solidFill>
+                        <a:srgbClr val="DDE5E8"/>
+                      </a:solidFill>
+                      <a:prstDash val="solid"/>
+                      <a:round/>
+                      <a:headEnd type="none" w="med" len="med"/>
+                      <a:tailEnd type="none" w="med" len="med"/>
+                    </a:lnL>
+                    <a:lnR w="6350" cap="flat" cmpd="sng" algn="ctr">
+                      <a:solidFill>
+                        <a:srgbClr val="DDE5E8"/>
+                      </a:solidFill>
+                      <a:prstDash val="solid"/>
+                      <a:round/>
+                      <a:headEnd type="none" w="med" len="med"/>
+                      <a:tailEnd type="none" w="med" len="med"/>
+                    </a:lnR>
+                    <a:lnT w="6350" cap="flat" cmpd="sng" algn="ctr">
+                      <a:solidFill>
+                        <a:srgbClr val="DDE5E8"/>
+                      </a:solidFill>
+                      <a:prstDash val="solid"/>
+                      <a:round/>
+                      <a:headEnd type="none" w="med" len="med"/>
+                      <a:tailEnd type="none" w="med" len="med"/>
+                    </a:lnT>
+                    <a:lnB w="6350" cap="flat" cmpd="sng" algn="ctr">
+                      <a:solidFill>
+                        <a:srgbClr val="DDE5E8"/>
+                      </a:solidFill>
+                      <a:prstDash val="solid"/>
+                      <a:round/>
+                      <a:headEnd type="none" w="med" len="med"/>
+                      <a:tailEnd type="none" w="med" len="med"/>
+                    </a:lnB>
+                  </a:tcPr>
+                </a:tc>
+                <a:tc>
+                  <a:txBody>
+                    <a:bodyPr/>
+                    <a:lstStyle/>
+                    <a:p>
+                      <a:pPr algn="ctr" indent="0" marL="0">
+                        <a:buNone/>
+                      </a:pPr>
+                      <a:r>
+                        <a:rPr lang="en-US" sz="1150" dirty="0">
+                          <a:solidFill>
+                            <a:srgbClr val="16252C"/>
+                          </a:solidFill>
+                          <a:latin typeface="微软雅黑" pitchFamily="34" charset="0"/>
+                          <a:ea typeface="微软雅黑" pitchFamily="34" charset="-122"/>
+                          <a:cs typeface="微软雅黑" pitchFamily="34" charset="-120"/>
+                        </a:rPr>
+                        <a:t>同 TKMN、同 11-06、同阳性</a:t>
+                      </a:r>
+                      <a:endParaRPr lang="en-US" sz="1150" dirty="0">
+                        <a:latin typeface="微软雅黑" charset="0"/>
+                        <a:ea typeface="微软雅黑" charset="0"/>
+                        <a:cs typeface="微软雅黑" charset="0"/>
+                      </a:endParaRPr>
+                    </a:p>
+                  </a:txBody>
+                  <a:tcPr marL="91440" marR="91440" marT="45720" marB="45720" anchor="ctr">
+                    <a:lnL w="6350" cap="flat" cmpd="sng" algn="ctr">
+                      <a:solidFill>
+                        <a:srgbClr val="DDE5E8"/>
+                      </a:solidFill>
+                      <a:prstDash val="solid"/>
+                      <a:round/>
+                      <a:headEnd type="none" w="med" len="med"/>
+                      <a:tailEnd type="none" w="med" len="med"/>
+                    </a:lnL>
+                    <a:lnR w="6350" cap="flat" cmpd="sng" algn="ctr">
+                      <a:solidFill>
+                        <a:srgbClr val="DDE5E8"/>
+                      </a:solidFill>
+                      <a:prstDash val="solid"/>
+                      <a:round/>
+                      <a:headEnd type="none" w="med" len="med"/>
+                      <a:tailEnd type="none" w="med" len="med"/>
+                    </a:lnR>
+                    <a:lnT w="6350" cap="flat" cmpd="sng" algn="ctr">
+                      <a:solidFill>
+                        <a:srgbClr val="DDE5E8"/>
+                      </a:solidFill>
+                      <a:prstDash val="solid"/>
+                      <a:round/>
+                      <a:headEnd type="none" w="med" len="med"/>
+                      <a:tailEnd type="none" w="med" len="med"/>
+                    </a:lnT>
+                    <a:lnB w="6350" cap="flat" cmpd="sng" algn="ctr">
+                      <a:solidFill>
+                        <a:srgbClr val="DDE5E8"/>
+                      </a:solidFill>
+                      <a:prstDash val="solid"/>
+                      <a:round/>
+                      <a:headEnd type="none" w="med" len="med"/>
+                      <a:tailEnd type="none" w="med" len="med"/>
+                    </a:lnB>
+                  </a:tcPr>
+                </a:tc>
+                <a:tc>
+                  <a:txBody>
+                    <a:bodyPr/>
+                    <a:lstStyle/>
+                    <a:p>
+                      <a:pPr algn="ctr" indent="0" marL="0">
+                        <a:buNone/>
+                      </a:pPr>
+                      <a:r>
+                        <a:rPr lang="en-US" sz="1150" dirty="0">
+                          <a:solidFill>
+                            <a:srgbClr val="16252C"/>
+                          </a:solidFill>
+                          <a:latin typeface="微软雅黑" pitchFamily="34" charset="0"/>
+                          <a:ea typeface="微软雅黑" pitchFamily="34" charset="-122"/>
+                          <a:cs typeface="微软雅黑" pitchFamily="34" charset="-120"/>
+                        </a:rPr>
+                        <a:t>16</a:t>
+                      </a:r>
+                      <a:endParaRPr lang="en-US" sz="1150" dirty="0">
+                        <a:latin typeface="微软雅黑" charset="0"/>
+                        <a:ea typeface="微软雅黑" charset="0"/>
+                        <a:cs typeface="微软雅黑" charset="0"/>
+                      </a:endParaRPr>
+                    </a:p>
+                  </a:txBody>
+                  <a:tcPr marL="91440" marR="91440" marT="45720" marB="45720" anchor="ctr">
+                    <a:lnL w="6350" cap="flat" cmpd="sng" algn="ctr">
+                      <a:solidFill>
+                        <a:srgbClr val="DDE5E8"/>
+                      </a:solidFill>
+                      <a:prstDash val="solid"/>
+                      <a:round/>
+                      <a:headEnd type="none" w="med" len="med"/>
+                      <a:tailEnd type="none" w="med" len="med"/>
+                    </a:lnL>
+                    <a:lnR w="6350" cap="flat" cmpd="sng" algn="ctr">
+                      <a:solidFill>
+                        <a:srgbClr val="DDE5E8"/>
+                      </a:solidFill>
+                      <a:prstDash val="solid"/>
+                      <a:round/>
+                      <a:headEnd type="none" w="med" len="med"/>
+                      <a:tailEnd type="none" w="med" len="med"/>
+                    </a:lnR>
+                    <a:lnT w="6350" cap="flat" cmpd="sng" algn="ctr">
+                      <a:solidFill>
+                        <a:srgbClr val="DDE5E8"/>
+                      </a:solidFill>
+                      <a:prstDash val="solid"/>
+                      <a:round/>
+                      <a:headEnd type="none" w="med" len="med"/>
+                      <a:tailEnd type="none" w="med" len="med"/>
+                    </a:lnT>
+                    <a:lnB w="6350" cap="flat" cmpd="sng" algn="ctr">
+                      <a:solidFill>
+                        <a:srgbClr val="DDE5E8"/>
+                      </a:solidFill>
+                      <a:prstDash val="solid"/>
+                      <a:round/>
+                      <a:headEnd type="none" w="med" len="med"/>
+                      <a:tailEnd type="none" w="med" len="med"/>
+                    </a:lnB>
+                  </a:tcPr>
+                </a:tc>
+                <a:tc>
+                  <a:txBody>
+                    <a:bodyPr/>
+                    <a:lstStyle/>
+                    <a:p>
+                      <a:pPr algn="ctr" indent="0" marL="0">
+                        <a:buNone/>
+                      </a:pPr>
+                      <a:r>
+                        <a:rPr lang="en-US" sz="1150" b="1" dirty="0">
+                          <a:solidFill>
+                            <a:srgbClr val="D2603A"/>
+                          </a:solidFill>
+                          <a:latin typeface="微软雅黑" pitchFamily="34" charset="0"/>
+                          <a:ea typeface="微软雅黑" pitchFamily="34" charset="-122"/>
+                          <a:cs typeface="微软雅黑" pitchFamily="34" charset="-120"/>
+                        </a:rPr>
+                        <a:t>0.906</a:t>
+                      </a:r>
+                      <a:endParaRPr lang="en-US" sz="1150" dirty="0">
+                        <a:latin typeface="微软雅黑" charset="0"/>
+                        <a:ea typeface="微软雅黑" charset="0"/>
+                        <a:cs typeface="微软雅黑" charset="0"/>
+                      </a:endParaRPr>
+                    </a:p>
+                  </a:txBody>
+                  <a:tcPr marL="91440" marR="91440" marT="45720" marB="45720" anchor="ctr">
+                    <a:lnL w="6350" cap="flat" cmpd="sng" algn="ctr">
+                      <a:solidFill>
+                        <a:srgbClr val="DDE5E8"/>
+                      </a:solidFill>
+                      <a:prstDash val="solid"/>
+                      <a:round/>
+                      <a:headEnd type="none" w="med" len="med"/>
+                      <a:tailEnd type="none" w="med" len="med"/>
+                    </a:lnL>
+                    <a:lnR w="6350" cap="flat" cmpd="sng" algn="ctr">
+                      <a:solidFill>
+                        <a:srgbClr val="DDE5E8"/>
+                      </a:solidFill>
+                      <a:prstDash val="solid"/>
+                      <a:round/>
+                      <a:headEnd type="none" w="med" len="med"/>
+                      <a:tailEnd type="none" w="med" len="med"/>
+                    </a:lnR>
+                    <a:lnT w="6350" cap="flat" cmpd="sng" algn="ctr">
+                      <a:solidFill>
+                        <a:srgbClr val="DDE5E8"/>
+                      </a:solidFill>
+                      <a:prstDash val="solid"/>
+                      <a:round/>
+                      <a:headEnd type="none" w="med" len="med"/>
+                      <a:tailEnd type="none" w="med" len="med"/>
+                    </a:lnT>
+                    <a:lnB w="6350" cap="flat" cmpd="sng" algn="ctr">
+                      <a:solidFill>
+                        <a:srgbClr val="DDE5E8"/>
+                      </a:solidFill>
+                      <a:prstDash val="solid"/>
+                      <a:round/>
+                      <a:headEnd type="none" w="med" len="med"/>
+                      <a:tailEnd type="none" w="med" len="med"/>
+                    </a:lnB>
+                    <a:solidFill>
+                      <a:srgbClr val="FBEDE7"/>
+                    </a:solidFill>
+                  </a:tcPr>
+                </a:tc>
+                <a:tc>
+                  <a:txBody>
+                    <a:bodyPr/>
+                    <a:lstStyle/>
+                    <a:p>
+                      <a:pPr algn="ctr" indent="0" marL="0">
+                        <a:buNone/>
+                      </a:pPr>
+                      <a:r>
+                        <a:rPr lang="en-US" sz="1150" dirty="0">
+                          <a:solidFill>
+                            <a:srgbClr val="16252C"/>
+                          </a:solidFill>
+                          <a:latin typeface="微软雅黑" pitchFamily="34" charset="0"/>
+                          <a:ea typeface="微软雅黑" pitchFamily="34" charset="-122"/>
+                          <a:cs typeface="微软雅黑" pitchFamily="34" charset="-120"/>
+                        </a:rPr>
+                        <a:t>1.000</a:t>
+                      </a:r>
+                      <a:endParaRPr lang="en-US" sz="1150" dirty="0">
+                        <a:latin typeface="微软雅黑" charset="0"/>
+                        <a:ea typeface="微软雅黑" charset="0"/>
+                        <a:cs typeface="微软雅黑" charset="0"/>
+                      </a:endParaRPr>
+                    </a:p>
+                  </a:txBody>
+                  <a:tcPr marL="91440" marR="91440" marT="45720" marB="45720" anchor="ctr">
+                    <a:lnL w="6350" cap="flat" cmpd="sng" algn="ctr">
+                      <a:solidFill>
+                        <a:srgbClr val="DDE5E8"/>
+                      </a:solidFill>
+                      <a:prstDash val="solid"/>
+                      <a:round/>
+                      <a:headEnd type="none" w="med" len="med"/>
+                      <a:tailEnd type="none" w="med" len="med"/>
+                    </a:lnL>
+                    <a:lnR w="6350" cap="flat" cmpd="sng" algn="ctr">
+                      <a:solidFill>
+                        <a:srgbClr val="DDE5E8"/>
+                      </a:solidFill>
+                      <a:prstDash val="solid"/>
+                      <a:round/>
+                      <a:headEnd type="none" w="med" len="med"/>
+                      <a:tailEnd type="none" w="med" len="med"/>
+                    </a:lnR>
+                    <a:lnT w="6350" cap="flat" cmpd="sng" algn="ctr">
+                      <a:solidFill>
+                        <a:srgbClr val="DDE5E8"/>
+                      </a:solidFill>
+                      <a:prstDash val="solid"/>
+                      <a:round/>
+                      <a:headEnd type="none" w="med" len="med"/>
+                      <a:tailEnd type="none" w="med" len="med"/>
+                    </a:lnT>
+                    <a:lnB w="6350" cap="flat" cmpd="sng" algn="ctr">
+                      <a:solidFill>
+                        <a:srgbClr val="DDE5E8"/>
+                      </a:solidFill>
+                      <a:prstDash val="solid"/>
+                      <a:round/>
+                      <a:headEnd type="none" w="med" len="med"/>
+                      <a:tailEnd type="none" w="med" len="med"/>
+                    </a:lnB>
+                  </a:tcPr>
+                </a:tc>
+                <a:tc>
+                  <a:txBody>
+                    <a:bodyPr/>
+                    <a:lstStyle/>
+                    <a:p>
+                      <a:pPr algn="ctr" indent="0" marL="0">
+                        <a:buNone/>
+                      </a:pPr>
+                      <a:r>
+                        <a:rPr lang="en-US" sz="1150" dirty="0">
+                          <a:solidFill>
+                            <a:srgbClr val="16252C"/>
+                          </a:solidFill>
+                          <a:latin typeface="微软雅黑" pitchFamily="34" charset="0"/>
+                          <a:ea typeface="微软雅黑" pitchFamily="34" charset="-122"/>
+                          <a:cs typeface="微软雅黑" pitchFamily="34" charset="-120"/>
+                        </a:rPr>
+                        <a:t>0.0166</a:t>
+                      </a:r>
+                      <a:endParaRPr lang="en-US" sz="1150" dirty="0">
+                        <a:latin typeface="微软雅黑" charset="0"/>
+                        <a:ea typeface="微软雅黑" charset="0"/>
+                        <a:cs typeface="微软雅黑" charset="0"/>
+                      </a:endParaRPr>
+                    </a:p>
+                  </a:txBody>
+                  <a:tcPr marL="91440" marR="91440" marT="45720" marB="45720" anchor="ctr">
+                    <a:lnL w="6350" cap="flat" cmpd="sng" algn="ctr">
+                      <a:solidFill>
+                        <a:srgbClr val="DDE5E8"/>
+                      </a:solidFill>
+                      <a:prstDash val="solid"/>
+                      <a:round/>
+                      <a:headEnd type="none" w="med" len="med"/>
+                      <a:tailEnd type="none" w="med" len="med"/>
+                    </a:lnL>
+                    <a:lnR w="6350" cap="flat" cmpd="sng" algn="ctr">
+                      <a:solidFill>
+                        <a:srgbClr val="DDE5E8"/>
+                      </a:solidFill>
+                      <a:prstDash val="solid"/>
+                      <a:round/>
+                      <a:headEnd type="none" w="med" len="med"/>
+                      <a:tailEnd type="none" w="med" len="med"/>
+                    </a:lnR>
+                    <a:lnT w="6350" cap="flat" cmpd="sng" algn="ctr">
+                      <a:solidFill>
+                        <a:srgbClr val="DDE5E8"/>
+                      </a:solidFill>
+                      <a:prstDash val="solid"/>
+                      <a:round/>
+                      <a:headEnd type="none" w="med" len="med"/>
+                      <a:tailEnd type="none" w="med" len="med"/>
+                    </a:lnT>
+                    <a:lnB w="6350" cap="flat" cmpd="sng" algn="ctr">
+                      <a:solidFill>
+                        <a:srgbClr val="DDE5E8"/>
+                      </a:solidFill>
+                      <a:prstDash val="solid"/>
+                      <a:round/>
+                      <a:headEnd type="none" w="med" len="med"/>
+                      <a:tailEnd type="none" w="med" len="med"/>
+                    </a:lnB>
+                  </a:tcPr>
+                </a:tc>
+              </a:tr>
+              <a:tr h="420624">
+                <a:tc>
+                  <a:txBody>
+                    <a:bodyPr/>
+                    <a:lstStyle/>
+                    <a:p>
+                      <a:pPr algn="ctr" indent="0" marL="0">
+                        <a:buNone/>
+                      </a:pPr>
+                      <a:r>
+                        <a:rPr lang="en-US" sz="1150" dirty="0">
+                          <a:solidFill>
+                            <a:srgbClr val="16252C"/>
+                          </a:solidFill>
+                          <a:latin typeface="微软雅黑" pitchFamily="34" charset="0"/>
+                          <a:ea typeface="微软雅黑" pitchFamily="34" charset="-122"/>
+                          <a:cs typeface="微软雅黑" pitchFamily="34" charset="-120"/>
+                        </a:rPr>
+                        <a:t>隔离器 1 vs 2</a:t>
+                      </a:r>
+                      <a:endParaRPr lang="en-US" sz="1150" dirty="0">
+                        <a:latin typeface="微软雅黑" charset="0"/>
+                        <a:ea typeface="微软雅黑" charset="0"/>
+                        <a:cs typeface="微软雅黑" charset="0"/>
+                      </a:endParaRPr>
+                    </a:p>
+                  </a:txBody>
+                  <a:tcPr marL="91440" marR="91440" marT="45720" marB="45720" anchor="ctr">
+                    <a:lnL w="6350" cap="flat" cmpd="sng" algn="ctr">
+                      <a:solidFill>
+                        <a:srgbClr val="DDE5E8"/>
+                      </a:solidFill>
+                      <a:prstDash val="solid"/>
+                      <a:round/>
+                      <a:headEnd type="none" w="med" len="med"/>
+                      <a:tailEnd type="none" w="med" len="med"/>
+                    </a:lnL>
+                    <a:lnR w="6350" cap="flat" cmpd="sng" algn="ctr">
+                      <a:solidFill>
+                        <a:srgbClr val="DDE5E8"/>
+                      </a:solidFill>
+                      <a:prstDash val="solid"/>
+                      <a:round/>
+                      <a:headEnd type="none" w="med" len="med"/>
+                      <a:tailEnd type="none" w="med" len="med"/>
+                    </a:lnR>
+                    <a:lnT w="6350" cap="flat" cmpd="sng" algn="ctr">
+                      <a:solidFill>
+                        <a:srgbClr val="DDE5E8"/>
+                      </a:solidFill>
+                      <a:prstDash val="solid"/>
+                      <a:round/>
+                      <a:headEnd type="none" w="med" len="med"/>
+                      <a:tailEnd type="none" w="med" len="med"/>
+                    </a:lnT>
+                    <a:lnB w="6350" cap="flat" cmpd="sng" algn="ctr">
+                      <a:solidFill>
+                        <a:srgbClr val="DDE5E8"/>
+                      </a:solidFill>
+                      <a:prstDash val="solid"/>
+                      <a:round/>
+                      <a:headEnd type="none" w="med" len="med"/>
+                      <a:tailEnd type="none" w="med" len="med"/>
+                    </a:lnB>
+                  </a:tcPr>
+                </a:tc>
+                <a:tc>
+                  <a:txBody>
+                    <a:bodyPr/>
+                    <a:lstStyle/>
+                    <a:p>
+                      <a:pPr algn="ctr" indent="0" marL="0">
+                        <a:buNone/>
+                      </a:pPr>
+                      <a:r>
+                        <a:rPr lang="en-US" sz="1150" dirty="0">
+                          <a:solidFill>
+                            <a:srgbClr val="16252C"/>
+                          </a:solidFill>
+                          <a:latin typeface="微软雅黑" pitchFamily="34" charset="0"/>
+                          <a:ea typeface="微软雅黑" pitchFamily="34" charset="-122"/>
+                          <a:cs typeface="微软雅黑" pitchFamily="34" charset="-120"/>
+                        </a:rPr>
+                        <a:t>同 Mock、同 10-30、同阴性</a:t>
+                      </a:r>
+                      <a:endParaRPr lang="en-US" sz="1150" dirty="0">
+                        <a:latin typeface="微软雅黑" charset="0"/>
+                        <a:ea typeface="微软雅黑" charset="0"/>
+                        <a:cs typeface="微软雅黑" charset="0"/>
+                      </a:endParaRPr>
+                    </a:p>
+                  </a:txBody>
+                  <a:tcPr marL="91440" marR="91440" marT="45720" marB="45720" anchor="ctr">
+                    <a:lnL w="6350" cap="flat" cmpd="sng" algn="ctr">
+                      <a:solidFill>
+                        <a:srgbClr val="DDE5E8"/>
+                      </a:solidFill>
+                      <a:prstDash val="solid"/>
+                      <a:round/>
+                      <a:headEnd type="none" w="med" len="med"/>
+                      <a:tailEnd type="none" w="med" len="med"/>
+                    </a:lnL>
+                    <a:lnR w="6350" cap="flat" cmpd="sng" algn="ctr">
+                      <a:solidFill>
+                        <a:srgbClr val="DDE5E8"/>
+                      </a:solidFill>
+                      <a:prstDash val="solid"/>
+                      <a:round/>
+                      <a:headEnd type="none" w="med" len="med"/>
+                      <a:tailEnd type="none" w="med" len="med"/>
+                    </a:lnR>
+                    <a:lnT w="6350" cap="flat" cmpd="sng" algn="ctr">
+                      <a:solidFill>
+                        <a:srgbClr val="DDE5E8"/>
+                      </a:solidFill>
+                      <a:prstDash val="solid"/>
+                      <a:round/>
+                      <a:headEnd type="none" w="med" len="med"/>
+                      <a:tailEnd type="none" w="med" len="med"/>
+                    </a:lnT>
+                    <a:lnB w="6350" cap="flat" cmpd="sng" algn="ctr">
+                      <a:solidFill>
+                        <a:srgbClr val="DDE5E8"/>
+                      </a:solidFill>
+                      <a:prstDash val="solid"/>
+                      <a:round/>
+                      <a:headEnd type="none" w="med" len="med"/>
+                      <a:tailEnd type="none" w="med" len="med"/>
+                    </a:lnB>
+                  </a:tcPr>
+                </a:tc>
+                <a:tc>
+                  <a:txBody>
+                    <a:bodyPr/>
+                    <a:lstStyle/>
+                    <a:p>
+                      <a:pPr algn="ctr" indent="0" marL="0">
+                        <a:buNone/>
+                      </a:pPr>
+                      <a:r>
+                        <a:rPr lang="en-US" sz="1150" dirty="0">
+                          <a:solidFill>
+                            <a:srgbClr val="16252C"/>
+                          </a:solidFill>
+                          <a:latin typeface="微软雅黑" pitchFamily="34" charset="0"/>
+                          <a:ea typeface="微软雅黑" pitchFamily="34" charset="-122"/>
+                          <a:cs typeface="微软雅黑" pitchFamily="34" charset="-120"/>
+                        </a:rPr>
+                        <a:t>13</a:t>
+                      </a:r>
+                      <a:endParaRPr lang="en-US" sz="1150" dirty="0">
+                        <a:latin typeface="微软雅黑" charset="0"/>
+                        <a:ea typeface="微软雅黑" charset="0"/>
+                        <a:cs typeface="微软雅黑" charset="0"/>
+                      </a:endParaRPr>
+                    </a:p>
+                  </a:txBody>
+                  <a:tcPr marL="91440" marR="91440" marT="45720" marB="45720" anchor="ctr">
+                    <a:lnL w="6350" cap="flat" cmpd="sng" algn="ctr">
+                      <a:solidFill>
+                        <a:srgbClr val="DDE5E8"/>
+                      </a:solidFill>
+                      <a:prstDash val="solid"/>
+                      <a:round/>
+                      <a:headEnd type="none" w="med" len="med"/>
+                      <a:tailEnd type="none" w="med" len="med"/>
+                    </a:lnL>
+                    <a:lnR w="6350" cap="flat" cmpd="sng" algn="ctr">
+                      <a:solidFill>
+                        <a:srgbClr val="DDE5E8"/>
+                      </a:solidFill>
+                      <a:prstDash val="solid"/>
+                      <a:round/>
+                      <a:headEnd type="none" w="med" len="med"/>
+                      <a:tailEnd type="none" w="med" len="med"/>
+                    </a:lnR>
+                    <a:lnT w="6350" cap="flat" cmpd="sng" algn="ctr">
+                      <a:solidFill>
+                        <a:srgbClr val="DDE5E8"/>
+                      </a:solidFill>
+                      <a:prstDash val="solid"/>
+                      <a:round/>
+                      <a:headEnd type="none" w="med" len="med"/>
+                      <a:tailEnd type="none" w="med" len="med"/>
+                    </a:lnT>
+                    <a:lnB w="6350" cap="flat" cmpd="sng" algn="ctr">
+                      <a:solidFill>
+                        <a:srgbClr val="DDE5E8"/>
+                      </a:solidFill>
+                      <a:prstDash val="solid"/>
+                      <a:round/>
+                      <a:headEnd type="none" w="med" len="med"/>
+                      <a:tailEnd type="none" w="med" len="med"/>
+                    </a:lnB>
+                  </a:tcPr>
+                </a:tc>
+                <a:tc>
+                  <a:txBody>
+                    <a:bodyPr/>
+                    <a:lstStyle/>
+                    <a:p>
+                      <a:pPr algn="ctr" indent="0" marL="0">
+                        <a:buNone/>
+                      </a:pPr>
+                      <a:r>
+                        <a:rPr lang="en-US" sz="1150" b="1" dirty="0">
+                          <a:solidFill>
+                            <a:srgbClr val="D2603A"/>
+                          </a:solidFill>
+                          <a:latin typeface="微软雅黑" pitchFamily="34" charset="0"/>
+                          <a:ea typeface="微软雅黑" pitchFamily="34" charset="-122"/>
+                          <a:cs typeface="微软雅黑" pitchFamily="34" charset="-120"/>
+                        </a:rPr>
+                        <a:t>0.900</a:t>
+                      </a:r>
+                      <a:endParaRPr lang="en-US" sz="1150" dirty="0">
+                        <a:latin typeface="微软雅黑" charset="0"/>
+                        <a:ea typeface="微软雅黑" charset="0"/>
+                        <a:cs typeface="微软雅黑" charset="0"/>
+                      </a:endParaRPr>
+                    </a:p>
+                  </a:txBody>
+                  <a:tcPr marL="91440" marR="91440" marT="45720" marB="45720" anchor="ctr">
+                    <a:lnL w="6350" cap="flat" cmpd="sng" algn="ctr">
+                      <a:solidFill>
+                        <a:srgbClr val="DDE5E8"/>
+                      </a:solidFill>
+                      <a:prstDash val="solid"/>
+                      <a:round/>
+                      <a:headEnd type="none" w="med" len="med"/>
+                      <a:tailEnd type="none" w="med" len="med"/>
+                    </a:lnL>
+                    <a:lnR w="6350" cap="flat" cmpd="sng" algn="ctr">
+                      <a:solidFill>
+                        <a:srgbClr val="DDE5E8"/>
+                      </a:solidFill>
+                      <a:prstDash val="solid"/>
+                      <a:round/>
+                      <a:headEnd type="none" w="med" len="med"/>
+                      <a:tailEnd type="none" w="med" len="med"/>
+                    </a:lnR>
+                    <a:lnT w="6350" cap="flat" cmpd="sng" algn="ctr">
+                      <a:solidFill>
+                        <a:srgbClr val="DDE5E8"/>
+                      </a:solidFill>
+                      <a:prstDash val="solid"/>
+                      <a:round/>
+                      <a:headEnd type="none" w="med" len="med"/>
+                      <a:tailEnd type="none" w="med" len="med"/>
+                    </a:lnT>
+                    <a:lnB w="6350" cap="flat" cmpd="sng" algn="ctr">
+                      <a:solidFill>
+                        <a:srgbClr val="DDE5E8"/>
+                      </a:solidFill>
+                      <a:prstDash val="solid"/>
+                      <a:round/>
+                      <a:headEnd type="none" w="med" len="med"/>
+                      <a:tailEnd type="none" w="med" len="med"/>
+                    </a:lnB>
+                    <a:solidFill>
+                      <a:srgbClr val="FBEDE7"/>
+                    </a:solidFill>
+                  </a:tcPr>
+                </a:tc>
+                <a:tc>
+                  <a:txBody>
+                    <a:bodyPr/>
+                    <a:lstStyle/>
+                    <a:p>
+                      <a:pPr algn="ctr" indent="0" marL="0">
+                        <a:buNone/>
+                      </a:pPr>
+                      <a:r>
+                        <a:rPr lang="en-US" sz="1150" dirty="0">
+                          <a:solidFill>
+                            <a:srgbClr val="16252C"/>
+                          </a:solidFill>
+                          <a:latin typeface="微软雅黑" pitchFamily="34" charset="0"/>
+                          <a:ea typeface="微软雅黑" pitchFamily="34" charset="-122"/>
+                          <a:cs typeface="微软雅黑" pitchFamily="34" charset="-120"/>
+                        </a:rPr>
+                        <a:t>0.969</a:t>
+                      </a:r>
+                      <a:endParaRPr lang="en-US" sz="1150" dirty="0">
+                        <a:latin typeface="微软雅黑" charset="0"/>
+                        <a:ea typeface="微软雅黑" charset="0"/>
+                        <a:cs typeface="微软雅黑" charset="0"/>
+                      </a:endParaRPr>
+                    </a:p>
+                  </a:txBody>
+                  <a:tcPr marL="91440" marR="91440" marT="45720" marB="45720" anchor="ctr">
+                    <a:lnL w="6350" cap="flat" cmpd="sng" algn="ctr">
+                      <a:solidFill>
+                        <a:srgbClr val="DDE5E8"/>
+                      </a:solidFill>
+                      <a:prstDash val="solid"/>
+                      <a:round/>
+                      <a:headEnd type="none" w="med" len="med"/>
+                      <a:tailEnd type="none" w="med" len="med"/>
+                    </a:lnL>
+                    <a:lnR w="6350" cap="flat" cmpd="sng" algn="ctr">
+                      <a:solidFill>
+                        <a:srgbClr val="DDE5E8"/>
+                      </a:solidFill>
+                      <a:prstDash val="solid"/>
+                      <a:round/>
+                      <a:headEnd type="none" w="med" len="med"/>
+                      <a:tailEnd type="none" w="med" len="med"/>
+                    </a:lnR>
+                    <a:lnT w="6350" cap="flat" cmpd="sng" algn="ctr">
+                      <a:solidFill>
+                        <a:srgbClr val="DDE5E8"/>
+                      </a:solidFill>
+                      <a:prstDash val="solid"/>
+                      <a:round/>
+                      <a:headEnd type="none" w="med" len="med"/>
+                      <a:tailEnd type="none" w="med" len="med"/>
+                    </a:lnT>
+                    <a:lnB w="6350" cap="flat" cmpd="sng" algn="ctr">
+                      <a:solidFill>
+                        <a:srgbClr val="DDE5E8"/>
+                      </a:solidFill>
+                      <a:prstDash val="solid"/>
+                      <a:round/>
+                      <a:headEnd type="none" w="med" len="med"/>
+                      <a:tailEnd type="none" w="med" len="med"/>
+                    </a:lnB>
+                  </a:tcPr>
+                </a:tc>
+                <a:tc>
+                  <a:txBody>
+                    <a:bodyPr/>
+                    <a:lstStyle/>
+                    <a:p>
+                      <a:pPr algn="ctr" indent="0" marL="0">
+                        <a:buNone/>
+                      </a:pPr>
+                      <a:r>
+                        <a:rPr lang="en-US" sz="1150" dirty="0">
+                          <a:solidFill>
+                            <a:srgbClr val="16252C"/>
+                          </a:solidFill>
+                          <a:latin typeface="微软雅黑" pitchFamily="34" charset="0"/>
+                          <a:ea typeface="微软雅黑" pitchFamily="34" charset="-122"/>
+                          <a:cs typeface="微软雅黑" pitchFamily="34" charset="-120"/>
+                        </a:rPr>
+                        <a:t>0.0332</a:t>
+                      </a:r>
+                      <a:endParaRPr lang="en-US" sz="1150" dirty="0">
+                        <a:latin typeface="微软雅黑" charset="0"/>
+                        <a:ea typeface="微软雅黑" charset="0"/>
+                        <a:cs typeface="微软雅黑" charset="0"/>
+                      </a:endParaRPr>
+                    </a:p>
+                  </a:txBody>
+                  <a:tcPr marL="91440" marR="91440" marT="45720" marB="45720" anchor="ctr">
+                    <a:lnL w="6350" cap="flat" cmpd="sng" algn="ctr">
+                      <a:solidFill>
+                        <a:srgbClr val="DDE5E8"/>
+                      </a:solidFill>
+                      <a:prstDash val="solid"/>
+                      <a:round/>
+                      <a:headEnd type="none" w="med" len="med"/>
+                      <a:tailEnd type="none" w="med" len="med"/>
+                    </a:lnL>
+                    <a:lnR w="6350" cap="flat" cmpd="sng" algn="ctr">
+                      <a:solidFill>
+                        <a:srgbClr val="DDE5E8"/>
+                      </a:solidFill>
+                      <a:prstDash val="solid"/>
+                      <a:round/>
+                      <a:headEnd type="none" w="med" len="med"/>
+                      <a:tailEnd type="none" w="med" len="med"/>
+                    </a:lnR>
+                    <a:lnT w="6350" cap="flat" cmpd="sng" algn="ctr">
+                      <a:solidFill>
+                        <a:srgbClr val="DDE5E8"/>
+                      </a:solidFill>
+                      <a:prstDash val="solid"/>
+                      <a:round/>
+                      <a:headEnd type="none" w="med" len="med"/>
+                      <a:tailEnd type="none" w="med" len="med"/>
+                    </a:lnT>
+                    <a:lnB w="6350" cap="flat" cmpd="sng" algn="ctr">
+                      <a:solidFill>
+                        <a:srgbClr val="DDE5E8"/>
+                      </a:solidFill>
+                      <a:prstDash val="solid"/>
+                      <a:round/>
+                      <a:headEnd type="none" w="med" len="med"/>
+                      <a:tailEnd type="none" w="med" len="med"/>
+                    </a:lnB>
+                  </a:tcPr>
+                </a:tc>
+              </a:tr>
+            </a:tbl>
+          </a:graphicData>
+        </a:graphic>
+      </p:graphicFrame>
+      <p:sp>
+        <p:nvSpPr>
+          <p:cNvPr id="8" name="Text 5"/>
+          <p:cNvSpPr/>
+          <p:nvPr/>
+        </p:nvSpPr>
+        <p:spPr>
+          <a:xfrm>
+            <a:off x="1005840" y="3639312"/>
+            <a:ext cx="3108960" cy="658368"/>
+          </a:xfrm>
+          <a:prstGeom prst="rect">
+            <a:avLst/>
+          </a:prstGeom>
+          <a:noFill/>
+          <a:ln/>
+        </p:spPr>
+        <p:txBody>
+          <a:bodyPr wrap="square" lIns="0" tIns="0" rIns="0" bIns="0" rtlCol="0" anchor="ctr"/>
+          <a:lstStyle/>
+          <a:p>
+            <a:pPr algn="ctr" indent="0" marL="0">
+              <a:buNone/>
+            </a:pPr>
+            <a:r>
+              <a:rPr lang="en-US" sz="4000" b="1" dirty="0">
+                <a:solidFill>
+                  <a:srgbClr val="D2603A"/>
+                </a:solidFill>
+                <a:latin typeface="微软雅黑" pitchFamily="34" charset="0"/>
+                <a:ea typeface="微软雅黑" pitchFamily="34" charset="-122"/>
+                <a:cs typeface="微软雅黑" pitchFamily="34" charset="-120"/>
+              </a:rPr>
+              <a:t>0.908</a:t>
+            </a:r>
+            <a:endParaRPr lang="en-US" sz="4000" dirty="0"/>
+          </a:p>
+        </p:txBody>
+      </p:sp>
+      <p:sp>
+        <p:nvSpPr>
+          <p:cNvPr id="9" name="Text 6"/>
+          <p:cNvSpPr/>
+          <p:nvPr/>
+        </p:nvSpPr>
+        <p:spPr>
+          <a:xfrm>
+            <a:off x="1005840" y="4315968"/>
+            <a:ext cx="3108960" cy="310896"/>
+          </a:xfrm>
+          <a:prstGeom prst="rect">
+            <a:avLst/>
+          </a:prstGeom>
+          <a:noFill/>
+          <a:ln/>
+        </p:spPr>
+        <p:txBody>
+          <a:bodyPr wrap="square" lIns="0" tIns="0" rIns="0" bIns="0" rtlCol="0" anchor="ctr"/>
+          <a:lstStyle/>
+          <a:p>
+            <a:pPr algn="ctr" indent="0" marL="0">
+              <a:buNone/>
+            </a:pPr>
+            <a:r>
+              <a:rPr lang="en-US" sz="1150" b="1" dirty="0">
+                <a:solidFill>
+                  <a:srgbClr val="16252C"/>
+                </a:solidFill>
+                <a:latin typeface="微软雅黑" pitchFamily="34" charset="0"/>
+                <a:ea typeface="微软雅黑" pitchFamily="34" charset="-122"/>
+                <a:cs typeface="微软雅黑" pitchFamily="34" charset="-120"/>
+              </a:rPr>
+              <a:t>纯笼效应平均</a:t>
+            </a:r>
+            <a:endParaRPr lang="en-US" sz="1150" dirty="0"/>
+          </a:p>
+        </p:txBody>
+      </p:sp>
+      <p:sp>
+        <p:nvSpPr>
+          <p:cNvPr id="10" name="Text 7"/>
+          <p:cNvSpPr/>
+          <p:nvPr/>
+        </p:nvSpPr>
+        <p:spPr>
+          <a:xfrm>
+            <a:off x="1005840" y="4608576"/>
+            <a:ext cx="3108960" cy="310896"/>
+          </a:xfrm>
+          <a:prstGeom prst="rect">
+            <a:avLst/>
+          </a:prstGeom>
+          <a:noFill/>
+          <a:ln/>
+        </p:spPr>
+        <p:txBody>
+          <a:bodyPr wrap="square" lIns="0" tIns="0" rIns="0" bIns="0" rtlCol="0" anchor="ctr"/>
+          <a:lstStyle/>
+          <a:p>
+            <a:pPr algn="ctr" indent="0" marL="0">
+              <a:buNone/>
+            </a:pPr>
+            <a:r>
+              <a:rPr lang="en-US" sz="1000" dirty="0">
+                <a:solidFill>
+                  <a:srgbClr val="5F7580"/>
+                </a:solidFill>
+                <a:latin typeface="微软雅黑" pitchFamily="34" charset="0"/>
+                <a:ea typeface="微软雅黑" pitchFamily="34" charset="-122"/>
+                <a:cs typeface="微软雅黑" pitchFamily="34" charset="-120"/>
+              </a:rPr>
+              <a:t>三组对比</a:t>
+            </a:r>
+            <a:endParaRPr lang="en-US" sz="1000" dirty="0"/>
+          </a:p>
+        </p:txBody>
+      </p:sp>
+      <p:sp>
+        <p:nvSpPr>
+          <p:cNvPr id="11" name="Text 8"/>
+          <p:cNvSpPr/>
+          <p:nvPr/>
+        </p:nvSpPr>
+        <p:spPr>
+          <a:xfrm>
+            <a:off x="4572000" y="3639312"/>
+            <a:ext cx="3108960" cy="658368"/>
+          </a:xfrm>
+          <a:prstGeom prst="rect">
+            <a:avLst/>
+          </a:prstGeom>
+          <a:noFill/>
+          <a:ln/>
+        </p:spPr>
+        <p:txBody>
+          <a:bodyPr wrap="square" lIns="0" tIns="0" rIns="0" bIns="0" rtlCol="0" anchor="ctr"/>
+          <a:lstStyle/>
+          <a:p>
+            <a:pPr algn="ctr" indent="0" marL="0">
+              <a:buNone/>
+            </a:pPr>
+            <a:r>
+              <a:rPr lang="en-US" sz="4000" b="1" dirty="0">
+                <a:solidFill>
+                  <a:srgbClr val="18707F"/>
+                </a:solidFill>
+                <a:latin typeface="微软雅黑" pitchFamily="34" charset="0"/>
+                <a:ea typeface="微软雅黑" pitchFamily="34" charset="-122"/>
+                <a:cs typeface="微软雅黑" pitchFamily="34" charset="-120"/>
+              </a:rPr>
+              <a:t>0.967</a:t>
+            </a:r>
+            <a:endParaRPr lang="en-US" sz="4000" dirty="0"/>
+          </a:p>
+        </p:txBody>
+      </p:sp>
+      <p:sp>
+        <p:nvSpPr>
+          <p:cNvPr id="12" name="Text 9"/>
+          <p:cNvSpPr/>
+          <p:nvPr/>
+        </p:nvSpPr>
+        <p:spPr>
+          <a:xfrm>
+            <a:off x="4572000" y="4315968"/>
+            <a:ext cx="3108960" cy="310896"/>
+          </a:xfrm>
+          <a:prstGeom prst="rect">
+            <a:avLst/>
+          </a:prstGeom>
+          <a:noFill/>
+          <a:ln/>
+        </p:spPr>
+        <p:txBody>
+          <a:bodyPr wrap="square" lIns="0" tIns="0" rIns="0" bIns="0" rtlCol="0" anchor="ctr"/>
+          <a:lstStyle/>
+          <a:p>
+            <a:pPr algn="ctr" indent="0" marL="0">
+              <a:buNone/>
+            </a:pPr>
+            <a:r>
+              <a:rPr lang="en-US" sz="1150" b="1" dirty="0">
+                <a:solidFill>
+                  <a:srgbClr val="16252C"/>
+                </a:solidFill>
+                <a:latin typeface="微软雅黑" pitchFamily="34" charset="0"/>
+                <a:ea typeface="微软雅黑" pitchFamily="34" charset="-122"/>
+                <a:cs typeface="微软雅黑" pitchFamily="34" charset="-120"/>
+              </a:rPr>
+              <a:t>感染效应</a:t>
+            </a:r>
+            <a:endParaRPr lang="en-US" sz="1150" dirty="0"/>
+          </a:p>
+        </p:txBody>
+      </p:sp>
+      <p:sp>
+        <p:nvSpPr>
+          <p:cNvPr id="13" name="Text 10"/>
+          <p:cNvSpPr/>
+          <p:nvPr/>
+        </p:nvSpPr>
+        <p:spPr>
+          <a:xfrm>
+            <a:off x="4572000" y="4608576"/>
+            <a:ext cx="3108960" cy="310896"/>
+          </a:xfrm>
+          <a:prstGeom prst="rect">
+            <a:avLst/>
+          </a:prstGeom>
+          <a:noFill/>
+          <a:ln/>
+        </p:spPr>
+        <p:txBody>
+          <a:bodyPr wrap="square" lIns="0" tIns="0" rIns="0" bIns="0" rtlCol="0" anchor="ctr"/>
+          <a:lstStyle/>
+          <a:p>
+            <a:pPr algn="ctr" indent="0" marL="0">
+              <a:buNone/>
+            </a:pPr>
+            <a:r>
+              <a:rPr lang="en-US" sz="1000" dirty="0">
+                <a:solidFill>
+                  <a:srgbClr val="5F7580"/>
+                </a:solidFill>
+                <a:latin typeface="微软雅黑" pitchFamily="34" charset="0"/>
+                <a:ea typeface="微软雅黑" pitchFamily="34" charset="-122"/>
+                <a:cs typeface="微软雅黑" pitchFamily="34" charset="-120"/>
+              </a:rPr>
+              <a:t>n=45，全队列</a:t>
+            </a:r>
+            <a:endParaRPr lang="en-US" sz="1000" dirty="0"/>
+          </a:p>
+        </p:txBody>
+      </p:sp>
+      <p:sp>
+        <p:nvSpPr>
+          <p:cNvPr id="14" name="Text 11"/>
+          <p:cNvSpPr/>
+          <p:nvPr/>
+        </p:nvSpPr>
+        <p:spPr>
+          <a:xfrm>
+            <a:off x="8138160" y="3639312"/>
+            <a:ext cx="3108960" cy="658368"/>
+          </a:xfrm>
+          <a:prstGeom prst="rect">
+            <a:avLst/>
+          </a:prstGeom>
+          <a:noFill/>
+          <a:ln/>
+        </p:spPr>
+        <p:txBody>
+          <a:bodyPr wrap="square" lIns="0" tIns="0" rIns="0" bIns="0" rtlCol="0" anchor="ctr"/>
+          <a:lstStyle/>
+          <a:p>
+            <a:pPr algn="ctr" indent="0" marL="0">
+              <a:buNone/>
+            </a:pPr>
+            <a:r>
+              <a:rPr lang="en-US" sz="3600" b="1" dirty="0">
+                <a:solidFill>
+                  <a:srgbClr val="8FB996"/>
+                </a:solidFill>
+                <a:latin typeface="微软雅黑" pitchFamily="34" charset="0"/>
+                <a:ea typeface="微软雅黑" pitchFamily="34" charset="-122"/>
+                <a:cs typeface="微软雅黑" pitchFamily="34" charset="-120"/>
+              </a:rPr>
+              <a:t>3 / 3</a:t>
+            </a:r>
+            <a:endParaRPr lang="en-US" sz="3600" dirty="0"/>
+          </a:p>
+        </p:txBody>
+      </p:sp>
+      <p:sp>
+        <p:nvSpPr>
+          <p:cNvPr id="15" name="Text 12"/>
+          <p:cNvSpPr/>
+          <p:nvPr/>
+        </p:nvSpPr>
+        <p:spPr>
+          <a:xfrm>
+            <a:off x="8138160" y="4315968"/>
+            <a:ext cx="3108960" cy="310896"/>
+          </a:xfrm>
+          <a:prstGeom prst="rect">
+            <a:avLst/>
+          </a:prstGeom>
+          <a:noFill/>
+          <a:ln/>
+        </p:spPr>
+        <p:txBody>
+          <a:bodyPr wrap="square" lIns="0" tIns="0" rIns="0" bIns="0" rtlCol="0" anchor="ctr"/>
+          <a:lstStyle/>
+          <a:p>
+            <a:pPr algn="ctr" indent="0" marL="0">
+              <a:buNone/>
+            </a:pPr>
+            <a:r>
+              <a:rPr lang="en-US" sz="1150" b="1" dirty="0">
+                <a:solidFill>
+                  <a:srgbClr val="16252C"/>
+                </a:solidFill>
+                <a:latin typeface="微软雅黑" pitchFamily="34" charset="0"/>
+                <a:ea typeface="微软雅黑" pitchFamily="34" charset="-122"/>
+                <a:cs typeface="微软雅黑" pitchFamily="34" charset="-120"/>
+              </a:rPr>
+              <a:t>置换检验显著</a:t>
+            </a:r>
+            <a:endParaRPr lang="en-US" sz="1150" dirty="0"/>
+          </a:p>
+        </p:txBody>
+      </p:sp>
+      <p:sp>
+        <p:nvSpPr>
+          <p:cNvPr id="16" name="Text 13"/>
+          <p:cNvSpPr/>
+          <p:nvPr/>
+        </p:nvSpPr>
+        <p:spPr>
+          <a:xfrm>
+            <a:off x="8138160" y="4608576"/>
+            <a:ext cx="3108960" cy="310896"/>
+          </a:xfrm>
+          <a:prstGeom prst="rect">
+            <a:avLst/>
+          </a:prstGeom>
+          <a:noFill/>
+          <a:ln/>
+        </p:spPr>
+        <p:txBody>
+          <a:bodyPr wrap="square" lIns="0" tIns="0" rIns="0" bIns="0" rtlCol="0" anchor="ctr"/>
+          <a:lstStyle/>
+          <a:p>
+            <a:pPr algn="ctr" indent="0" marL="0">
+              <a:buNone/>
+            </a:pPr>
+            <a:r>
+              <a:rPr lang="en-US" sz="1000" dirty="0">
+                <a:solidFill>
+                  <a:srgbClr val="5F7580"/>
+                </a:solidFill>
+                <a:latin typeface="微软雅黑" pitchFamily="34" charset="0"/>
+                <a:ea typeface="微软雅黑" pitchFamily="34" charset="-122"/>
+                <a:cs typeface="微软雅黑" pitchFamily="34" charset="-120"/>
+              </a:rPr>
+              <a:t>300 次，全部 p&lt;0.05</a:t>
+            </a:r>
+            <a:endParaRPr lang="en-US" sz="1000" dirty="0"/>
+          </a:p>
+        </p:txBody>
+      </p:sp>
+      <p:sp>
+        <p:nvSpPr>
+          <p:cNvPr id="17" name="Shape 14"/>
+          <p:cNvSpPr/>
+          <p:nvPr/>
+        </p:nvSpPr>
+        <p:spPr>
+          <a:xfrm>
+            <a:off x="548640" y="4956048"/>
+            <a:ext cx="5394960" cy="1078992"/>
+          </a:xfrm>
+          <a:prstGeom prst="rect">
+            <a:avLst/>
+          </a:prstGeom>
+          <a:solidFill>
+            <a:srgbClr val="FFFFFF"/>
+          </a:solidFill>
+          <a:ln/>
+          <a:effectLst>
+            <a:outerShdw sx="100000" sy="100000" kx="0" ky="0" algn="bl" rotWithShape="0" blurRad="101600" dist="25400" dir="8100000">
+              <a:srgbClr val="000000">
+                <a:alpha val="10000"/>
+              </a:srgbClr>
+            </a:outerShdw>
+          </a:effectLst>
+        </p:spPr>
+      </p:sp>
+      <p:sp>
+        <p:nvSpPr>
+          <p:cNvPr id="18" name="Shape 15"/>
+          <p:cNvSpPr/>
+          <p:nvPr/>
+        </p:nvSpPr>
+        <p:spPr>
+          <a:xfrm>
+            <a:off x="548640" y="4956048"/>
+            <a:ext cx="68580" cy="1078992"/>
+          </a:xfrm>
+          <a:prstGeom prst="rect">
+            <a:avLst/>
+          </a:prstGeom>
+          <a:solidFill>
+            <a:srgbClr val="18707F"/>
+          </a:solidFill>
+          <a:ln/>
+        </p:spPr>
+      </p:sp>
+      <p:sp>
+        <p:nvSpPr>
+          <p:cNvPr id="19" name="Text 16"/>
+          <p:cNvSpPr/>
+          <p:nvPr/>
+        </p:nvSpPr>
+        <p:spPr>
+          <a:xfrm>
+            <a:off x="804672" y="5102352"/>
+            <a:ext cx="4937760" cy="329184"/>
+          </a:xfrm>
+          <a:prstGeom prst="rect">
+            <a:avLst/>
+          </a:prstGeom>
+          <a:noFill/>
+          <a:ln/>
+        </p:spPr>
+        <p:txBody>
+          <a:bodyPr wrap="square" lIns="0" tIns="0" rIns="0" bIns="0" rtlCol="0" anchor="t"/>
+          <a:lstStyle/>
+          <a:p>
+            <a:pPr indent="0" marL="0">
+              <a:buNone/>
+            </a:pPr>
+            <a:r>
+              <a:rPr lang="en-US" sz="1350" b="1" dirty="0">
+                <a:solidFill>
+                  <a:srgbClr val="16252C"/>
+                </a:solidFill>
+                <a:latin typeface="微软雅黑" pitchFamily="34" charset="0"/>
+                <a:ea typeface="微软雅黑" pitchFamily="34" charset="-122"/>
+                <a:cs typeface="微软雅黑" pitchFamily="34" charset="-120"/>
+              </a:rPr>
+              <a:t>笼效应是多变量的</a:t>
+            </a:r>
+            <a:endParaRPr lang="en-US" sz="1350" dirty="0"/>
+          </a:p>
+        </p:txBody>
+      </p:sp>
+      <p:sp>
+        <p:nvSpPr>
+          <p:cNvPr id="20" name="Text 17"/>
+          <p:cNvSpPr/>
+          <p:nvPr/>
+        </p:nvSpPr>
+        <p:spPr>
+          <a:xfrm>
+            <a:off x="804672" y="5486400"/>
+            <a:ext cx="4937760" cy="420624"/>
+          </a:xfrm>
+          <a:prstGeom prst="rect">
+            <a:avLst/>
+          </a:prstGeom>
+          <a:noFill/>
+          <a:ln/>
+        </p:spPr>
+        <p:txBody>
+          <a:bodyPr wrap="square" lIns="0" tIns="0" rIns="0" bIns="0" rtlCol="0" anchor="t"/>
+          <a:lstStyle/>
+          <a:p>
+            <a:pPr indent="0" marL="0">
+              <a:lnSpc>
+                <a:spcPct val="112000"/>
+              </a:lnSpc>
+              <a:buNone/>
+            </a:pPr>
+            <a:r>
+              <a:rPr lang="en-US" sz="1050" dirty="0">
+                <a:solidFill>
+                  <a:srgbClr val="5F7580"/>
+                </a:solidFill>
+                <a:latin typeface="微软雅黑" pitchFamily="34" charset="0"/>
+                <a:ea typeface="微软雅黑" pitchFamily="34" charset="-122"/>
+                <a:cs typeface="微软雅黑" pitchFamily="34" charset="-120"/>
+              </a:rPr>
+              <a:t>逐菌差异丰度在三组对比中只有 0、1、3 个特征 FDR&lt;0.05——单个菌几乎都不显著，模型却能到 AUC 0.90。同笼鸟的菌群是整体趋同。</a:t>
+            </a:r>
+            <a:endParaRPr lang="en-US" sz="1050" dirty="0"/>
+          </a:p>
+        </p:txBody>
+      </p:sp>
+      <p:sp>
+        <p:nvSpPr>
+          <p:cNvPr id="21" name="Shape 18"/>
+          <p:cNvSpPr/>
+          <p:nvPr/>
+        </p:nvSpPr>
+        <p:spPr>
+          <a:xfrm>
+            <a:off x="6217920" y="4956048"/>
+            <a:ext cx="5394960" cy="1078992"/>
+          </a:xfrm>
+          <a:prstGeom prst="rect">
+            <a:avLst/>
+          </a:prstGeom>
+          <a:solidFill>
+            <a:srgbClr val="FBEDE7"/>
+          </a:solidFill>
+          <a:ln/>
+        </p:spPr>
+      </p:sp>
+      <p:sp>
+        <p:nvSpPr>
+          <p:cNvPr id="22" name="Shape 19"/>
+          <p:cNvSpPr/>
+          <p:nvPr/>
+        </p:nvSpPr>
+        <p:spPr>
+          <a:xfrm>
+            <a:off x="6217920" y="4956048"/>
+            <a:ext cx="68580" cy="1078992"/>
+          </a:xfrm>
+          <a:prstGeom prst="rect">
+            <a:avLst/>
+          </a:prstGeom>
+          <a:solidFill>
+            <a:srgbClr val="D2603A"/>
+          </a:solidFill>
+          <a:ln/>
+        </p:spPr>
+      </p:sp>
+      <p:sp>
+        <p:nvSpPr>
+          <p:cNvPr id="23" name="Text 20"/>
+          <p:cNvSpPr/>
+          <p:nvPr/>
+        </p:nvSpPr>
+        <p:spPr>
+          <a:xfrm>
+            <a:off x="6473952" y="5047488"/>
+            <a:ext cx="4937760" cy="896112"/>
+          </a:xfrm>
+          <a:prstGeom prst="rect">
+            <a:avLst/>
+          </a:prstGeom>
+          <a:noFill/>
+          <a:ln/>
+        </p:spPr>
+        <p:txBody>
+          <a:bodyPr wrap="square" lIns="0" tIns="0" rIns="0" bIns="0" rtlCol="0" anchor="t"/>
+          <a:lstStyle/>
+          <a:p>
+            <a:pPr indent="0" marL="0">
+              <a:lnSpc>
+                <a:spcPct val="110000"/>
+              </a:lnSpc>
+              <a:buNone/>
+            </a:pPr>
+            <a:r>
+              <a:rPr lang="en-US" sz="1050" dirty="0">
+                <a:solidFill>
+                  <a:srgbClr val="7A2E14"/>
+                </a:solidFill>
+                <a:latin typeface="微软雅黑" pitchFamily="34" charset="0"/>
+                <a:ea typeface="微软雅黑" pitchFamily="34" charset="-122"/>
+                <a:cs typeface="微软雅黑" pitchFamily="34" charset="-120"/>
+              </a:rPr>
+              <a:t>样本量提醒：笼效应基于 n=16 或 13，零分布标准差 0.19–0.22。可以断定 0.908 与 0.967 量级相当，不能断定孰高孰低。</a:t>
+            </a:r>
+            <a:endParaRPr lang="en-US" sz="1050" dirty="0"/>
+          </a:p>
+        </p:txBody>
+      </p:sp>
+    </p:spTree>
+  </p:cSld>
+  <p:clrMapOvr>
+    <a:masterClrMapping/>
+  </p:clrMapOvr>
+</p:sld>
+</file>
+
+<file path=ppt/slides/slide15.xml><?xml version="1.0" encoding="utf-8"?>
+<p:sld xmlns:a="http://schemas.openxmlformats.org/drawingml/2006/main" xmlns:r="http://schemas.openxmlformats.org/officeDocument/2006/relationships" xmlns:p="http://schemas.openxmlformats.org/presentationml/2006/main">
+  <p:cSld name="Slide 15">
+    <p:bg>
+      <p:bgPr>
+        <a:solidFill>
+          <a:srgbClr val="FCFAF6"/>
+        </a:solidFill>
+      </p:bgPr>
+    </p:bg>
+    <p:spTree>
+      <p:nvGrpSpPr>
+        <p:cNvPr id="1" name=""/>
+        <p:cNvGrpSpPr/>
+        <p:nvPr/>
+      </p:nvGrpSpPr>
+      <p:grpSpPr>
+        <a:xfrm>
+          <a:off x="0" y="0"/>
+          <a:ext cx="0" cy="0"/>
+          <a:chOff x="0" y="0"/>
+          <a:chExt cx="0" cy="0"/>
+        </a:xfrm>
+      </p:grpSpPr>
+      <p:sp>
+        <p:nvSpPr>
+          <p:cNvPr id="2" name="Shape 0"/>
+          <p:cNvSpPr/>
+          <p:nvPr/>
+        </p:nvSpPr>
+        <p:spPr>
+          <a:xfrm>
+            <a:off x="0" y="0"/>
+            <a:ext cx="12191695" cy="54864"/>
+          </a:xfrm>
+          <a:prstGeom prst="rect">
+            <a:avLst/>
+          </a:prstGeom>
+          <a:solidFill>
+            <a:srgbClr val="18707F"/>
+          </a:solidFill>
+          <a:ln/>
+        </p:spPr>
+      </p:sp>
+      <p:sp>
+        <p:nvSpPr>
+          <p:cNvPr id="3" name="Text 1"/>
+          <p:cNvSpPr/>
+          <p:nvPr/>
+        </p:nvSpPr>
+        <p:spPr>
+          <a:xfrm>
+            <a:off x="548640" y="310896"/>
+            <a:ext cx="7315200" cy="256032"/>
+          </a:xfrm>
+          <a:prstGeom prst="rect">
+            <a:avLst/>
+          </a:prstGeom>
+          <a:noFill/>
+          <a:ln/>
+        </p:spPr>
+        <p:txBody>
+          <a:bodyPr wrap="square" lIns="0" tIns="0" rIns="0" bIns="0" rtlCol="0" anchor="ctr"/>
+          <a:lstStyle/>
+          <a:p>
+            <a:pPr indent="0" marL="0">
+              <a:buNone/>
+            </a:pPr>
+            <a:r>
+              <a:rPr lang="en-US" sz="1100" b="1" spc="200" kern="0" dirty="0">
+                <a:solidFill>
+                  <a:srgbClr val="18707F"/>
+                </a:solidFill>
+                <a:latin typeface="微软雅黑" pitchFamily="34" charset="0"/>
+                <a:ea typeface="微软雅黑" pitchFamily="34" charset="-122"/>
+                <a:cs typeface="微软雅黑" pitchFamily="34" charset="-120"/>
+              </a:rPr>
+              <a:t>生物学 · 差异丰度</a:t>
+            </a:r>
+            <a:endParaRPr lang="en-US" sz="1100" dirty="0"/>
+          </a:p>
+        </p:txBody>
+      </p:sp>
+      <p:sp>
+        <p:nvSpPr>
+          <p:cNvPr id="4" name="Text 2"/>
+          <p:cNvSpPr/>
+          <p:nvPr/>
+        </p:nvSpPr>
+        <p:spPr>
+          <a:xfrm>
+            <a:off x="548640" y="566928"/>
+            <a:ext cx="11064240" cy="685800"/>
+          </a:xfrm>
+          <a:prstGeom prst="rect">
+            <a:avLst/>
+          </a:prstGeom>
+          <a:noFill/>
+          <a:ln/>
+        </p:spPr>
+        <p:txBody>
+          <a:bodyPr wrap="square" lIns="0" tIns="0" rIns="0" bIns="0" rtlCol="0" anchor="ctr"/>
+          <a:lstStyle/>
+          <a:p>
+            <a:pPr indent="0" marL="0">
+              <a:buNone/>
+            </a:pPr>
+            <a:r>
+              <a:rPr lang="en-US" sz="3000" b="1" dirty="0">
+                <a:solidFill>
+                  <a:srgbClr val="16252C"/>
+                </a:solidFill>
+                <a:latin typeface="微软雅黑" pitchFamily="34" charset="0"/>
+                <a:ea typeface="微软雅黑" pitchFamily="34" charset="-122"/>
+                <a:cs typeface="微软雅黑" pitchFamily="34" charset="-120"/>
+              </a:rPr>
+              <a:t>驱动预测的菌：多一道笼效应筛查</a:t>
+            </a:r>
+            <a:endParaRPr lang="en-US" sz="3000" dirty="0"/>
+          </a:p>
+        </p:txBody>
+      </p:sp>
+      <p:sp>
+        <p:nvSpPr>
+          <p:cNvPr id="5" name="Text 3"/>
+          <p:cNvSpPr/>
+          <p:nvPr/>
+        </p:nvSpPr>
+        <p:spPr>
+          <a:xfrm>
+            <a:off x="11430000" y="6355080"/>
+            <a:ext cx="411480" cy="274320"/>
+          </a:xfrm>
+          <a:prstGeom prst="rect">
+            <a:avLst/>
+          </a:prstGeom>
+          <a:noFill/>
+          <a:ln/>
+        </p:spPr>
+        <p:txBody>
+          <a:bodyPr wrap="square" lIns="0" tIns="0" rIns="0" bIns="0" rtlCol="0" anchor="ctr"/>
+          <a:lstStyle/>
+          <a:p>
+            <a:pPr algn="r" indent="0" marL="0">
+              <a:buNone/>
+            </a:pPr>
+            <a:r>
+              <a:rPr lang="en-US" sz="1000" dirty="0">
+                <a:solidFill>
+                  <a:srgbClr val="5F7580"/>
+                </a:solidFill>
+                <a:latin typeface="微软雅黑" pitchFamily="34" charset="0"/>
+                <a:ea typeface="微软雅黑" pitchFamily="34" charset="-122"/>
+                <a:cs typeface="微软雅黑" pitchFamily="34" charset="-120"/>
+              </a:rPr>
+              <a:t>15</a:t>
+            </a:r>
+            <a:endParaRPr lang="en-US" sz="1000" dirty="0"/>
+          </a:p>
+        </p:txBody>
+      </p:sp>
+      <p:sp>
+        <p:nvSpPr>
+          <p:cNvPr id="6" name="Text 4"/>
+          <p:cNvSpPr/>
+          <p:nvPr/>
+        </p:nvSpPr>
+        <p:spPr>
+          <a:xfrm>
+            <a:off x="548640" y="1298448"/>
+            <a:ext cx="11064240" cy="320040"/>
+          </a:xfrm>
+          <a:prstGeom prst="rect">
+            <a:avLst/>
+          </a:prstGeom>
+          <a:noFill/>
+          <a:ln/>
+        </p:spPr>
+        <p:txBody>
+          <a:bodyPr wrap="square" lIns="0" tIns="0" rIns="0" bIns="0" rtlCol="0" anchor="ctr"/>
+          <a:lstStyle/>
+          <a:p>
+            <a:pPr indent="0" marL="0">
+              <a:buNone/>
+            </a:pPr>
+            <a:r>
+              <a:rPr lang="en-US" sz="1250" dirty="0">
+                <a:solidFill>
+                  <a:srgbClr val="5F7580"/>
+                </a:solidFill>
+                <a:latin typeface="微软雅黑" pitchFamily="34" charset="0"/>
+                <a:ea typeface="微软雅黑" pitchFamily="34" charset="-122"/>
+                <a:cs typeface="微软雅黑" pitchFamily="34" charset="-120"/>
+              </a:rPr>
+              <a:t>62 个特征中 19 个 FDR&lt;0.05，与 permutation importance 取交集得 11 个，再剔除在阳性组内部即因隔离器显著不同的，剩 7 个。</a:t>
+            </a:r>
+            <a:endParaRPr lang="en-US" sz="1250" dirty="0"/>
+          </a:p>
+        </p:txBody>
+      </p:sp>
+      <p:graphicFrame>
+        <p:nvGraphicFramePr>
+          <p:cNvPr id="16" name="Table 0"/>
+          <p:cNvGraphicFramePr>
+            <a:graphicFrameLocks noGrp="1"/>
+          </p:cNvGraphicFramePr>
+          <p:nvPr>
+            <p:extLst>
+              <p:ext uri="{D42A27DB-BD31-4B8C-83A1-F6EECF244321}">
+                <p14:modId xmlns:p14="http://schemas.microsoft.com/office/powerpoint/2010/main" val="1579011935"/>
+              </p:ext>
+            </p:extLst>
+          </p:nvPr>
+        </p:nvGraphicFramePr>
+        <p:xfrm>
+          <a:off x="548640" y="1737360"/>
+          <a:ext cx="11064240" cy="914400"/>
+        </p:xfrm>
+        <a:graphic>
+          <a:graphicData uri="http://schemas.openxmlformats.org/drawingml/2006/table">
+            <a:tbl>
+              <a:tblPr/>
+              <a:tblGrid>
+                <a:gridCol w="2651760"/>
+                <a:gridCol w="2743200"/>
+                <a:gridCol w="1280160"/>
+                <a:gridCol w="1737360"/>
+                <a:gridCol w="1280160"/>
+                <a:gridCol w="1371600"/>
+              </a:tblGrid>
+              <a:tr h="338328">
+                <a:tc>
+                  <a:txBody>
+                    <a:bodyPr/>
+                    <a:lstStyle/>
+                    <a:p>
+                      <a:pPr algn="ctr" indent="0" marL="0">
+                        <a:buNone/>
+                      </a:pPr>
+                      <a:r>
+                        <a:rPr lang="en-US" sz="1100" b="1" dirty="0">
+                          <a:solidFill>
+                            <a:srgbClr val="FFFFFF"/>
+                          </a:solidFill>
+                          <a:latin typeface="微软雅黑" pitchFamily="34" charset="0"/>
+                          <a:ea typeface="微软雅黑" pitchFamily="34" charset="-122"/>
+                          <a:cs typeface="微软雅黑" pitchFamily="34" charset="-120"/>
+                        </a:rPr>
+                        <a:t>Genus</a:t>
+                      </a:r>
+                      <a:endParaRPr lang="en-US" sz="1100" dirty="0">
+                        <a:latin typeface="微软雅黑" charset="0"/>
+                        <a:ea typeface="微软雅黑" charset="0"/>
+                        <a:cs typeface="微软雅黑" charset="0"/>
+                      </a:endParaRPr>
+                    </a:p>
+                  </a:txBody>
+                  <a:tcPr marL="91440" marR="91440" marT="45720" marB="45720" anchor="ctr">
+                    <a:lnL w="6350" cap="flat" cmpd="sng" algn="ctr">
+                      <a:solidFill>
+                        <a:srgbClr val="DDE5E8"/>
+                      </a:solidFill>
+                      <a:prstDash val="solid"/>
+                      <a:round/>
+                      <a:headEnd type="none" w="med" len="med"/>
+                      <a:tailEnd type="none" w="med" len="med"/>
+                    </a:lnL>
+                    <a:lnR w="6350" cap="flat" cmpd="sng" algn="ctr">
+                      <a:solidFill>
+                        <a:srgbClr val="DDE5E8"/>
+                      </a:solidFill>
+                      <a:prstDash val="solid"/>
+                      <a:round/>
+                      <a:headEnd type="none" w="med" len="med"/>
+                      <a:tailEnd type="none" w="med" len="med"/>
+                    </a:lnR>
+                    <a:lnT w="6350" cap="flat" cmpd="sng" algn="ctr">
+                      <a:solidFill>
+                        <a:srgbClr val="DDE5E8"/>
+                      </a:solidFill>
+                      <a:prstDash val="solid"/>
+                      <a:round/>
+                      <a:headEnd type="none" w="med" len="med"/>
+                      <a:tailEnd type="none" w="med" len="med"/>
+                    </a:lnT>
+                    <a:lnB w="6350" cap="flat" cmpd="sng" algn="ctr">
+                      <a:solidFill>
+                        <a:srgbClr val="DDE5E8"/>
+                      </a:solidFill>
+                      <a:prstDash val="solid"/>
+                      <a:round/>
+                      <a:headEnd type="none" w="med" len="med"/>
+                      <a:tailEnd type="none" w="med" len="med"/>
+                    </a:lnB>
+                    <a:solidFill>
+                      <a:srgbClr val="0B3C49"/>
+                    </a:solidFill>
+                  </a:tcPr>
+                </a:tc>
+                <a:tc>
+                  <a:txBody>
+                    <a:bodyPr/>
+                    <a:lstStyle/>
+                    <a:p>
+                      <a:pPr algn="ctr" indent="0" marL="0">
+                        <a:buNone/>
+                      </a:pPr>
+                      <a:r>
+                        <a:rPr lang="en-US" sz="1100" b="1" dirty="0">
+                          <a:solidFill>
+                            <a:srgbClr val="FFFFFF"/>
+                          </a:solidFill>
+                          <a:latin typeface="微软雅黑" pitchFamily="34" charset="0"/>
+                          <a:ea typeface="微软雅黑" pitchFamily="34" charset="-122"/>
+                          <a:cs typeface="微软雅黑" pitchFamily="34" charset="-120"/>
+                        </a:rPr>
+                        <a:t>Family</a:t>
+                      </a:r>
+                      <a:endParaRPr lang="en-US" sz="1100" dirty="0">
+                        <a:latin typeface="微软雅黑" charset="0"/>
+                        <a:ea typeface="微软雅黑" charset="0"/>
+                        <a:cs typeface="微软雅黑" charset="0"/>
+                      </a:endParaRPr>
+                    </a:p>
+                  </a:txBody>
+                  <a:tcPr marL="91440" marR="91440" marT="45720" marB="45720" anchor="ctr">
+                    <a:lnL w="6350" cap="flat" cmpd="sng" algn="ctr">
+                      <a:solidFill>
+                        <a:srgbClr val="DDE5E8"/>
+                      </a:solidFill>
+                      <a:prstDash val="solid"/>
+                      <a:round/>
+                      <a:headEnd type="none" w="med" len="med"/>
+                      <a:tailEnd type="none" w="med" len="med"/>
+                    </a:lnL>
+                    <a:lnR w="6350" cap="flat" cmpd="sng" algn="ctr">
+                      <a:solidFill>
+                        <a:srgbClr val="DDE5E8"/>
+                      </a:solidFill>
+                      <a:prstDash val="solid"/>
+                      <a:round/>
+                      <a:headEnd type="none" w="med" len="med"/>
+                      <a:tailEnd type="none" w="med" len="med"/>
+                    </a:lnR>
+                    <a:lnT w="6350" cap="flat" cmpd="sng" algn="ctr">
+                      <a:solidFill>
+                        <a:srgbClr val="DDE5E8"/>
+                      </a:solidFill>
+                      <a:prstDash val="solid"/>
+                      <a:round/>
+                      <a:headEnd type="none" w="med" len="med"/>
+                      <a:tailEnd type="none" w="med" len="med"/>
+                    </a:lnT>
+                    <a:lnB w="6350" cap="flat" cmpd="sng" algn="ctr">
+                      <a:solidFill>
+                        <a:srgbClr val="DDE5E8"/>
+                      </a:solidFill>
+                      <a:prstDash val="solid"/>
+                      <a:round/>
+                      <a:headEnd type="none" w="med" len="med"/>
+                      <a:tailEnd type="none" w="med" len="med"/>
+                    </a:lnB>
+                    <a:solidFill>
+                      <a:srgbClr val="0B3C49"/>
+                    </a:solidFill>
+                  </a:tcPr>
+                </a:tc>
+                <a:tc>
+                  <a:txBody>
+                    <a:bodyPr/>
+                    <a:lstStyle/>
+                    <a:p>
+                      <a:pPr algn="ctr" indent="0" marL="0">
+                        <a:buNone/>
+                      </a:pPr>
+                      <a:r>
+                        <a:rPr lang="en-US" sz="1100" b="1" dirty="0">
+                          <a:solidFill>
+                            <a:srgbClr val="FFFFFF"/>
+                          </a:solidFill>
+                          <a:latin typeface="微软雅黑" pitchFamily="34" charset="0"/>
+                          <a:ea typeface="微软雅黑" pitchFamily="34" charset="-122"/>
+                          <a:cs typeface="微软雅黑" pitchFamily="34" charset="-120"/>
+                        </a:rPr>
+                        <a:t>方向</a:t>
+                      </a:r>
+                      <a:endParaRPr lang="en-US" sz="1100" dirty="0">
+                        <a:latin typeface="微软雅黑" charset="0"/>
+                        <a:ea typeface="微软雅黑" charset="0"/>
+                        <a:cs typeface="微软雅黑" charset="0"/>
+                      </a:endParaRPr>
+                    </a:p>
+                  </a:txBody>
+                  <a:tcPr marL="91440" marR="91440" marT="45720" marB="45720" anchor="ctr">
+                    <a:lnL w="6350" cap="flat" cmpd="sng" algn="ctr">
+                      <a:solidFill>
+                        <a:srgbClr val="DDE5E8"/>
+                      </a:solidFill>
+                      <a:prstDash val="solid"/>
+                      <a:round/>
+                      <a:headEnd type="none" w="med" len="med"/>
+                      <a:tailEnd type="none" w="med" len="med"/>
+                    </a:lnL>
+                    <a:lnR w="6350" cap="flat" cmpd="sng" algn="ctr">
+                      <a:solidFill>
+                        <a:srgbClr val="DDE5E8"/>
+                      </a:solidFill>
+                      <a:prstDash val="solid"/>
+                      <a:round/>
+                      <a:headEnd type="none" w="med" len="med"/>
+                      <a:tailEnd type="none" w="med" len="med"/>
+                    </a:lnR>
+                    <a:lnT w="6350" cap="flat" cmpd="sng" algn="ctr">
+                      <a:solidFill>
+                        <a:srgbClr val="DDE5E8"/>
+                      </a:solidFill>
+                      <a:prstDash val="solid"/>
+                      <a:round/>
+                      <a:headEnd type="none" w="med" len="med"/>
+                      <a:tailEnd type="none" w="med" len="med"/>
+                    </a:lnT>
+                    <a:lnB w="6350" cap="flat" cmpd="sng" algn="ctr">
+                      <a:solidFill>
+                        <a:srgbClr val="DDE5E8"/>
+                      </a:solidFill>
+                      <a:prstDash val="solid"/>
+                      <a:round/>
+                      <a:headEnd type="none" w="med" len="med"/>
+                      <a:tailEnd type="none" w="med" len="med"/>
+                    </a:lnB>
+                    <a:solidFill>
+                      <a:srgbClr val="0B3C49"/>
+                    </a:solidFill>
+                  </a:tcPr>
+                </a:tc>
+                <a:tc>
+                  <a:txBody>
+                    <a:bodyPr/>
+                    <a:lstStyle/>
+                    <a:p>
+                      <a:pPr algn="ctr" indent="0" marL="0">
+                        <a:buNone/>
+                      </a:pPr>
+                      <a:r>
+                        <a:rPr lang="en-US" sz="1100" b="1" dirty="0">
+                          <a:solidFill>
+                            <a:srgbClr val="FFFFFF"/>
+                          </a:solidFill>
+                          <a:latin typeface="微软雅黑" pitchFamily="34" charset="0"/>
+                          <a:ea typeface="微软雅黑" pitchFamily="34" charset="-122"/>
+                          <a:cs typeface="微软雅黑" pitchFamily="34" charset="-120"/>
+                        </a:rPr>
+                        <a:t>importance</a:t>
+                      </a:r>
+                      <a:endParaRPr lang="en-US" sz="1100" dirty="0">
+                        <a:latin typeface="微软雅黑" charset="0"/>
+                        <a:ea typeface="微软雅黑" charset="0"/>
+                        <a:cs typeface="微软雅黑" charset="0"/>
+                      </a:endParaRPr>
+                    </a:p>
+                  </a:txBody>
+                  <a:tcPr marL="91440" marR="91440" marT="45720" marB="45720" anchor="ctr">
+                    <a:lnL w="6350" cap="flat" cmpd="sng" algn="ctr">
+                      <a:solidFill>
+                        <a:srgbClr val="DDE5E8"/>
+                      </a:solidFill>
+                      <a:prstDash val="solid"/>
+                      <a:round/>
+                      <a:headEnd type="none" w="med" len="med"/>
+                      <a:tailEnd type="none" w="med" len="med"/>
+                    </a:lnL>
+                    <a:lnR w="6350" cap="flat" cmpd="sng" algn="ctr">
+                      <a:solidFill>
+                        <a:srgbClr val="DDE5E8"/>
+                      </a:solidFill>
+                      <a:prstDash val="solid"/>
+                      <a:round/>
+                      <a:headEnd type="none" w="med" len="med"/>
+                      <a:tailEnd type="none" w="med" len="med"/>
+                    </a:lnR>
+                    <a:lnT w="6350" cap="flat" cmpd="sng" algn="ctr">
+                      <a:solidFill>
+                        <a:srgbClr val="DDE5E8"/>
+                      </a:solidFill>
+                      <a:prstDash val="solid"/>
+                      <a:round/>
+                      <a:headEnd type="none" w="med" len="med"/>
+                      <a:tailEnd type="none" w="med" len="med"/>
+                    </a:lnT>
+                    <a:lnB w="6350" cap="flat" cmpd="sng" algn="ctr">
+                      <a:solidFill>
+                        <a:srgbClr val="DDE5E8"/>
+                      </a:solidFill>
+                      <a:prstDash val="solid"/>
+                      <a:round/>
+                      <a:headEnd type="none" w="med" len="med"/>
+                      <a:tailEnd type="none" w="med" len="med"/>
+                    </a:lnB>
+                    <a:solidFill>
+                      <a:srgbClr val="0B3C49"/>
+                    </a:solidFill>
+                  </a:tcPr>
+                </a:tc>
+                <a:tc>
+                  <a:txBody>
+                    <a:bodyPr/>
+                    <a:lstStyle/>
+                    <a:p>
+                      <a:pPr algn="ctr" indent="0" marL="0">
+                        <a:buNone/>
+                      </a:pPr>
+                      <a:r>
+                        <a:rPr lang="en-US" sz="1100" b="1" dirty="0">
+                          <a:solidFill>
+                            <a:srgbClr val="FFFFFF"/>
+                          </a:solidFill>
+                          <a:latin typeface="微软雅黑" pitchFamily="34" charset="0"/>
+                          <a:ea typeface="微软雅黑" pitchFamily="34" charset="-122"/>
+                          <a:cs typeface="微软雅黑" pitchFamily="34" charset="-120"/>
+                        </a:rPr>
+                        <a:t>t</a:t>
+                      </a:r>
+                      <a:endParaRPr lang="en-US" sz="1100" dirty="0">
+                        <a:latin typeface="微软雅黑" charset="0"/>
+                        <a:ea typeface="微软雅黑" charset="0"/>
+                        <a:cs typeface="微软雅黑" charset="0"/>
+                      </a:endParaRPr>
+                    </a:p>
+                  </a:txBody>
+                  <a:tcPr marL="91440" marR="91440" marT="45720" marB="45720" anchor="ctr">
+                    <a:lnL w="6350" cap="flat" cmpd="sng" algn="ctr">
+                      <a:solidFill>
+                        <a:srgbClr val="DDE5E8"/>
+                      </a:solidFill>
+                      <a:prstDash val="solid"/>
+                      <a:round/>
+                      <a:headEnd type="none" w="med" len="med"/>
+                      <a:tailEnd type="none" w="med" len="med"/>
+                    </a:lnL>
+                    <a:lnR w="6350" cap="flat" cmpd="sng" algn="ctr">
+                      <a:solidFill>
+                        <a:srgbClr val="DDE5E8"/>
+                      </a:solidFill>
+                      <a:prstDash val="solid"/>
+                      <a:round/>
+                      <a:headEnd type="none" w="med" len="med"/>
+                      <a:tailEnd type="none" w="med" len="med"/>
+                    </a:lnR>
+                    <a:lnT w="6350" cap="flat" cmpd="sng" algn="ctr">
+                      <a:solidFill>
+                        <a:srgbClr val="DDE5E8"/>
+                      </a:solidFill>
+                      <a:prstDash val="solid"/>
+                      <a:round/>
+                      <a:headEnd type="none" w="med" len="med"/>
+                      <a:tailEnd type="none" w="med" len="med"/>
+                    </a:lnT>
+                    <a:lnB w="6350" cap="flat" cmpd="sng" algn="ctr">
+                      <a:solidFill>
+                        <a:srgbClr val="DDE5E8"/>
+                      </a:solidFill>
+                      <a:prstDash val="solid"/>
+                      <a:round/>
+                      <a:headEnd type="none" w="med" len="med"/>
+                      <a:tailEnd type="none" w="med" len="med"/>
+                    </a:lnB>
+                    <a:solidFill>
+                      <a:srgbClr val="0B3C49"/>
+                    </a:solidFill>
+                  </a:tcPr>
+                </a:tc>
+                <a:tc>
+                  <a:txBody>
+                    <a:bodyPr/>
+                    <a:lstStyle/>
+                    <a:p>
+                      <a:pPr algn="ctr" indent="0" marL="0">
+                        <a:buNone/>
+                      </a:pPr>
+                      <a:r>
+                        <a:rPr lang="en-US" sz="1100" b="1" dirty="0">
+                          <a:solidFill>
+                            <a:srgbClr val="FFFFFF"/>
+                          </a:solidFill>
+                          <a:latin typeface="微软雅黑" pitchFamily="34" charset="0"/>
+                          <a:ea typeface="微软雅黑" pitchFamily="34" charset="-122"/>
+                          <a:cs typeface="微软雅黑" pitchFamily="34" charset="-120"/>
+                        </a:rPr>
+                        <a:t>FDR</a:t>
+                      </a:r>
+                      <a:endParaRPr lang="en-US" sz="1100" dirty="0">
+                        <a:latin typeface="微软雅黑" charset="0"/>
+                        <a:ea typeface="微软雅黑" charset="0"/>
+                        <a:cs typeface="微软雅黑" charset="0"/>
+                      </a:endParaRPr>
+                    </a:p>
+                  </a:txBody>
+                  <a:tcPr marL="91440" marR="91440" marT="45720" marB="45720" anchor="ctr">
+                    <a:lnL w="6350" cap="flat" cmpd="sng" algn="ctr">
+                      <a:solidFill>
+                        <a:srgbClr val="DDE5E8"/>
+                      </a:solidFill>
+                      <a:prstDash val="solid"/>
+                      <a:round/>
+                      <a:headEnd type="none" w="med" len="med"/>
+                      <a:tailEnd type="none" w="med" len="med"/>
+                    </a:lnL>
+                    <a:lnR w="6350" cap="flat" cmpd="sng" algn="ctr">
+                      <a:solidFill>
+                        <a:srgbClr val="DDE5E8"/>
+                      </a:solidFill>
+                      <a:prstDash val="solid"/>
+                      <a:round/>
+                      <a:headEnd type="none" w="med" len="med"/>
+                      <a:tailEnd type="none" w="med" len="med"/>
+                    </a:lnR>
+                    <a:lnT w="6350" cap="flat" cmpd="sng" algn="ctr">
+                      <a:solidFill>
+                        <a:srgbClr val="DDE5E8"/>
+                      </a:solidFill>
+                      <a:prstDash val="solid"/>
+                      <a:round/>
+                      <a:headEnd type="none" w="med" len="med"/>
+                      <a:tailEnd type="none" w="med" len="med"/>
+                    </a:lnT>
+                    <a:lnB w="6350" cap="flat" cmpd="sng" algn="ctr">
+                      <a:solidFill>
+                        <a:srgbClr val="DDE5E8"/>
+                      </a:solidFill>
+                      <a:prstDash val="solid"/>
+                      <a:round/>
+                      <a:headEnd type="none" w="med" len="med"/>
+                      <a:tailEnd type="none" w="med" len="med"/>
+                    </a:lnB>
+                    <a:solidFill>
+                      <a:srgbClr val="0B3C49"/>
+                    </a:solidFill>
+                  </a:tcPr>
+                </a:tc>
+              </a:tr>
+              <a:tr h="338328">
+                <a:tc>
+                  <a:txBody>
+                    <a:bodyPr/>
+                    <a:lstStyle/>
+                    <a:p>
+                      <a:pPr algn="ctr" indent="0" marL="0">
+                        <a:buNone/>
+                      </a:pPr>
+                      <a:r>
+                        <a:rPr lang="en-US" sz="1150" dirty="0">
+                          <a:solidFill>
+                            <a:srgbClr val="16252C"/>
+                          </a:solidFill>
+                          <a:latin typeface="微软雅黑" pitchFamily="34" charset="0"/>
+                          <a:ea typeface="微软雅黑" pitchFamily="34" charset="-122"/>
+                          <a:cs typeface="微软雅黑" pitchFamily="34" charset="-120"/>
+                        </a:rPr>
+                        <a:t>HT002</a:t>
+                      </a:r>
+                      <a:endParaRPr lang="en-US" sz="1150" dirty="0">
+                        <a:latin typeface="微软雅黑" charset="0"/>
+                        <a:ea typeface="微软雅黑" charset="0"/>
+                        <a:cs typeface="微软雅黑" charset="0"/>
+                      </a:endParaRPr>
+                    </a:p>
+                  </a:txBody>
+                  <a:tcPr marL="91440" marR="91440" marT="45720" marB="45720" anchor="ctr">
+                    <a:lnL w="6350" cap="flat" cmpd="sng" algn="ctr">
+                      <a:solidFill>
+                        <a:srgbClr val="DDE5E8"/>
+                      </a:solidFill>
+                      <a:prstDash val="solid"/>
+                      <a:round/>
+                      <a:headEnd type="none" w="med" len="med"/>
+                      <a:tailEnd type="none" w="med" len="med"/>
+                    </a:lnL>
+                    <a:lnR w="6350" cap="flat" cmpd="sng" algn="ctr">
+                      <a:solidFill>
+                        <a:srgbClr val="DDE5E8"/>
+                      </a:solidFill>
+                      <a:prstDash val="solid"/>
+                      <a:round/>
+                      <a:headEnd type="none" w="med" len="med"/>
+                      <a:tailEnd type="none" w="med" len="med"/>
+                    </a:lnR>
+                    <a:lnT w="6350" cap="flat" cmpd="sng" algn="ctr">
+                      <a:solidFill>
+                        <a:srgbClr val="DDE5E8"/>
+                      </a:solidFill>
+                      <a:prstDash val="solid"/>
+                      <a:round/>
+                      <a:headEnd type="none" w="med" len="med"/>
+                      <a:tailEnd type="none" w="med" len="med"/>
+                    </a:lnT>
+                    <a:lnB w="6350" cap="flat" cmpd="sng" algn="ctr">
+                      <a:solidFill>
+                        <a:srgbClr val="DDE5E8"/>
+                      </a:solidFill>
+                      <a:prstDash val="solid"/>
+                      <a:round/>
+                      <a:headEnd type="none" w="med" len="med"/>
+                      <a:tailEnd type="none" w="med" len="med"/>
+                    </a:lnB>
+                  </a:tcPr>
+                </a:tc>
+                <a:tc>
+                  <a:txBody>
+                    <a:bodyPr/>
+                    <a:lstStyle/>
+                    <a:p>
+                      <a:pPr algn="ctr" indent="0" marL="0">
+                        <a:buNone/>
+                      </a:pPr>
+                      <a:r>
+                        <a:rPr lang="en-US" sz="1150" dirty="0">
+                          <a:solidFill>
+                            <a:srgbClr val="16252C"/>
+                          </a:solidFill>
+                          <a:latin typeface="微软雅黑" pitchFamily="34" charset="0"/>
+                          <a:ea typeface="微软雅黑" pitchFamily="34" charset="-122"/>
+                          <a:cs typeface="微软雅黑" pitchFamily="34" charset="-120"/>
+                        </a:rPr>
+                        <a:t>Lactobacillaceae</a:t>
+                      </a:r>
+                      <a:endParaRPr lang="en-US" sz="1150" dirty="0">
+                        <a:latin typeface="微软雅黑" charset="0"/>
+                        <a:ea typeface="微软雅黑" charset="0"/>
+                        <a:cs typeface="微软雅黑" charset="0"/>
+                      </a:endParaRPr>
+                    </a:p>
+                  </a:txBody>
+                  <a:tcPr marL="91440" marR="91440" marT="45720" marB="45720" anchor="ctr">
+                    <a:lnL w="6350" cap="flat" cmpd="sng" algn="ctr">
+                      <a:solidFill>
+                        <a:srgbClr val="DDE5E8"/>
+                      </a:solidFill>
+                      <a:prstDash val="solid"/>
+                      <a:round/>
+                      <a:headEnd type="none" w="med" len="med"/>
+                      <a:tailEnd type="none" w="med" len="med"/>
+                    </a:lnL>
+                    <a:lnR w="6350" cap="flat" cmpd="sng" algn="ctr">
+                      <a:solidFill>
+                        <a:srgbClr val="DDE5E8"/>
+                      </a:solidFill>
+                      <a:prstDash val="solid"/>
+                      <a:round/>
+                      <a:headEnd type="none" w="med" len="med"/>
+                      <a:tailEnd type="none" w="med" len="med"/>
+                    </a:lnR>
+                    <a:lnT w="6350" cap="flat" cmpd="sng" algn="ctr">
+                      <a:solidFill>
+                        <a:srgbClr val="DDE5E8"/>
+                      </a:solidFill>
+                      <a:prstDash val="solid"/>
+                      <a:round/>
+                      <a:headEnd type="none" w="med" len="med"/>
+                      <a:tailEnd type="none" w="med" len="med"/>
+                    </a:lnT>
+                    <a:lnB w="6350" cap="flat" cmpd="sng" algn="ctr">
+                      <a:solidFill>
+                        <a:srgbClr val="DDE5E8"/>
+                      </a:solidFill>
+                      <a:prstDash val="solid"/>
+                      <a:round/>
+                      <a:headEnd type="none" w="med" len="med"/>
+                      <a:tailEnd type="none" w="med" len="med"/>
+                    </a:lnB>
+                  </a:tcPr>
+                </a:tc>
+                <a:tc>
+                  <a:txBody>
+                    <a:bodyPr/>
+                    <a:lstStyle/>
+                    <a:p>
+                      <a:pPr algn="ctr" indent="0" marL="0">
+                        <a:buNone/>
+                      </a:pPr>
+                      <a:r>
+                        <a:rPr lang="en-US" sz="1150" b="1" dirty="0">
+                          <a:solidFill>
+                            <a:srgbClr val="16252C"/>
+                          </a:solidFill>
+                          <a:latin typeface="微软雅黑" pitchFamily="34" charset="0"/>
+                          <a:ea typeface="微软雅黑" pitchFamily="34" charset="-122"/>
+                          <a:cs typeface="微软雅黑" pitchFamily="34" charset="-120"/>
+                        </a:rPr>
+                        <a:t>Pos↓</a:t>
+                      </a:r>
+                      <a:endParaRPr lang="en-US" sz="1150" dirty="0">
+                        <a:latin typeface="微软雅黑" charset="0"/>
+                        <a:ea typeface="微软雅黑" charset="0"/>
+                        <a:cs typeface="微软雅黑" charset="0"/>
+                      </a:endParaRPr>
+                    </a:p>
+                  </a:txBody>
+                  <a:tcPr marL="91440" marR="91440" marT="45720" marB="45720" anchor="ctr">
+                    <a:lnL w="6350" cap="flat" cmpd="sng" algn="ctr">
+                      <a:solidFill>
+                        <a:srgbClr val="DDE5E8"/>
+                      </a:solidFill>
+                      <a:prstDash val="solid"/>
+                      <a:round/>
+                      <a:headEnd type="none" w="med" len="med"/>
+                      <a:tailEnd type="none" w="med" len="med"/>
+                    </a:lnL>
+                    <a:lnR w="6350" cap="flat" cmpd="sng" algn="ctr">
+                      <a:solidFill>
+                        <a:srgbClr val="DDE5E8"/>
+                      </a:solidFill>
+                      <a:prstDash val="solid"/>
+                      <a:round/>
+                      <a:headEnd type="none" w="med" len="med"/>
+                      <a:tailEnd type="none" w="med" len="med"/>
+                    </a:lnR>
+                    <a:lnT w="6350" cap="flat" cmpd="sng" algn="ctr">
+                      <a:solidFill>
+                        <a:srgbClr val="DDE5E8"/>
+                      </a:solidFill>
+                      <a:prstDash val="solid"/>
+                      <a:round/>
+                      <a:headEnd type="none" w="med" len="med"/>
+                      <a:tailEnd type="none" w="med" len="med"/>
+                    </a:lnT>
+                    <a:lnB w="6350" cap="flat" cmpd="sng" algn="ctr">
+                      <a:solidFill>
+                        <a:srgbClr val="DDE5E8"/>
+                      </a:solidFill>
+                      <a:prstDash val="solid"/>
+                      <a:round/>
+                      <a:headEnd type="none" w="med" len="med"/>
+                      <a:tailEnd type="none" w="med" len="med"/>
+                    </a:lnB>
+                    <a:solidFill>
+                      <a:srgbClr val="E4F0F0"/>
+                    </a:solidFill>
+                  </a:tcPr>
+                </a:tc>
+                <a:tc>
+                  <a:txBody>
+                    <a:bodyPr/>
+                    <a:lstStyle/>
+                    <a:p>
+                      <a:pPr algn="ctr" indent="0" marL="0">
+                        <a:buNone/>
+                      </a:pPr>
+                      <a:r>
+                        <a:rPr lang="en-US" sz="1150" dirty="0">
+                          <a:solidFill>
+                            <a:srgbClr val="16252C"/>
+                          </a:solidFill>
+                          <a:latin typeface="微软雅黑" pitchFamily="34" charset="0"/>
+                          <a:ea typeface="微软雅黑" pitchFamily="34" charset="-122"/>
+                          <a:cs typeface="微软雅黑" pitchFamily="34" charset="-120"/>
+                        </a:rPr>
+                        <a:t>0.0130</a:t>
+                      </a:r>
+                      <a:endParaRPr lang="en-US" sz="1150" dirty="0">
+                        <a:latin typeface="微软雅黑" charset="0"/>
+                        <a:ea typeface="微软雅黑" charset="0"/>
+                        <a:cs typeface="微软雅黑" charset="0"/>
+                      </a:endParaRPr>
+                    </a:p>
+                  </a:txBody>
+                  <a:tcPr marL="91440" marR="91440" marT="45720" marB="45720" anchor="ctr">
+                    <a:lnL w="6350" cap="flat" cmpd="sng" algn="ctr">
+                      <a:solidFill>
+                        <a:srgbClr val="DDE5E8"/>
+                      </a:solidFill>
+                      <a:prstDash val="solid"/>
+                      <a:round/>
+                      <a:headEnd type="none" w="med" len="med"/>
+                      <a:tailEnd type="none" w="med" len="med"/>
+                    </a:lnL>
+                    <a:lnR w="6350" cap="flat" cmpd="sng" algn="ctr">
+                      <a:solidFill>
+                        <a:srgbClr val="DDE5E8"/>
+                      </a:solidFill>
+                      <a:prstDash val="solid"/>
+                      <a:round/>
+                      <a:headEnd type="none" w="med" len="med"/>
+                      <a:tailEnd type="none" w="med" len="med"/>
+                    </a:lnR>
+                    <a:lnT w="6350" cap="flat" cmpd="sng" algn="ctr">
+                      <a:solidFill>
+                        <a:srgbClr val="DDE5E8"/>
+                      </a:solidFill>
+                      <a:prstDash val="solid"/>
+                      <a:round/>
+                      <a:headEnd type="none" w="med" len="med"/>
+                      <a:tailEnd type="none" w="med" len="med"/>
+                    </a:lnT>
+                    <a:lnB w="6350" cap="flat" cmpd="sng" algn="ctr">
+                      <a:solidFill>
+                        <a:srgbClr val="DDE5E8"/>
+                      </a:solidFill>
+                      <a:prstDash val="solid"/>
+                      <a:round/>
+                      <a:headEnd type="none" w="med" len="med"/>
+                      <a:tailEnd type="none" w="med" len="med"/>
+                    </a:lnB>
+                  </a:tcPr>
+                </a:tc>
+                <a:tc>
+                  <a:txBody>
+                    <a:bodyPr/>
+                    <a:lstStyle/>
+                    <a:p>
+                      <a:pPr algn="ctr" indent="0" marL="0">
+                        <a:buNone/>
+                      </a:pPr>
+                      <a:r>
+                        <a:rPr lang="en-US" sz="1150" dirty="0">
+                          <a:solidFill>
+                            <a:srgbClr val="16252C"/>
+                          </a:solidFill>
+                          <a:latin typeface="微软雅黑" pitchFamily="34" charset="0"/>
+                          <a:ea typeface="微软雅黑" pitchFamily="34" charset="-122"/>
+                          <a:cs typeface="微软雅黑" pitchFamily="34" charset="-120"/>
+                        </a:rPr>
+                        <a:t>−3.89</a:t>
+                      </a:r>
+                      <a:endParaRPr lang="en-US" sz="1150" dirty="0">
+                        <a:latin typeface="微软雅黑" charset="0"/>
+                        <a:ea typeface="微软雅黑" charset="0"/>
+                        <a:cs typeface="微软雅黑" charset="0"/>
+                      </a:endParaRPr>
+                    </a:p>
+                  </a:txBody>
+                  <a:tcPr marL="91440" marR="91440" marT="45720" marB="45720" anchor="ctr">
+                    <a:lnL w="6350" cap="flat" cmpd="sng" algn="ctr">
+                      <a:solidFill>
+                        <a:srgbClr val="DDE5E8"/>
+                      </a:solidFill>
+                      <a:prstDash val="solid"/>
+                      <a:round/>
+                      <a:headEnd type="none" w="med" len="med"/>
+                      <a:tailEnd type="none" w="med" len="med"/>
+                    </a:lnL>
+                    <a:lnR w="6350" cap="flat" cmpd="sng" algn="ctr">
+                      <a:solidFill>
+                        <a:srgbClr val="DDE5E8"/>
+                      </a:solidFill>
+                      <a:prstDash val="solid"/>
+                      <a:round/>
+                      <a:headEnd type="none" w="med" len="med"/>
+                      <a:tailEnd type="none" w="med" len="med"/>
+                    </a:lnR>
+                    <a:lnT w="6350" cap="flat" cmpd="sng" algn="ctr">
+                      <a:solidFill>
+                        <a:srgbClr val="DDE5E8"/>
+                      </a:solidFill>
+                      <a:prstDash val="solid"/>
+                      <a:round/>
+                      <a:headEnd type="none" w="med" len="med"/>
+                      <a:tailEnd type="none" w="med" len="med"/>
+                    </a:lnT>
+                    <a:lnB w="6350" cap="flat" cmpd="sng" algn="ctr">
+                      <a:solidFill>
+                        <a:srgbClr val="DDE5E8"/>
+                      </a:solidFill>
+                      <a:prstDash val="solid"/>
+                      <a:round/>
+                      <a:headEnd type="none" w="med" len="med"/>
+                      <a:tailEnd type="none" w="med" len="med"/>
+                    </a:lnB>
+                  </a:tcPr>
+                </a:tc>
+                <a:tc>
+                  <a:txBody>
+                    <a:bodyPr/>
+                    <a:lstStyle/>
+                    <a:p>
+                      <a:pPr algn="ctr" indent="0" marL="0">
+                        <a:buNone/>
+                      </a:pPr>
+                      <a:r>
+                        <a:rPr lang="en-US" sz="1150" dirty="0">
+                          <a:solidFill>
+                            <a:srgbClr val="16252C"/>
+                          </a:solidFill>
+                          <a:latin typeface="微软雅黑" pitchFamily="34" charset="0"/>
+                          <a:ea typeface="微软雅黑" pitchFamily="34" charset="-122"/>
+                          <a:cs typeface="微软雅黑" pitchFamily="34" charset="-120"/>
+                        </a:rPr>
+                        <a:t>0.0057</a:t>
+                      </a:r>
+                      <a:endParaRPr lang="en-US" sz="1150" dirty="0">
+                        <a:latin typeface="微软雅黑" charset="0"/>
+                        <a:ea typeface="微软雅黑" charset="0"/>
+                        <a:cs typeface="微软雅黑" charset="0"/>
+                      </a:endParaRPr>
+                    </a:p>
+                  </a:txBody>
+                  <a:tcPr marL="91440" marR="91440" marT="45720" marB="45720" anchor="ctr">
+                    <a:lnL w="6350" cap="flat" cmpd="sng" algn="ctr">
+                      <a:solidFill>
+                        <a:srgbClr val="DDE5E8"/>
+                      </a:solidFill>
+                      <a:prstDash val="solid"/>
+                      <a:round/>
+                      <a:headEnd type="none" w="med" len="med"/>
+                      <a:tailEnd type="none" w="med" len="med"/>
+                    </a:lnL>
+                    <a:lnR w="6350" cap="flat" cmpd="sng" algn="ctr">
+                      <a:solidFill>
+                        <a:srgbClr val="DDE5E8"/>
+                      </a:solidFill>
+                      <a:prstDash val="solid"/>
+                      <a:round/>
+                      <a:headEnd type="none" w="med" len="med"/>
+                      <a:tailEnd type="none" w="med" len="med"/>
+                    </a:lnR>
+                    <a:lnT w="6350" cap="flat" cmpd="sng" algn="ctr">
+                      <a:solidFill>
+                        <a:srgbClr val="DDE5E8"/>
+                      </a:solidFill>
+                      <a:prstDash val="solid"/>
+                      <a:round/>
+                      <a:headEnd type="none" w="med" len="med"/>
+                      <a:tailEnd type="none" w="med" len="med"/>
+                    </a:lnT>
+                    <a:lnB w="6350" cap="flat" cmpd="sng" algn="ctr">
+                      <a:solidFill>
+                        <a:srgbClr val="DDE5E8"/>
+                      </a:solidFill>
+                      <a:prstDash val="solid"/>
+                      <a:round/>
+                      <a:headEnd type="none" w="med" len="med"/>
+                      <a:tailEnd type="none" w="med" len="med"/>
+                    </a:lnB>
+                  </a:tcPr>
+                </a:tc>
+              </a:tr>
+              <a:tr h="338328">
+                <a:tc>
+                  <a:txBody>
+                    <a:bodyPr/>
+                    <a:lstStyle/>
+                    <a:p>
+                      <a:pPr algn="ctr" indent="0" marL="0">
+                        <a:buNone/>
+                      </a:pPr>
+                      <a:r>
+                        <a:rPr lang="en-US" sz="1150" dirty="0">
+                          <a:solidFill>
+                            <a:srgbClr val="16252C"/>
+                          </a:solidFill>
+                          <a:latin typeface="微软雅黑" pitchFamily="34" charset="0"/>
+                          <a:ea typeface="微软雅黑" pitchFamily="34" charset="-122"/>
+                          <a:cs typeface="微软雅黑" pitchFamily="34" charset="-120"/>
+                        </a:rPr>
+                        <a:t>Pediococcus</a:t>
+                      </a:r>
+                      <a:endParaRPr lang="en-US" sz="1150" dirty="0">
+                        <a:latin typeface="微软雅黑" charset="0"/>
+                        <a:ea typeface="微软雅黑" charset="0"/>
+                        <a:cs typeface="微软雅黑" charset="0"/>
+                      </a:endParaRPr>
+                    </a:p>
+                  </a:txBody>
+                  <a:tcPr marL="91440" marR="91440" marT="45720" marB="45720" anchor="ctr">
+                    <a:lnL w="6350" cap="flat" cmpd="sng" algn="ctr">
+                      <a:solidFill>
+                        <a:srgbClr val="DDE5E8"/>
+                      </a:solidFill>
+                      <a:prstDash val="solid"/>
+                      <a:round/>
+                      <a:headEnd type="none" w="med" len="med"/>
+                      <a:tailEnd type="none" w="med" len="med"/>
+                    </a:lnL>
+                    <a:lnR w="6350" cap="flat" cmpd="sng" algn="ctr">
+                      <a:solidFill>
+                        <a:srgbClr val="DDE5E8"/>
+                      </a:solidFill>
+                      <a:prstDash val="solid"/>
+                      <a:round/>
+                      <a:headEnd type="none" w="med" len="med"/>
+                      <a:tailEnd type="none" w="med" len="med"/>
+                    </a:lnR>
+                    <a:lnT w="6350" cap="flat" cmpd="sng" algn="ctr">
+                      <a:solidFill>
+                        <a:srgbClr val="DDE5E8"/>
+                      </a:solidFill>
+                      <a:prstDash val="solid"/>
+                      <a:round/>
+                      <a:headEnd type="none" w="med" len="med"/>
+                      <a:tailEnd type="none" w="med" len="med"/>
+                    </a:lnT>
+                    <a:lnB w="6350" cap="flat" cmpd="sng" algn="ctr">
+                      <a:solidFill>
+                        <a:srgbClr val="DDE5E8"/>
+                      </a:solidFill>
+                      <a:prstDash val="solid"/>
+                      <a:round/>
+                      <a:headEnd type="none" w="med" len="med"/>
+                      <a:tailEnd type="none" w="med" len="med"/>
+                    </a:lnB>
+                  </a:tcPr>
+                </a:tc>
+                <a:tc>
+                  <a:txBody>
+                    <a:bodyPr/>
+                    <a:lstStyle/>
+                    <a:p>
+                      <a:pPr algn="ctr" indent="0" marL="0">
+                        <a:buNone/>
+                      </a:pPr>
+                      <a:r>
+                        <a:rPr lang="en-US" sz="1150" dirty="0">
+                          <a:solidFill>
+                            <a:srgbClr val="16252C"/>
+                          </a:solidFill>
+                          <a:latin typeface="微软雅黑" pitchFamily="34" charset="0"/>
+                          <a:ea typeface="微软雅黑" pitchFamily="34" charset="-122"/>
+                          <a:cs typeface="微软雅黑" pitchFamily="34" charset="-120"/>
+                        </a:rPr>
+                        <a:t>Lactobacillaceae</a:t>
+                      </a:r>
+                      <a:endParaRPr lang="en-US" sz="1150" dirty="0">
+                        <a:latin typeface="微软雅黑" charset="0"/>
+                        <a:ea typeface="微软雅黑" charset="0"/>
+                        <a:cs typeface="微软雅黑" charset="0"/>
+                      </a:endParaRPr>
+                    </a:p>
+                  </a:txBody>
+                  <a:tcPr marL="91440" marR="91440" marT="45720" marB="45720" anchor="ctr">
+                    <a:lnL w="6350" cap="flat" cmpd="sng" algn="ctr">
+                      <a:solidFill>
+                        <a:srgbClr val="DDE5E8"/>
+                      </a:solidFill>
+                      <a:prstDash val="solid"/>
+                      <a:round/>
+                      <a:headEnd type="none" w="med" len="med"/>
+                      <a:tailEnd type="none" w="med" len="med"/>
+                    </a:lnL>
+                    <a:lnR w="6350" cap="flat" cmpd="sng" algn="ctr">
+                      <a:solidFill>
+                        <a:srgbClr val="DDE5E8"/>
+                      </a:solidFill>
+                      <a:prstDash val="solid"/>
+                      <a:round/>
+                      <a:headEnd type="none" w="med" len="med"/>
+                      <a:tailEnd type="none" w="med" len="med"/>
+                    </a:lnR>
+                    <a:lnT w="6350" cap="flat" cmpd="sng" algn="ctr">
+                      <a:solidFill>
+                        <a:srgbClr val="DDE5E8"/>
+                      </a:solidFill>
+                      <a:prstDash val="solid"/>
+                      <a:round/>
+                      <a:headEnd type="none" w="med" len="med"/>
+                      <a:tailEnd type="none" w="med" len="med"/>
+                    </a:lnT>
+                    <a:lnB w="6350" cap="flat" cmpd="sng" algn="ctr">
+                      <a:solidFill>
+                        <a:srgbClr val="DDE5E8"/>
+                      </a:solidFill>
+                      <a:prstDash val="solid"/>
+                      <a:round/>
+                      <a:headEnd type="none" w="med" len="med"/>
+                      <a:tailEnd type="none" w="med" len="med"/>
+                    </a:lnB>
+                  </a:tcPr>
+                </a:tc>
+                <a:tc>
+                  <a:txBody>
+                    <a:bodyPr/>
+                    <a:lstStyle/>
+                    <a:p>
+                      <a:pPr algn="ctr" indent="0" marL="0">
+                        <a:buNone/>
+                      </a:pPr>
+                      <a:r>
+                        <a:rPr lang="en-US" sz="1150" b="1" dirty="0">
+                          <a:solidFill>
+                            <a:srgbClr val="D2603A"/>
+                          </a:solidFill>
+                          <a:latin typeface="微软雅黑" pitchFamily="34" charset="0"/>
+                          <a:ea typeface="微软雅黑" pitchFamily="34" charset="-122"/>
+                          <a:cs typeface="微软雅黑" pitchFamily="34" charset="-120"/>
+                        </a:rPr>
+                        <a:t>Pos↑</a:t>
+                      </a:r>
+                      <a:endParaRPr lang="en-US" sz="1150" dirty="0">
+                        <a:latin typeface="微软雅黑" charset="0"/>
+                        <a:ea typeface="微软雅黑" charset="0"/>
+                        <a:cs typeface="微软雅黑" charset="0"/>
+                      </a:endParaRPr>
+                    </a:p>
+                  </a:txBody>
+                  <a:tcPr marL="91440" marR="91440" marT="45720" marB="45720" anchor="ctr">
+                    <a:lnL w="6350" cap="flat" cmpd="sng" algn="ctr">
+                      <a:solidFill>
+                        <a:srgbClr val="DDE5E8"/>
+                      </a:solidFill>
+                      <a:prstDash val="solid"/>
+                      <a:round/>
+                      <a:headEnd type="none" w="med" len="med"/>
+                      <a:tailEnd type="none" w="med" len="med"/>
+                    </a:lnL>
+                    <a:lnR w="6350" cap="flat" cmpd="sng" algn="ctr">
+                      <a:solidFill>
+                        <a:srgbClr val="DDE5E8"/>
+                      </a:solidFill>
+                      <a:prstDash val="solid"/>
+                      <a:round/>
+                      <a:headEnd type="none" w="med" len="med"/>
+                      <a:tailEnd type="none" w="med" len="med"/>
+                    </a:lnR>
+                    <a:lnT w="6350" cap="flat" cmpd="sng" algn="ctr">
+                      <a:solidFill>
+                        <a:srgbClr val="DDE5E8"/>
+                      </a:solidFill>
+                      <a:prstDash val="solid"/>
+                      <a:round/>
+                      <a:headEnd type="none" w="med" len="med"/>
+                      <a:tailEnd type="none" w="med" len="med"/>
+                    </a:lnT>
+                    <a:lnB w="6350" cap="flat" cmpd="sng" algn="ctr">
+                      <a:solidFill>
+                        <a:srgbClr val="DDE5E8"/>
+                      </a:solidFill>
+                      <a:prstDash val="solid"/>
+                      <a:round/>
+                      <a:headEnd type="none" w="med" len="med"/>
+                      <a:tailEnd type="none" w="med" len="med"/>
+                    </a:lnB>
+                    <a:solidFill>
+                      <a:srgbClr val="FBEDE7"/>
+                    </a:solidFill>
+                  </a:tcPr>
+                </a:tc>
+                <a:tc>
+                  <a:txBody>
+                    <a:bodyPr/>
+                    <a:lstStyle/>
+                    <a:p>
+                      <a:pPr algn="ctr" indent="0" marL="0">
+                        <a:buNone/>
+                      </a:pPr>
+                      <a:r>
+                        <a:rPr lang="en-US" sz="1150" dirty="0">
+                          <a:solidFill>
+                            <a:srgbClr val="16252C"/>
+                          </a:solidFill>
+                          <a:latin typeface="微软雅黑" pitchFamily="34" charset="0"/>
+                          <a:ea typeface="微软雅黑" pitchFamily="34" charset="-122"/>
+                          <a:cs typeface="微软雅黑" pitchFamily="34" charset="-120"/>
+                        </a:rPr>
+                        <a:t>0.0129</a:t>
+                      </a:r>
+                      <a:endParaRPr lang="en-US" sz="1150" dirty="0">
+                        <a:latin typeface="微软雅黑" charset="0"/>
+                        <a:ea typeface="微软雅黑" charset="0"/>
+                        <a:cs typeface="微软雅黑" charset="0"/>
+                      </a:endParaRPr>
+                    </a:p>
+                  </a:txBody>
+                  <a:tcPr marL="91440" marR="91440" marT="45720" marB="45720" anchor="ctr">
+                    <a:lnL w="6350" cap="flat" cmpd="sng" algn="ctr">
+                      <a:solidFill>
+                        <a:srgbClr val="DDE5E8"/>
+                      </a:solidFill>
+                      <a:prstDash val="solid"/>
+                      <a:round/>
+                      <a:headEnd type="none" w="med" len="med"/>
+                      <a:tailEnd type="none" w="med" len="med"/>
+                    </a:lnL>
+                    <a:lnR w="6350" cap="flat" cmpd="sng" algn="ctr">
+                      <a:solidFill>
+                        <a:srgbClr val="DDE5E8"/>
+                      </a:solidFill>
+                      <a:prstDash val="solid"/>
+                      <a:round/>
+                      <a:headEnd type="none" w="med" len="med"/>
+                      <a:tailEnd type="none" w="med" len="med"/>
+                    </a:lnR>
+                    <a:lnT w="6350" cap="flat" cmpd="sng" algn="ctr">
+                      <a:solidFill>
+                        <a:srgbClr val="DDE5E8"/>
+                      </a:solidFill>
+                      <a:prstDash val="solid"/>
+                      <a:round/>
+                      <a:headEnd type="none" w="med" len="med"/>
+                      <a:tailEnd type="none" w="med" len="med"/>
+                    </a:lnT>
+                    <a:lnB w="6350" cap="flat" cmpd="sng" algn="ctr">
+                      <a:solidFill>
+                        <a:srgbClr val="DDE5E8"/>
+                      </a:solidFill>
+                      <a:prstDash val="solid"/>
+                      <a:round/>
+                      <a:headEnd type="none" w="med" len="med"/>
+                      <a:tailEnd type="none" w="med" len="med"/>
+                    </a:lnB>
+                  </a:tcPr>
+                </a:tc>
+                <a:tc>
+                  <a:txBody>
+                    <a:bodyPr/>
+                    <a:lstStyle/>
+                    <a:p>
+                      <a:pPr algn="ctr" indent="0" marL="0">
+                        <a:buNone/>
+                      </a:pPr>
+                      <a:r>
+                        <a:rPr lang="en-US" sz="1150" dirty="0">
+                          <a:solidFill>
+                            <a:srgbClr val="16252C"/>
+                          </a:solidFill>
+                          <a:latin typeface="微软雅黑" pitchFamily="34" charset="0"/>
+                          <a:ea typeface="微软雅黑" pitchFamily="34" charset="-122"/>
+                          <a:cs typeface="微软雅黑" pitchFamily="34" charset="-120"/>
+                        </a:rPr>
+                        <a:t>+4.32</a:t>
+                      </a:r>
+                      <a:endParaRPr lang="en-US" sz="1150" dirty="0">
+                        <a:latin typeface="微软雅黑" charset="0"/>
+                        <a:ea typeface="微软雅黑" charset="0"/>
+                        <a:cs typeface="微软雅黑" charset="0"/>
+                      </a:endParaRPr>
+                    </a:p>
+                  </a:txBody>
+                  <a:tcPr marL="91440" marR="91440" marT="45720" marB="45720" anchor="ctr">
+                    <a:lnL w="6350" cap="flat" cmpd="sng" algn="ctr">
+                      <a:solidFill>
+                        <a:srgbClr val="DDE5E8"/>
+                      </a:solidFill>
+                      <a:prstDash val="solid"/>
+                      <a:round/>
+                      <a:headEnd type="none" w="med" len="med"/>
+                      <a:tailEnd type="none" w="med" len="med"/>
+                    </a:lnL>
+                    <a:lnR w="6350" cap="flat" cmpd="sng" algn="ctr">
+                      <a:solidFill>
+                        <a:srgbClr val="DDE5E8"/>
+                      </a:solidFill>
+                      <a:prstDash val="solid"/>
+                      <a:round/>
+                      <a:headEnd type="none" w="med" len="med"/>
+                      <a:tailEnd type="none" w="med" len="med"/>
+                    </a:lnR>
+                    <a:lnT w="6350" cap="flat" cmpd="sng" algn="ctr">
+                      <a:solidFill>
+                        <a:srgbClr val="DDE5E8"/>
+                      </a:solidFill>
+                      <a:prstDash val="solid"/>
+                      <a:round/>
+                      <a:headEnd type="none" w="med" len="med"/>
+                      <a:tailEnd type="none" w="med" len="med"/>
+                    </a:lnT>
+                    <a:lnB w="6350" cap="flat" cmpd="sng" algn="ctr">
+                      <a:solidFill>
+                        <a:srgbClr val="DDE5E8"/>
+                      </a:solidFill>
+                      <a:prstDash val="solid"/>
+                      <a:round/>
+                      <a:headEnd type="none" w="med" len="med"/>
+                      <a:tailEnd type="none" w="med" len="med"/>
+                    </a:lnB>
+                  </a:tcPr>
+                </a:tc>
+                <a:tc>
+                  <a:txBody>
+                    <a:bodyPr/>
+                    <a:lstStyle/>
+                    <a:p>
+                      <a:pPr algn="ctr" indent="0" marL="0">
+                        <a:buNone/>
+                      </a:pPr>
+                      <a:r>
+                        <a:rPr lang="en-US" sz="1150" dirty="0">
+                          <a:solidFill>
+                            <a:srgbClr val="16252C"/>
+                          </a:solidFill>
+                          <a:latin typeface="微软雅黑" pitchFamily="34" charset="0"/>
+                          <a:ea typeface="微软雅黑" pitchFamily="34" charset="-122"/>
+                          <a:cs typeface="微软雅黑" pitchFamily="34" charset="-120"/>
+                        </a:rPr>
+                        <a:t>0.0010</a:t>
+                      </a:r>
+                      <a:endParaRPr lang="en-US" sz="1150" dirty="0">
+                        <a:latin typeface="微软雅黑" charset="0"/>
+                        <a:ea typeface="微软雅黑" charset="0"/>
+                        <a:cs typeface="微软雅黑" charset="0"/>
+                      </a:endParaRPr>
+                    </a:p>
+                  </a:txBody>
+                  <a:tcPr marL="91440" marR="91440" marT="45720" marB="45720" anchor="ctr">
+                    <a:lnL w="6350" cap="flat" cmpd="sng" algn="ctr">
+                      <a:solidFill>
+                        <a:srgbClr val="DDE5E8"/>
+                      </a:solidFill>
+                      <a:prstDash val="solid"/>
+                      <a:round/>
+                      <a:headEnd type="none" w="med" len="med"/>
+                      <a:tailEnd type="none" w="med" len="med"/>
+                    </a:lnL>
+                    <a:lnR w="6350" cap="flat" cmpd="sng" algn="ctr">
+                      <a:solidFill>
+                        <a:srgbClr val="DDE5E8"/>
+                      </a:solidFill>
+                      <a:prstDash val="solid"/>
+                      <a:round/>
+                      <a:headEnd type="none" w="med" len="med"/>
+                      <a:tailEnd type="none" w="med" len="med"/>
+                    </a:lnR>
+                    <a:lnT w="6350" cap="flat" cmpd="sng" algn="ctr">
+                      <a:solidFill>
+                        <a:srgbClr val="DDE5E8"/>
+                      </a:solidFill>
+                      <a:prstDash val="solid"/>
+                      <a:round/>
+                      <a:headEnd type="none" w="med" len="med"/>
+                      <a:tailEnd type="none" w="med" len="med"/>
+                    </a:lnT>
+                    <a:lnB w="6350" cap="flat" cmpd="sng" algn="ctr">
+                      <a:solidFill>
+                        <a:srgbClr val="DDE5E8"/>
+                      </a:solidFill>
+                      <a:prstDash val="solid"/>
+                      <a:round/>
+                      <a:headEnd type="none" w="med" len="med"/>
+                      <a:tailEnd type="none" w="med" len="med"/>
+                    </a:lnB>
+                  </a:tcPr>
+                </a:tc>
+              </a:tr>
+              <a:tr h="338328">
+                <a:tc>
+                  <a:txBody>
+                    <a:bodyPr/>
+                    <a:lstStyle/>
+                    <a:p>
+                      <a:pPr algn="ctr" indent="0" marL="0">
+                        <a:buNone/>
+                      </a:pPr>
+                      <a:r>
+                        <a:rPr lang="en-US" sz="1150" dirty="0">
+                          <a:solidFill>
+                            <a:srgbClr val="16252C"/>
+                          </a:solidFill>
+                          <a:latin typeface="微软雅黑" pitchFamily="34" charset="0"/>
+                          <a:ea typeface="微软雅黑" pitchFamily="34" charset="-122"/>
+                          <a:cs typeface="微软雅黑" pitchFamily="34" charset="-120"/>
+                        </a:rPr>
+                        <a:t>（未定属）</a:t>
+                      </a:r>
+                      <a:endParaRPr lang="en-US" sz="1150" dirty="0">
+                        <a:latin typeface="微软雅黑" charset="0"/>
+                        <a:ea typeface="微软雅黑" charset="0"/>
+                        <a:cs typeface="微软雅黑" charset="0"/>
+                      </a:endParaRPr>
+                    </a:p>
+                  </a:txBody>
+                  <a:tcPr marL="91440" marR="91440" marT="45720" marB="45720" anchor="ctr">
+                    <a:lnL w="6350" cap="flat" cmpd="sng" algn="ctr">
+                      <a:solidFill>
+                        <a:srgbClr val="DDE5E8"/>
+                      </a:solidFill>
+                      <a:prstDash val="solid"/>
+                      <a:round/>
+                      <a:headEnd type="none" w="med" len="med"/>
+                      <a:tailEnd type="none" w="med" len="med"/>
+                    </a:lnL>
+                    <a:lnR w="6350" cap="flat" cmpd="sng" algn="ctr">
+                      <a:solidFill>
+                        <a:srgbClr val="DDE5E8"/>
+                      </a:solidFill>
+                      <a:prstDash val="solid"/>
+                      <a:round/>
+                      <a:headEnd type="none" w="med" len="med"/>
+                      <a:tailEnd type="none" w="med" len="med"/>
+                    </a:lnR>
+                    <a:lnT w="6350" cap="flat" cmpd="sng" algn="ctr">
+                      <a:solidFill>
+                        <a:srgbClr val="DDE5E8"/>
+                      </a:solidFill>
+                      <a:prstDash val="solid"/>
+                      <a:round/>
+                      <a:headEnd type="none" w="med" len="med"/>
+                      <a:tailEnd type="none" w="med" len="med"/>
+                    </a:lnT>
+                    <a:lnB w="6350" cap="flat" cmpd="sng" algn="ctr">
+                      <a:solidFill>
+                        <a:srgbClr val="DDE5E8"/>
+                      </a:solidFill>
+                      <a:prstDash val="solid"/>
+                      <a:round/>
+                      <a:headEnd type="none" w="med" len="med"/>
+                      <a:tailEnd type="none" w="med" len="med"/>
+                    </a:lnB>
+                  </a:tcPr>
+                </a:tc>
+                <a:tc>
+                  <a:txBody>
+                    <a:bodyPr/>
+                    <a:lstStyle/>
+                    <a:p>
+                      <a:pPr algn="ctr" indent="0" marL="0">
+                        <a:buNone/>
+                      </a:pPr>
+                      <a:r>
+                        <a:rPr lang="en-US" sz="1150" dirty="0">
+                          <a:solidFill>
+                            <a:srgbClr val="16252C"/>
+                          </a:solidFill>
+                          <a:latin typeface="微软雅黑" pitchFamily="34" charset="0"/>
+                          <a:ea typeface="微软雅黑" pitchFamily="34" charset="-122"/>
+                          <a:cs typeface="微软雅黑" pitchFamily="34" charset="-120"/>
+                        </a:rPr>
+                        <a:t>Lactobacillaceae</a:t>
+                      </a:r>
+                      <a:endParaRPr lang="en-US" sz="1150" dirty="0">
+                        <a:latin typeface="微软雅黑" charset="0"/>
+                        <a:ea typeface="微软雅黑" charset="0"/>
+                        <a:cs typeface="微软雅黑" charset="0"/>
+                      </a:endParaRPr>
+                    </a:p>
+                  </a:txBody>
+                  <a:tcPr marL="91440" marR="91440" marT="45720" marB="45720" anchor="ctr">
+                    <a:lnL w="6350" cap="flat" cmpd="sng" algn="ctr">
+                      <a:solidFill>
+                        <a:srgbClr val="DDE5E8"/>
+                      </a:solidFill>
+                      <a:prstDash val="solid"/>
+                      <a:round/>
+                      <a:headEnd type="none" w="med" len="med"/>
+                      <a:tailEnd type="none" w="med" len="med"/>
+                    </a:lnL>
+                    <a:lnR w="6350" cap="flat" cmpd="sng" algn="ctr">
+                      <a:solidFill>
+                        <a:srgbClr val="DDE5E8"/>
+                      </a:solidFill>
+                      <a:prstDash val="solid"/>
+                      <a:round/>
+                      <a:headEnd type="none" w="med" len="med"/>
+                      <a:tailEnd type="none" w="med" len="med"/>
+                    </a:lnR>
+                    <a:lnT w="6350" cap="flat" cmpd="sng" algn="ctr">
+                      <a:solidFill>
+                        <a:srgbClr val="DDE5E8"/>
+                      </a:solidFill>
+                      <a:prstDash val="solid"/>
+                      <a:round/>
+                      <a:headEnd type="none" w="med" len="med"/>
+                      <a:tailEnd type="none" w="med" len="med"/>
+                    </a:lnT>
+                    <a:lnB w="6350" cap="flat" cmpd="sng" algn="ctr">
+                      <a:solidFill>
+                        <a:srgbClr val="DDE5E8"/>
+                      </a:solidFill>
+                      <a:prstDash val="solid"/>
+                      <a:round/>
+                      <a:headEnd type="none" w="med" len="med"/>
+                      <a:tailEnd type="none" w="med" len="med"/>
+                    </a:lnB>
+                  </a:tcPr>
+                </a:tc>
+                <a:tc>
+                  <a:txBody>
+                    <a:bodyPr/>
+                    <a:lstStyle/>
+                    <a:p>
+                      <a:pPr algn="ctr" indent="0" marL="0">
+                        <a:buNone/>
+                      </a:pPr>
+                      <a:r>
+                        <a:rPr lang="en-US" sz="1150" b="1" dirty="0">
+                          <a:solidFill>
+                            <a:srgbClr val="16252C"/>
+                          </a:solidFill>
+                          <a:latin typeface="微软雅黑" pitchFamily="34" charset="0"/>
+                          <a:ea typeface="微软雅黑" pitchFamily="34" charset="-122"/>
+                          <a:cs typeface="微软雅黑" pitchFamily="34" charset="-120"/>
+                        </a:rPr>
+                        <a:t>Pos↓</a:t>
+                      </a:r>
+                      <a:endParaRPr lang="en-US" sz="1150" dirty="0">
+                        <a:latin typeface="微软雅黑" charset="0"/>
+                        <a:ea typeface="微软雅黑" charset="0"/>
+                        <a:cs typeface="微软雅黑" charset="0"/>
+                      </a:endParaRPr>
+                    </a:p>
+                  </a:txBody>
+                  <a:tcPr marL="91440" marR="91440" marT="45720" marB="45720" anchor="ctr">
+                    <a:lnL w="6350" cap="flat" cmpd="sng" algn="ctr">
+                      <a:solidFill>
+                        <a:srgbClr val="DDE5E8"/>
+                      </a:solidFill>
+                      <a:prstDash val="solid"/>
+                      <a:round/>
+                      <a:headEnd type="none" w="med" len="med"/>
+                      <a:tailEnd type="none" w="med" len="med"/>
+                    </a:lnL>
+                    <a:lnR w="6350" cap="flat" cmpd="sng" algn="ctr">
+                      <a:solidFill>
+                        <a:srgbClr val="DDE5E8"/>
+                      </a:solidFill>
+                      <a:prstDash val="solid"/>
+                      <a:round/>
+                      <a:headEnd type="none" w="med" len="med"/>
+                      <a:tailEnd type="none" w="med" len="med"/>
+                    </a:lnR>
+                    <a:lnT w="6350" cap="flat" cmpd="sng" algn="ctr">
+                      <a:solidFill>
+                        <a:srgbClr val="DDE5E8"/>
+                      </a:solidFill>
+                      <a:prstDash val="solid"/>
+                      <a:round/>
+                      <a:headEnd type="none" w="med" len="med"/>
+                      <a:tailEnd type="none" w="med" len="med"/>
+                    </a:lnT>
+                    <a:lnB w="6350" cap="flat" cmpd="sng" algn="ctr">
+                      <a:solidFill>
+                        <a:srgbClr val="DDE5E8"/>
+                      </a:solidFill>
+                      <a:prstDash val="solid"/>
+                      <a:round/>
+                      <a:headEnd type="none" w="med" len="med"/>
+                      <a:tailEnd type="none" w="med" len="med"/>
+                    </a:lnB>
+                    <a:solidFill>
+                      <a:srgbClr val="E4F0F0"/>
+                    </a:solidFill>
+                  </a:tcPr>
+                </a:tc>
+                <a:tc>
+                  <a:txBody>
+                    <a:bodyPr/>
+                    <a:lstStyle/>
+                    <a:p>
+                      <a:pPr algn="ctr" indent="0" marL="0">
+                        <a:buNone/>
+                      </a:pPr>
+                      <a:r>
+                        <a:rPr lang="en-US" sz="1150" dirty="0">
+                          <a:solidFill>
+                            <a:srgbClr val="16252C"/>
+                          </a:solidFill>
+                          <a:latin typeface="微软雅黑" pitchFamily="34" charset="0"/>
+                          <a:ea typeface="微软雅黑" pitchFamily="34" charset="-122"/>
+                          <a:cs typeface="微软雅黑" pitchFamily="34" charset="-120"/>
+                        </a:rPr>
+                        <a:t>0.0064</a:t>
+                      </a:r>
+                      <a:endParaRPr lang="en-US" sz="1150" dirty="0">
+                        <a:latin typeface="微软雅黑" charset="0"/>
+                        <a:ea typeface="微软雅黑" charset="0"/>
+                        <a:cs typeface="微软雅黑" charset="0"/>
+                      </a:endParaRPr>
+                    </a:p>
+                  </a:txBody>
+                  <a:tcPr marL="91440" marR="91440" marT="45720" marB="45720" anchor="ctr">
+                    <a:lnL w="6350" cap="flat" cmpd="sng" algn="ctr">
+                      <a:solidFill>
+                        <a:srgbClr val="DDE5E8"/>
+                      </a:solidFill>
+                      <a:prstDash val="solid"/>
+                      <a:round/>
+                      <a:headEnd type="none" w="med" len="med"/>
+                      <a:tailEnd type="none" w="med" len="med"/>
+                    </a:lnL>
+                    <a:lnR w="6350" cap="flat" cmpd="sng" algn="ctr">
+                      <a:solidFill>
+                        <a:srgbClr val="DDE5E8"/>
+                      </a:solidFill>
+                      <a:prstDash val="solid"/>
+                      <a:round/>
+                      <a:headEnd type="none" w="med" len="med"/>
+                      <a:tailEnd type="none" w="med" len="med"/>
+                    </a:lnR>
+                    <a:lnT w="6350" cap="flat" cmpd="sng" algn="ctr">
+                      <a:solidFill>
+                        <a:srgbClr val="DDE5E8"/>
+                      </a:solidFill>
+                      <a:prstDash val="solid"/>
+                      <a:round/>
+                      <a:headEnd type="none" w="med" len="med"/>
+                      <a:tailEnd type="none" w="med" len="med"/>
+                    </a:lnT>
+                    <a:lnB w="6350" cap="flat" cmpd="sng" algn="ctr">
+                      <a:solidFill>
+                        <a:srgbClr val="DDE5E8"/>
+                      </a:solidFill>
+                      <a:prstDash val="solid"/>
+                      <a:round/>
+                      <a:headEnd type="none" w="med" len="med"/>
+                      <a:tailEnd type="none" w="med" len="med"/>
+                    </a:lnB>
+                  </a:tcPr>
+                </a:tc>
+                <a:tc>
+                  <a:txBody>
+                    <a:bodyPr/>
+                    <a:lstStyle/>
+                    <a:p>
+                      <a:pPr algn="ctr" indent="0" marL="0">
+                        <a:buNone/>
+                      </a:pPr>
+                      <a:r>
+                        <a:rPr lang="en-US" sz="1150" dirty="0">
+                          <a:solidFill>
+                            <a:srgbClr val="16252C"/>
+                          </a:solidFill>
+                          <a:latin typeface="微软雅黑" pitchFamily="34" charset="0"/>
+                          <a:ea typeface="微软雅黑" pitchFamily="34" charset="-122"/>
+                          <a:cs typeface="微软雅黑" pitchFamily="34" charset="-120"/>
+                        </a:rPr>
+                        <a:t>−4.15</a:t>
+                      </a:r>
+                      <a:endParaRPr lang="en-US" sz="1150" dirty="0">
+                        <a:latin typeface="微软雅黑" charset="0"/>
+                        <a:ea typeface="微软雅黑" charset="0"/>
+                        <a:cs typeface="微软雅黑" charset="0"/>
+                      </a:endParaRPr>
+                    </a:p>
+                  </a:txBody>
+                  <a:tcPr marL="91440" marR="91440" marT="45720" marB="45720" anchor="ctr">
+                    <a:lnL w="6350" cap="flat" cmpd="sng" algn="ctr">
+                      <a:solidFill>
+                        <a:srgbClr val="DDE5E8"/>
+                      </a:solidFill>
+                      <a:prstDash val="solid"/>
+                      <a:round/>
+                      <a:headEnd type="none" w="med" len="med"/>
+                      <a:tailEnd type="none" w="med" len="med"/>
+                    </a:lnL>
+                    <a:lnR w="6350" cap="flat" cmpd="sng" algn="ctr">
+                      <a:solidFill>
+                        <a:srgbClr val="DDE5E8"/>
+                      </a:solidFill>
+                      <a:prstDash val="solid"/>
+                      <a:round/>
+                      <a:headEnd type="none" w="med" len="med"/>
+                      <a:tailEnd type="none" w="med" len="med"/>
+                    </a:lnR>
+                    <a:lnT w="6350" cap="flat" cmpd="sng" algn="ctr">
+                      <a:solidFill>
+                        <a:srgbClr val="DDE5E8"/>
+                      </a:solidFill>
+                      <a:prstDash val="solid"/>
+                      <a:round/>
+                      <a:headEnd type="none" w="med" len="med"/>
+                      <a:tailEnd type="none" w="med" len="med"/>
+                    </a:lnT>
+                    <a:lnB w="6350" cap="flat" cmpd="sng" algn="ctr">
+                      <a:solidFill>
+                        <a:srgbClr val="DDE5E8"/>
+                      </a:solidFill>
+                      <a:prstDash val="solid"/>
+                      <a:round/>
+                      <a:headEnd type="none" w="med" len="med"/>
+                      <a:tailEnd type="none" w="med" len="med"/>
+                    </a:lnB>
+                  </a:tcPr>
+                </a:tc>
+                <a:tc>
+                  <a:txBody>
+                    <a:bodyPr/>
+                    <a:lstStyle/>
+                    <a:p>
+                      <a:pPr algn="ctr" indent="0" marL="0">
+                        <a:buNone/>
+                      </a:pPr>
+                      <a:r>
+                        <a:rPr lang="en-US" sz="1150" dirty="0">
+                          <a:solidFill>
+                            <a:srgbClr val="16252C"/>
+                          </a:solidFill>
+                          <a:latin typeface="微软雅黑" pitchFamily="34" charset="0"/>
+                          <a:ea typeface="微软雅黑" pitchFamily="34" charset="-122"/>
+                          <a:cs typeface="微软雅黑" pitchFamily="34" charset="-120"/>
+                        </a:rPr>
+                        <a:t>0.0017</a:t>
+                      </a:r>
+                      <a:endParaRPr lang="en-US" sz="1150" dirty="0">
+                        <a:latin typeface="微软雅黑" charset="0"/>
+                        <a:ea typeface="微软雅黑" charset="0"/>
+                        <a:cs typeface="微软雅黑" charset="0"/>
+                      </a:endParaRPr>
+                    </a:p>
+                  </a:txBody>
+                  <a:tcPr marL="91440" marR="91440" marT="45720" marB="45720" anchor="ctr">
+                    <a:lnL w="6350" cap="flat" cmpd="sng" algn="ctr">
+                      <a:solidFill>
+                        <a:srgbClr val="DDE5E8"/>
+                      </a:solidFill>
+                      <a:prstDash val="solid"/>
+                      <a:round/>
+                      <a:headEnd type="none" w="med" len="med"/>
+                      <a:tailEnd type="none" w="med" len="med"/>
+                    </a:lnL>
+                    <a:lnR w="6350" cap="flat" cmpd="sng" algn="ctr">
+                      <a:solidFill>
+                        <a:srgbClr val="DDE5E8"/>
+                      </a:solidFill>
+                      <a:prstDash val="solid"/>
+                      <a:round/>
+                      <a:headEnd type="none" w="med" len="med"/>
+                      <a:tailEnd type="none" w="med" len="med"/>
+                    </a:lnR>
+                    <a:lnT w="6350" cap="flat" cmpd="sng" algn="ctr">
+                      <a:solidFill>
+                        <a:srgbClr val="DDE5E8"/>
+                      </a:solidFill>
+                      <a:prstDash val="solid"/>
+                      <a:round/>
+                      <a:headEnd type="none" w="med" len="med"/>
+                      <a:tailEnd type="none" w="med" len="med"/>
+                    </a:lnT>
+                    <a:lnB w="6350" cap="flat" cmpd="sng" algn="ctr">
+                      <a:solidFill>
+                        <a:srgbClr val="DDE5E8"/>
+                      </a:solidFill>
+                      <a:prstDash val="solid"/>
+                      <a:round/>
+                      <a:headEnd type="none" w="med" len="med"/>
+                      <a:tailEnd type="none" w="med" len="med"/>
+                    </a:lnB>
+                  </a:tcPr>
+                </a:tc>
+              </a:tr>
+              <a:tr h="338328">
+                <a:tc>
+                  <a:txBody>
+                    <a:bodyPr/>
+                    <a:lstStyle/>
+                    <a:p>
+                      <a:pPr algn="ctr" indent="0" marL="0">
+                        <a:buNone/>
+                      </a:pPr>
+                      <a:r>
+                        <a:rPr lang="en-US" sz="1150" dirty="0">
+                          <a:solidFill>
+                            <a:srgbClr val="16252C"/>
+                          </a:solidFill>
+                          <a:latin typeface="微软雅黑" pitchFamily="34" charset="0"/>
+                          <a:ea typeface="微软雅黑" pitchFamily="34" charset="-122"/>
+                          <a:cs typeface="微软雅黑" pitchFamily="34" charset="-120"/>
+                        </a:rPr>
+                        <a:t>Incertae_Sedis</a:t>
+                      </a:r>
+                      <a:endParaRPr lang="en-US" sz="1150" dirty="0">
+                        <a:latin typeface="微软雅黑" charset="0"/>
+                        <a:ea typeface="微软雅黑" charset="0"/>
+                        <a:cs typeface="微软雅黑" charset="0"/>
+                      </a:endParaRPr>
+                    </a:p>
+                  </a:txBody>
+                  <a:tcPr marL="91440" marR="91440" marT="45720" marB="45720" anchor="ctr">
+                    <a:lnL w="6350" cap="flat" cmpd="sng" algn="ctr">
+                      <a:solidFill>
+                        <a:srgbClr val="DDE5E8"/>
+                      </a:solidFill>
+                      <a:prstDash val="solid"/>
+                      <a:round/>
+                      <a:headEnd type="none" w="med" len="med"/>
+                      <a:tailEnd type="none" w="med" len="med"/>
+                    </a:lnL>
+                    <a:lnR w="6350" cap="flat" cmpd="sng" algn="ctr">
+                      <a:solidFill>
+                        <a:srgbClr val="DDE5E8"/>
+                      </a:solidFill>
+                      <a:prstDash val="solid"/>
+                      <a:round/>
+                      <a:headEnd type="none" w="med" len="med"/>
+                      <a:tailEnd type="none" w="med" len="med"/>
+                    </a:lnR>
+                    <a:lnT w="6350" cap="flat" cmpd="sng" algn="ctr">
+                      <a:solidFill>
+                        <a:srgbClr val="DDE5E8"/>
+                      </a:solidFill>
+                      <a:prstDash val="solid"/>
+                      <a:round/>
+                      <a:headEnd type="none" w="med" len="med"/>
+                      <a:tailEnd type="none" w="med" len="med"/>
+                    </a:lnT>
+                    <a:lnB w="6350" cap="flat" cmpd="sng" algn="ctr">
+                      <a:solidFill>
+                        <a:srgbClr val="DDE5E8"/>
+                      </a:solidFill>
+                      <a:prstDash val="solid"/>
+                      <a:round/>
+                      <a:headEnd type="none" w="med" len="med"/>
+                      <a:tailEnd type="none" w="med" len="med"/>
+                    </a:lnB>
+                  </a:tcPr>
+                </a:tc>
+                <a:tc>
+                  <a:txBody>
+                    <a:bodyPr/>
+                    <a:lstStyle/>
+                    <a:p>
+                      <a:pPr algn="ctr" indent="0" marL="0">
+                        <a:buNone/>
+                      </a:pPr>
+                      <a:r>
+                        <a:rPr lang="en-US" sz="1150" dirty="0">
+                          <a:solidFill>
+                            <a:srgbClr val="16252C"/>
+                          </a:solidFill>
+                          <a:latin typeface="微软雅黑" pitchFamily="34" charset="0"/>
+                          <a:ea typeface="微软雅黑" pitchFamily="34" charset="-122"/>
+                          <a:cs typeface="微软雅黑" pitchFamily="34" charset="-120"/>
+                        </a:rPr>
+                        <a:t>—</a:t>
+                      </a:r>
+                      <a:endParaRPr lang="en-US" sz="1150" dirty="0">
+                        <a:latin typeface="微软雅黑" charset="0"/>
+                        <a:ea typeface="微软雅黑" charset="0"/>
+                        <a:cs typeface="微软雅黑" charset="0"/>
+                      </a:endParaRPr>
+                    </a:p>
+                  </a:txBody>
+                  <a:tcPr marL="91440" marR="91440" marT="45720" marB="45720" anchor="ctr">
+                    <a:lnL w="6350" cap="flat" cmpd="sng" algn="ctr">
+                      <a:solidFill>
+                        <a:srgbClr val="DDE5E8"/>
+                      </a:solidFill>
+                      <a:prstDash val="solid"/>
+                      <a:round/>
+                      <a:headEnd type="none" w="med" len="med"/>
+                      <a:tailEnd type="none" w="med" len="med"/>
+                    </a:lnL>
+                    <a:lnR w="6350" cap="flat" cmpd="sng" algn="ctr">
+                      <a:solidFill>
+                        <a:srgbClr val="DDE5E8"/>
+                      </a:solidFill>
+                      <a:prstDash val="solid"/>
+                      <a:round/>
+                      <a:headEnd type="none" w="med" len="med"/>
+                      <a:tailEnd type="none" w="med" len="med"/>
+                    </a:lnR>
+                    <a:lnT w="6350" cap="flat" cmpd="sng" algn="ctr">
+                      <a:solidFill>
+                        <a:srgbClr val="DDE5E8"/>
+                      </a:solidFill>
+                      <a:prstDash val="solid"/>
+                      <a:round/>
+                      <a:headEnd type="none" w="med" len="med"/>
+                      <a:tailEnd type="none" w="med" len="med"/>
+                    </a:lnT>
+                    <a:lnB w="6350" cap="flat" cmpd="sng" algn="ctr">
+                      <a:solidFill>
+                        <a:srgbClr val="DDE5E8"/>
+                      </a:solidFill>
+                      <a:prstDash val="solid"/>
+                      <a:round/>
+                      <a:headEnd type="none" w="med" len="med"/>
+                      <a:tailEnd type="none" w="med" len="med"/>
+                    </a:lnB>
+                  </a:tcPr>
+                </a:tc>
+                <a:tc>
+                  <a:txBody>
+                    <a:bodyPr/>
+                    <a:lstStyle/>
+                    <a:p>
+                      <a:pPr algn="ctr" indent="0" marL="0">
+                        <a:buNone/>
+                      </a:pPr>
+                      <a:r>
+                        <a:rPr lang="en-US" sz="1150" b="1" dirty="0">
+                          <a:solidFill>
+                            <a:srgbClr val="16252C"/>
+                          </a:solidFill>
+                          <a:latin typeface="微软雅黑" pitchFamily="34" charset="0"/>
+                          <a:ea typeface="微软雅黑" pitchFamily="34" charset="-122"/>
+                          <a:cs typeface="微软雅黑" pitchFamily="34" charset="-120"/>
+                        </a:rPr>
+                        <a:t>Pos↓</a:t>
+                      </a:r>
+                      <a:endParaRPr lang="en-US" sz="1150" dirty="0">
+                        <a:latin typeface="微软雅黑" charset="0"/>
+                        <a:ea typeface="微软雅黑" charset="0"/>
+                        <a:cs typeface="微软雅黑" charset="0"/>
+                      </a:endParaRPr>
+                    </a:p>
+                  </a:txBody>
+                  <a:tcPr marL="91440" marR="91440" marT="45720" marB="45720" anchor="ctr">
+                    <a:lnL w="6350" cap="flat" cmpd="sng" algn="ctr">
+                      <a:solidFill>
+                        <a:srgbClr val="DDE5E8"/>
+                      </a:solidFill>
+                      <a:prstDash val="solid"/>
+                      <a:round/>
+                      <a:headEnd type="none" w="med" len="med"/>
+                      <a:tailEnd type="none" w="med" len="med"/>
+                    </a:lnL>
+                    <a:lnR w="6350" cap="flat" cmpd="sng" algn="ctr">
+                      <a:solidFill>
+                        <a:srgbClr val="DDE5E8"/>
+                      </a:solidFill>
+                      <a:prstDash val="solid"/>
+                      <a:round/>
+                      <a:headEnd type="none" w="med" len="med"/>
+                      <a:tailEnd type="none" w="med" len="med"/>
+                    </a:lnR>
+                    <a:lnT w="6350" cap="flat" cmpd="sng" algn="ctr">
+                      <a:solidFill>
+                        <a:srgbClr val="DDE5E8"/>
+                      </a:solidFill>
+                      <a:prstDash val="solid"/>
+                      <a:round/>
+                      <a:headEnd type="none" w="med" len="med"/>
+                      <a:tailEnd type="none" w="med" len="med"/>
+                    </a:lnT>
+                    <a:lnB w="6350" cap="flat" cmpd="sng" algn="ctr">
+                      <a:solidFill>
+                        <a:srgbClr val="DDE5E8"/>
+                      </a:solidFill>
+                      <a:prstDash val="solid"/>
+                      <a:round/>
+                      <a:headEnd type="none" w="med" len="med"/>
+                      <a:tailEnd type="none" w="med" len="med"/>
+                    </a:lnB>
+                    <a:solidFill>
+                      <a:srgbClr val="E4F0F0"/>
+                    </a:solidFill>
+                  </a:tcPr>
+                </a:tc>
+                <a:tc>
+                  <a:txBody>
+                    <a:bodyPr/>
+                    <a:lstStyle/>
+                    <a:p>
+                      <a:pPr algn="ctr" indent="0" marL="0">
+                        <a:buNone/>
+                      </a:pPr>
+                      <a:r>
+                        <a:rPr lang="en-US" sz="1150" dirty="0">
+                          <a:solidFill>
+                            <a:srgbClr val="16252C"/>
+                          </a:solidFill>
+                          <a:latin typeface="微软雅黑" pitchFamily="34" charset="0"/>
+                          <a:ea typeface="微软雅黑" pitchFamily="34" charset="-122"/>
+                          <a:cs typeface="微软雅黑" pitchFamily="34" charset="-120"/>
+                        </a:rPr>
+                        <a:t>0.0022</a:t>
+                      </a:r>
+                      <a:endParaRPr lang="en-US" sz="1150" dirty="0">
+                        <a:latin typeface="微软雅黑" charset="0"/>
+                        <a:ea typeface="微软雅黑" charset="0"/>
+                        <a:cs typeface="微软雅黑" charset="0"/>
+                      </a:endParaRPr>
+                    </a:p>
+                  </a:txBody>
+                  <a:tcPr marL="91440" marR="91440" marT="45720" marB="45720" anchor="ctr">
+                    <a:lnL w="6350" cap="flat" cmpd="sng" algn="ctr">
+                      <a:solidFill>
+                        <a:srgbClr val="DDE5E8"/>
+                      </a:solidFill>
+                      <a:prstDash val="solid"/>
+                      <a:round/>
+                      <a:headEnd type="none" w="med" len="med"/>
+                      <a:tailEnd type="none" w="med" len="med"/>
+                    </a:lnL>
+                    <a:lnR w="6350" cap="flat" cmpd="sng" algn="ctr">
+                      <a:solidFill>
+                        <a:srgbClr val="DDE5E8"/>
+                      </a:solidFill>
+                      <a:prstDash val="solid"/>
+                      <a:round/>
+                      <a:headEnd type="none" w="med" len="med"/>
+                      <a:tailEnd type="none" w="med" len="med"/>
+                    </a:lnR>
+                    <a:lnT w="6350" cap="flat" cmpd="sng" algn="ctr">
+                      <a:solidFill>
+                        <a:srgbClr val="DDE5E8"/>
+                      </a:solidFill>
+                      <a:prstDash val="solid"/>
+                      <a:round/>
+                      <a:headEnd type="none" w="med" len="med"/>
+                      <a:tailEnd type="none" w="med" len="med"/>
+                    </a:lnT>
+                    <a:lnB w="6350" cap="flat" cmpd="sng" algn="ctr">
+                      <a:solidFill>
+                        <a:srgbClr val="DDE5E8"/>
+                      </a:solidFill>
+                      <a:prstDash val="solid"/>
+                      <a:round/>
+                      <a:headEnd type="none" w="med" len="med"/>
+                      <a:tailEnd type="none" w="med" len="med"/>
+                    </a:lnB>
+                  </a:tcPr>
+                </a:tc>
+                <a:tc>
+                  <a:txBody>
+                    <a:bodyPr/>
+                    <a:lstStyle/>
+                    <a:p>
+                      <a:pPr algn="ctr" indent="0" marL="0">
+                        <a:buNone/>
+                      </a:pPr>
+                      <a:r>
+                        <a:rPr lang="en-US" sz="1150" dirty="0">
+                          <a:solidFill>
+                            <a:srgbClr val="16252C"/>
+                          </a:solidFill>
+                          <a:latin typeface="微软雅黑" pitchFamily="34" charset="0"/>
+                          <a:ea typeface="微软雅黑" pitchFamily="34" charset="-122"/>
+                          <a:cs typeface="微软雅黑" pitchFamily="34" charset="-120"/>
+                        </a:rPr>
+                        <a:t>−2.60</a:t>
+                      </a:r>
+                      <a:endParaRPr lang="en-US" sz="1150" dirty="0">
+                        <a:latin typeface="微软雅黑" charset="0"/>
+                        <a:ea typeface="微软雅黑" charset="0"/>
+                        <a:cs typeface="微软雅黑" charset="0"/>
+                      </a:endParaRPr>
+                    </a:p>
+                  </a:txBody>
+                  <a:tcPr marL="91440" marR="91440" marT="45720" marB="45720" anchor="ctr">
+                    <a:lnL w="6350" cap="flat" cmpd="sng" algn="ctr">
+                      <a:solidFill>
+                        <a:srgbClr val="DDE5E8"/>
+                      </a:solidFill>
+                      <a:prstDash val="solid"/>
+                      <a:round/>
+                      <a:headEnd type="none" w="med" len="med"/>
+                      <a:tailEnd type="none" w="med" len="med"/>
+                    </a:lnL>
+                    <a:lnR w="6350" cap="flat" cmpd="sng" algn="ctr">
+                      <a:solidFill>
+                        <a:srgbClr val="DDE5E8"/>
+                      </a:solidFill>
+                      <a:prstDash val="solid"/>
+                      <a:round/>
+                      <a:headEnd type="none" w="med" len="med"/>
+                      <a:tailEnd type="none" w="med" len="med"/>
+                    </a:lnR>
+                    <a:lnT w="6350" cap="flat" cmpd="sng" algn="ctr">
+                      <a:solidFill>
+                        <a:srgbClr val="DDE5E8"/>
+                      </a:solidFill>
+                      <a:prstDash val="solid"/>
+                      <a:round/>
+                      <a:headEnd type="none" w="med" len="med"/>
+                      <a:tailEnd type="none" w="med" len="med"/>
+                    </a:lnT>
+                    <a:lnB w="6350" cap="flat" cmpd="sng" algn="ctr">
+                      <a:solidFill>
+                        <a:srgbClr val="DDE5E8"/>
+                      </a:solidFill>
+                      <a:prstDash val="solid"/>
+                      <a:round/>
+                      <a:headEnd type="none" w="med" len="med"/>
+                      <a:tailEnd type="none" w="med" len="med"/>
+                    </a:lnB>
+                  </a:tcPr>
+                </a:tc>
+                <a:tc>
+                  <a:txBody>
+                    <a:bodyPr/>
+                    <a:lstStyle/>
+                    <a:p>
+                      <a:pPr algn="ctr" indent="0" marL="0">
+                        <a:buNone/>
+                      </a:pPr>
+                      <a:r>
+                        <a:rPr lang="en-US" sz="1150" dirty="0">
+                          <a:solidFill>
+                            <a:srgbClr val="16252C"/>
+                          </a:solidFill>
+                          <a:latin typeface="微软雅黑" pitchFamily="34" charset="0"/>
+                          <a:ea typeface="微软雅黑" pitchFamily="34" charset="-122"/>
+                          <a:cs typeface="微软雅黑" pitchFamily="34" charset="-120"/>
+                        </a:rPr>
+                        <a:t>0.0499</a:t>
+                      </a:r>
+                      <a:endParaRPr lang="en-US" sz="1150" dirty="0">
+                        <a:latin typeface="微软雅黑" charset="0"/>
+                        <a:ea typeface="微软雅黑" charset="0"/>
+                        <a:cs typeface="微软雅黑" charset="0"/>
+                      </a:endParaRPr>
+                    </a:p>
+                  </a:txBody>
+                  <a:tcPr marL="91440" marR="91440" marT="45720" marB="45720" anchor="ctr">
+                    <a:lnL w="6350" cap="flat" cmpd="sng" algn="ctr">
+                      <a:solidFill>
+                        <a:srgbClr val="DDE5E8"/>
+                      </a:solidFill>
+                      <a:prstDash val="solid"/>
+                      <a:round/>
+                      <a:headEnd type="none" w="med" len="med"/>
+                      <a:tailEnd type="none" w="med" len="med"/>
+                    </a:lnL>
+                    <a:lnR w="6350" cap="flat" cmpd="sng" algn="ctr">
+                      <a:solidFill>
+                        <a:srgbClr val="DDE5E8"/>
+                      </a:solidFill>
+                      <a:prstDash val="solid"/>
+                      <a:round/>
+                      <a:headEnd type="none" w="med" len="med"/>
+                      <a:tailEnd type="none" w="med" len="med"/>
+                    </a:lnR>
+                    <a:lnT w="6350" cap="flat" cmpd="sng" algn="ctr">
+                      <a:solidFill>
+                        <a:srgbClr val="DDE5E8"/>
+                      </a:solidFill>
+                      <a:prstDash val="solid"/>
+                      <a:round/>
+                      <a:headEnd type="none" w="med" len="med"/>
+                      <a:tailEnd type="none" w="med" len="med"/>
+                    </a:lnT>
+                    <a:lnB w="6350" cap="flat" cmpd="sng" algn="ctr">
+                      <a:solidFill>
+                        <a:srgbClr val="DDE5E8"/>
+                      </a:solidFill>
+                      <a:prstDash val="solid"/>
+                      <a:round/>
+                      <a:headEnd type="none" w="med" len="med"/>
+                      <a:tailEnd type="none" w="med" len="med"/>
+                    </a:lnB>
+                  </a:tcPr>
+                </a:tc>
+              </a:tr>
+              <a:tr h="338328">
+                <a:tc>
+                  <a:txBody>
+                    <a:bodyPr/>
+                    <a:lstStyle/>
+                    <a:p>
+                      <a:pPr algn="ctr" indent="0" marL="0">
+                        <a:buNone/>
+                      </a:pPr>
+                      <a:r>
+                        <a:rPr lang="en-US" sz="1150" dirty="0">
+                          <a:solidFill>
+                            <a:srgbClr val="16252C"/>
+                          </a:solidFill>
+                          <a:latin typeface="微软雅黑" pitchFamily="34" charset="0"/>
+                          <a:ea typeface="微软雅黑" pitchFamily="34" charset="-122"/>
+                          <a:cs typeface="微软雅黑" pitchFamily="34" charset="-120"/>
+                        </a:rPr>
+                        <a:t>Weissella</a:t>
+                      </a:r>
+                      <a:endParaRPr lang="en-US" sz="1150" dirty="0">
+                        <a:latin typeface="微软雅黑" charset="0"/>
+                        <a:ea typeface="微软雅黑" charset="0"/>
+                        <a:cs typeface="微软雅黑" charset="0"/>
+                      </a:endParaRPr>
+                    </a:p>
+                  </a:txBody>
+                  <a:tcPr marL="91440" marR="91440" marT="45720" marB="45720" anchor="ctr">
+                    <a:lnL w="6350" cap="flat" cmpd="sng" algn="ctr">
+                      <a:solidFill>
+                        <a:srgbClr val="DDE5E8"/>
+                      </a:solidFill>
+                      <a:prstDash val="solid"/>
+                      <a:round/>
+                      <a:headEnd type="none" w="med" len="med"/>
+                      <a:tailEnd type="none" w="med" len="med"/>
+                    </a:lnL>
+                    <a:lnR w="6350" cap="flat" cmpd="sng" algn="ctr">
+                      <a:solidFill>
+                        <a:srgbClr val="DDE5E8"/>
+                      </a:solidFill>
+                      <a:prstDash val="solid"/>
+                      <a:round/>
+                      <a:headEnd type="none" w="med" len="med"/>
+                      <a:tailEnd type="none" w="med" len="med"/>
+                    </a:lnR>
+                    <a:lnT w="6350" cap="flat" cmpd="sng" algn="ctr">
+                      <a:solidFill>
+                        <a:srgbClr val="DDE5E8"/>
+                      </a:solidFill>
+                      <a:prstDash val="solid"/>
+                      <a:round/>
+                      <a:headEnd type="none" w="med" len="med"/>
+                      <a:tailEnd type="none" w="med" len="med"/>
+                    </a:lnT>
+                    <a:lnB w="6350" cap="flat" cmpd="sng" algn="ctr">
+                      <a:solidFill>
+                        <a:srgbClr val="DDE5E8"/>
+                      </a:solidFill>
+                      <a:prstDash val="solid"/>
+                      <a:round/>
+                      <a:headEnd type="none" w="med" len="med"/>
+                      <a:tailEnd type="none" w="med" len="med"/>
+                    </a:lnB>
+                  </a:tcPr>
+                </a:tc>
+                <a:tc>
+                  <a:txBody>
+                    <a:bodyPr/>
+                    <a:lstStyle/>
+                    <a:p>
+                      <a:pPr algn="ctr" indent="0" marL="0">
+                        <a:buNone/>
+                      </a:pPr>
+                      <a:r>
+                        <a:rPr lang="en-US" sz="1150" dirty="0">
+                          <a:solidFill>
+                            <a:srgbClr val="16252C"/>
+                          </a:solidFill>
+                          <a:latin typeface="微软雅黑" pitchFamily="34" charset="0"/>
+                          <a:ea typeface="微软雅黑" pitchFamily="34" charset="-122"/>
+                          <a:cs typeface="微软雅黑" pitchFamily="34" charset="-120"/>
+                        </a:rPr>
+                        <a:t>Lactobacillaceae</a:t>
+                      </a:r>
+                      <a:endParaRPr lang="en-US" sz="1150" dirty="0">
+                        <a:latin typeface="微软雅黑" charset="0"/>
+                        <a:ea typeface="微软雅黑" charset="0"/>
+                        <a:cs typeface="微软雅黑" charset="0"/>
+                      </a:endParaRPr>
+                    </a:p>
+                  </a:txBody>
+                  <a:tcPr marL="91440" marR="91440" marT="45720" marB="45720" anchor="ctr">
+                    <a:lnL w="6350" cap="flat" cmpd="sng" algn="ctr">
+                      <a:solidFill>
+                        <a:srgbClr val="DDE5E8"/>
+                      </a:solidFill>
+                      <a:prstDash val="solid"/>
+                      <a:round/>
+                      <a:headEnd type="none" w="med" len="med"/>
+                      <a:tailEnd type="none" w="med" len="med"/>
+                    </a:lnL>
+                    <a:lnR w="6350" cap="flat" cmpd="sng" algn="ctr">
+                      <a:solidFill>
+                        <a:srgbClr val="DDE5E8"/>
+                      </a:solidFill>
+                      <a:prstDash val="solid"/>
+                      <a:round/>
+                      <a:headEnd type="none" w="med" len="med"/>
+                      <a:tailEnd type="none" w="med" len="med"/>
+                    </a:lnR>
+                    <a:lnT w="6350" cap="flat" cmpd="sng" algn="ctr">
+                      <a:solidFill>
+                        <a:srgbClr val="DDE5E8"/>
+                      </a:solidFill>
+                      <a:prstDash val="solid"/>
+                      <a:round/>
+                      <a:headEnd type="none" w="med" len="med"/>
+                      <a:tailEnd type="none" w="med" len="med"/>
+                    </a:lnT>
+                    <a:lnB w="6350" cap="flat" cmpd="sng" algn="ctr">
+                      <a:solidFill>
+                        <a:srgbClr val="DDE5E8"/>
+                      </a:solidFill>
+                      <a:prstDash val="solid"/>
+                      <a:round/>
+                      <a:headEnd type="none" w="med" len="med"/>
+                      <a:tailEnd type="none" w="med" len="med"/>
+                    </a:lnB>
+                  </a:tcPr>
+                </a:tc>
+                <a:tc>
+                  <a:txBody>
+                    <a:bodyPr/>
+                    <a:lstStyle/>
+                    <a:p>
+                      <a:pPr algn="ctr" indent="0" marL="0">
+                        <a:buNone/>
+                      </a:pPr>
+                      <a:r>
+                        <a:rPr lang="en-US" sz="1150" b="1" dirty="0">
+                          <a:solidFill>
+                            <a:srgbClr val="16252C"/>
+                          </a:solidFill>
+                          <a:latin typeface="微软雅黑" pitchFamily="34" charset="0"/>
+                          <a:ea typeface="微软雅黑" pitchFamily="34" charset="-122"/>
+                          <a:cs typeface="微软雅黑" pitchFamily="34" charset="-120"/>
+                        </a:rPr>
+                        <a:t>Pos↓</a:t>
+                      </a:r>
+                      <a:endParaRPr lang="en-US" sz="1150" dirty="0">
+                        <a:latin typeface="微软雅黑" charset="0"/>
+                        <a:ea typeface="微软雅黑" charset="0"/>
+                        <a:cs typeface="微软雅黑" charset="0"/>
+                      </a:endParaRPr>
+                    </a:p>
+                  </a:txBody>
+                  <a:tcPr marL="91440" marR="91440" marT="45720" marB="45720" anchor="ctr">
+                    <a:lnL w="6350" cap="flat" cmpd="sng" algn="ctr">
+                      <a:solidFill>
+                        <a:srgbClr val="DDE5E8"/>
+                      </a:solidFill>
+                      <a:prstDash val="solid"/>
+                      <a:round/>
+                      <a:headEnd type="none" w="med" len="med"/>
+                      <a:tailEnd type="none" w="med" len="med"/>
+                    </a:lnL>
+                    <a:lnR w="6350" cap="flat" cmpd="sng" algn="ctr">
+                      <a:solidFill>
+                        <a:srgbClr val="DDE5E8"/>
+                      </a:solidFill>
+                      <a:prstDash val="solid"/>
+                      <a:round/>
+                      <a:headEnd type="none" w="med" len="med"/>
+                      <a:tailEnd type="none" w="med" len="med"/>
+                    </a:lnR>
+                    <a:lnT w="6350" cap="flat" cmpd="sng" algn="ctr">
+                      <a:solidFill>
+                        <a:srgbClr val="DDE5E8"/>
+                      </a:solidFill>
+                      <a:prstDash val="solid"/>
+                      <a:round/>
+                      <a:headEnd type="none" w="med" len="med"/>
+                      <a:tailEnd type="none" w="med" len="med"/>
+                    </a:lnT>
+                    <a:lnB w="6350" cap="flat" cmpd="sng" algn="ctr">
+                      <a:solidFill>
+                        <a:srgbClr val="DDE5E8"/>
+                      </a:solidFill>
+                      <a:prstDash val="solid"/>
+                      <a:round/>
+                      <a:headEnd type="none" w="med" len="med"/>
+                      <a:tailEnd type="none" w="med" len="med"/>
+                    </a:lnB>
+                    <a:solidFill>
+                      <a:srgbClr val="E4F0F0"/>
+                    </a:solidFill>
+                  </a:tcPr>
+                </a:tc>
+                <a:tc>
+                  <a:txBody>
+                    <a:bodyPr/>
+                    <a:lstStyle/>
+                    <a:p>
+                      <a:pPr algn="ctr" indent="0" marL="0">
+                        <a:buNone/>
+                      </a:pPr>
+                      <a:r>
+                        <a:rPr lang="en-US" sz="1150" dirty="0">
+                          <a:solidFill>
+                            <a:srgbClr val="16252C"/>
+                          </a:solidFill>
+                          <a:latin typeface="微软雅黑" pitchFamily="34" charset="0"/>
+                          <a:ea typeface="微软雅黑" pitchFamily="34" charset="-122"/>
+                          <a:cs typeface="微软雅黑" pitchFamily="34" charset="-120"/>
+                        </a:rPr>
+                        <a:t>0.0020</a:t>
+                      </a:r>
+                      <a:endParaRPr lang="en-US" sz="1150" dirty="0">
+                        <a:latin typeface="微软雅黑" charset="0"/>
+                        <a:ea typeface="微软雅黑" charset="0"/>
+                        <a:cs typeface="微软雅黑" charset="0"/>
+                      </a:endParaRPr>
+                    </a:p>
+                  </a:txBody>
+                  <a:tcPr marL="91440" marR="91440" marT="45720" marB="45720" anchor="ctr">
+                    <a:lnL w="6350" cap="flat" cmpd="sng" algn="ctr">
+                      <a:solidFill>
+                        <a:srgbClr val="DDE5E8"/>
+                      </a:solidFill>
+                      <a:prstDash val="solid"/>
+                      <a:round/>
+                      <a:headEnd type="none" w="med" len="med"/>
+                      <a:tailEnd type="none" w="med" len="med"/>
+                    </a:lnL>
+                    <a:lnR w="6350" cap="flat" cmpd="sng" algn="ctr">
+                      <a:solidFill>
+                        <a:srgbClr val="DDE5E8"/>
+                      </a:solidFill>
+                      <a:prstDash val="solid"/>
+                      <a:round/>
+                      <a:headEnd type="none" w="med" len="med"/>
+                      <a:tailEnd type="none" w="med" len="med"/>
+                    </a:lnR>
+                    <a:lnT w="6350" cap="flat" cmpd="sng" algn="ctr">
+                      <a:solidFill>
+                        <a:srgbClr val="DDE5E8"/>
+                      </a:solidFill>
+                      <a:prstDash val="solid"/>
+                      <a:round/>
+                      <a:headEnd type="none" w="med" len="med"/>
+                      <a:tailEnd type="none" w="med" len="med"/>
+                    </a:lnT>
+                    <a:lnB w="6350" cap="flat" cmpd="sng" algn="ctr">
+                      <a:solidFill>
+                        <a:srgbClr val="DDE5E8"/>
+                      </a:solidFill>
+                      <a:prstDash val="solid"/>
+                      <a:round/>
+                      <a:headEnd type="none" w="med" len="med"/>
+                      <a:tailEnd type="none" w="med" len="med"/>
+                    </a:lnB>
+                  </a:tcPr>
+                </a:tc>
+                <a:tc>
+                  <a:txBody>
+                    <a:bodyPr/>
+                    <a:lstStyle/>
+                    <a:p>
+                      <a:pPr algn="ctr" indent="0" marL="0">
+                        <a:buNone/>
+                      </a:pPr>
+                      <a:r>
+                        <a:rPr lang="en-US" sz="1150" dirty="0">
+                          <a:solidFill>
+                            <a:srgbClr val="16252C"/>
+                          </a:solidFill>
+                          <a:latin typeface="微软雅黑" pitchFamily="34" charset="0"/>
+                          <a:ea typeface="微软雅黑" pitchFamily="34" charset="-122"/>
+                          <a:cs typeface="微软雅黑" pitchFamily="34" charset="-120"/>
+                        </a:rPr>
+                        <a:t>−3.56</a:t>
+                      </a:r>
+                      <a:endParaRPr lang="en-US" sz="1150" dirty="0">
+                        <a:latin typeface="微软雅黑" charset="0"/>
+                        <a:ea typeface="微软雅黑" charset="0"/>
+                        <a:cs typeface="微软雅黑" charset="0"/>
+                      </a:endParaRPr>
+                    </a:p>
+                  </a:txBody>
+                  <a:tcPr marL="91440" marR="91440" marT="45720" marB="45720" anchor="ctr">
+                    <a:lnL w="6350" cap="flat" cmpd="sng" algn="ctr">
+                      <a:solidFill>
+                        <a:srgbClr val="DDE5E8"/>
+                      </a:solidFill>
+                      <a:prstDash val="solid"/>
+                      <a:round/>
+                      <a:headEnd type="none" w="med" len="med"/>
+                      <a:tailEnd type="none" w="med" len="med"/>
+                    </a:lnL>
+                    <a:lnR w="6350" cap="flat" cmpd="sng" algn="ctr">
+                      <a:solidFill>
+                        <a:srgbClr val="DDE5E8"/>
+                      </a:solidFill>
+                      <a:prstDash val="solid"/>
+                      <a:round/>
+                      <a:headEnd type="none" w="med" len="med"/>
+                      <a:tailEnd type="none" w="med" len="med"/>
+                    </a:lnR>
+                    <a:lnT w="6350" cap="flat" cmpd="sng" algn="ctr">
+                      <a:solidFill>
+                        <a:srgbClr val="DDE5E8"/>
+                      </a:solidFill>
+                      <a:prstDash val="solid"/>
+                      <a:round/>
+                      <a:headEnd type="none" w="med" len="med"/>
+                      <a:tailEnd type="none" w="med" len="med"/>
+                    </a:lnT>
+                    <a:lnB w="6350" cap="flat" cmpd="sng" algn="ctr">
+                      <a:solidFill>
+                        <a:srgbClr val="DDE5E8"/>
+                      </a:solidFill>
+                      <a:prstDash val="solid"/>
+                      <a:round/>
+                      <a:headEnd type="none" w="med" len="med"/>
+                      <a:tailEnd type="none" w="med" len="med"/>
+                    </a:lnB>
+                  </a:tcPr>
+                </a:tc>
+                <a:tc>
+                  <a:txBody>
+                    <a:bodyPr/>
+                    <a:lstStyle/>
+                    <a:p>
+                      <a:pPr algn="ctr" indent="0" marL="0">
+                        <a:buNone/>
+                      </a:pPr>
+                      <a:r>
+                        <a:rPr lang="en-US" sz="1150" dirty="0">
+                          <a:solidFill>
+                            <a:srgbClr val="16252C"/>
+                          </a:solidFill>
+                          <a:latin typeface="微软雅黑" pitchFamily="34" charset="0"/>
+                          <a:ea typeface="微软雅黑" pitchFamily="34" charset="-122"/>
+                          <a:cs typeface="微软雅黑" pitchFamily="34" charset="-120"/>
+                        </a:rPr>
+                        <a:t>0.0087</a:t>
+                      </a:r>
+                      <a:endParaRPr lang="en-US" sz="1150" dirty="0">
+                        <a:latin typeface="微软雅黑" charset="0"/>
+                        <a:ea typeface="微软雅黑" charset="0"/>
+                        <a:cs typeface="微软雅黑" charset="0"/>
+                      </a:endParaRPr>
+                    </a:p>
+                  </a:txBody>
+                  <a:tcPr marL="91440" marR="91440" marT="45720" marB="45720" anchor="ctr">
+                    <a:lnL w="6350" cap="flat" cmpd="sng" algn="ctr">
+                      <a:solidFill>
+                        <a:srgbClr val="DDE5E8"/>
+                      </a:solidFill>
+                      <a:prstDash val="solid"/>
+                      <a:round/>
+                      <a:headEnd type="none" w="med" len="med"/>
+                      <a:tailEnd type="none" w="med" len="med"/>
+                    </a:lnL>
+                    <a:lnR w="6350" cap="flat" cmpd="sng" algn="ctr">
+                      <a:solidFill>
+                        <a:srgbClr val="DDE5E8"/>
+                      </a:solidFill>
+                      <a:prstDash val="solid"/>
+                      <a:round/>
+                      <a:headEnd type="none" w="med" len="med"/>
+                      <a:tailEnd type="none" w="med" len="med"/>
+                    </a:lnR>
+                    <a:lnT w="6350" cap="flat" cmpd="sng" algn="ctr">
+                      <a:solidFill>
+                        <a:srgbClr val="DDE5E8"/>
+                      </a:solidFill>
+                      <a:prstDash val="solid"/>
+                      <a:round/>
+                      <a:headEnd type="none" w="med" len="med"/>
+                      <a:tailEnd type="none" w="med" len="med"/>
+                    </a:lnT>
+                    <a:lnB w="6350" cap="flat" cmpd="sng" algn="ctr">
+                      <a:solidFill>
+                        <a:srgbClr val="DDE5E8"/>
+                      </a:solidFill>
+                      <a:prstDash val="solid"/>
+                      <a:round/>
+                      <a:headEnd type="none" w="med" len="med"/>
+                      <a:tailEnd type="none" w="med" len="med"/>
+                    </a:lnB>
+                  </a:tcPr>
+                </a:tc>
+              </a:tr>
+              <a:tr h="338328">
+                <a:tc>
+                  <a:txBody>
+                    <a:bodyPr/>
+                    <a:lstStyle/>
+                    <a:p>
+                      <a:pPr algn="ctr" indent="0" marL="0">
+                        <a:buNone/>
+                      </a:pPr>
+                      <a:r>
+                        <a:rPr lang="en-US" sz="1150" b="1" dirty="0">
+                          <a:solidFill>
+                            <a:srgbClr val="16252C"/>
+                          </a:solidFill>
+                          <a:latin typeface="微软雅黑" pitchFamily="34" charset="0"/>
+                          <a:ea typeface="微软雅黑" pitchFamily="34" charset="-122"/>
+                          <a:cs typeface="微软雅黑" pitchFamily="34" charset="-120"/>
+                        </a:rPr>
+                        <a:t>Escherichia-Shigella</a:t>
+                      </a:r>
+                      <a:endParaRPr lang="en-US" sz="1150" dirty="0">
+                        <a:latin typeface="微软雅黑" charset="0"/>
+                        <a:ea typeface="微软雅黑" charset="0"/>
+                        <a:cs typeface="微软雅黑" charset="0"/>
+                      </a:endParaRPr>
+                    </a:p>
+                  </a:txBody>
+                  <a:tcPr marL="91440" marR="91440" marT="45720" marB="45720" anchor="ctr">
+                    <a:lnL w="6350" cap="flat" cmpd="sng" algn="ctr">
+                      <a:solidFill>
+                        <a:srgbClr val="DDE5E8"/>
+                      </a:solidFill>
+                      <a:prstDash val="solid"/>
+                      <a:round/>
+                      <a:headEnd type="none" w="med" len="med"/>
+                      <a:tailEnd type="none" w="med" len="med"/>
+                    </a:lnL>
+                    <a:lnR w="6350" cap="flat" cmpd="sng" algn="ctr">
+                      <a:solidFill>
+                        <a:srgbClr val="DDE5E8"/>
+                      </a:solidFill>
+                      <a:prstDash val="solid"/>
+                      <a:round/>
+                      <a:headEnd type="none" w="med" len="med"/>
+                      <a:tailEnd type="none" w="med" len="med"/>
+                    </a:lnR>
+                    <a:lnT w="6350" cap="flat" cmpd="sng" algn="ctr">
+                      <a:solidFill>
+                        <a:srgbClr val="DDE5E8"/>
+                      </a:solidFill>
+                      <a:prstDash val="solid"/>
+                      <a:round/>
+                      <a:headEnd type="none" w="med" len="med"/>
+                      <a:tailEnd type="none" w="med" len="med"/>
+                    </a:lnT>
+                    <a:lnB w="6350" cap="flat" cmpd="sng" algn="ctr">
+                      <a:solidFill>
+                        <a:srgbClr val="DDE5E8"/>
+                      </a:solidFill>
+                      <a:prstDash val="solid"/>
+                      <a:round/>
+                      <a:headEnd type="none" w="med" len="med"/>
+                      <a:tailEnd type="none" w="med" len="med"/>
+                    </a:lnB>
+                  </a:tcPr>
+                </a:tc>
+                <a:tc>
+                  <a:txBody>
+                    <a:bodyPr/>
+                    <a:lstStyle/>
+                    <a:p>
+                      <a:pPr algn="ctr" indent="0" marL="0">
+                        <a:buNone/>
+                      </a:pPr>
+                      <a:r>
+                        <a:rPr lang="en-US" sz="1150" dirty="0">
+                          <a:solidFill>
+                            <a:srgbClr val="16252C"/>
+                          </a:solidFill>
+                          <a:latin typeface="微软雅黑" pitchFamily="34" charset="0"/>
+                          <a:ea typeface="微软雅黑" pitchFamily="34" charset="-122"/>
+                          <a:cs typeface="微软雅黑" pitchFamily="34" charset="-120"/>
+                        </a:rPr>
+                        <a:t>Enterobacteriaceae</a:t>
+                      </a:r>
+                      <a:endParaRPr lang="en-US" sz="1150" dirty="0">
+                        <a:latin typeface="微软雅黑" charset="0"/>
+                        <a:ea typeface="微软雅黑" charset="0"/>
+                        <a:cs typeface="微软雅黑" charset="0"/>
+                      </a:endParaRPr>
+                    </a:p>
+                  </a:txBody>
+                  <a:tcPr marL="91440" marR="91440" marT="45720" marB="45720" anchor="ctr">
+                    <a:lnL w="6350" cap="flat" cmpd="sng" algn="ctr">
+                      <a:solidFill>
+                        <a:srgbClr val="DDE5E8"/>
+                      </a:solidFill>
+                      <a:prstDash val="solid"/>
+                      <a:round/>
+                      <a:headEnd type="none" w="med" len="med"/>
+                      <a:tailEnd type="none" w="med" len="med"/>
+                    </a:lnL>
+                    <a:lnR w="6350" cap="flat" cmpd="sng" algn="ctr">
+                      <a:solidFill>
+                        <a:srgbClr val="DDE5E8"/>
+                      </a:solidFill>
+                      <a:prstDash val="solid"/>
+                      <a:round/>
+                      <a:headEnd type="none" w="med" len="med"/>
+                      <a:tailEnd type="none" w="med" len="med"/>
+                    </a:lnR>
+                    <a:lnT w="6350" cap="flat" cmpd="sng" algn="ctr">
+                      <a:solidFill>
+                        <a:srgbClr val="DDE5E8"/>
+                      </a:solidFill>
+                      <a:prstDash val="solid"/>
+                      <a:round/>
+                      <a:headEnd type="none" w="med" len="med"/>
+                      <a:tailEnd type="none" w="med" len="med"/>
+                    </a:lnT>
+                    <a:lnB w="6350" cap="flat" cmpd="sng" algn="ctr">
+                      <a:solidFill>
+                        <a:srgbClr val="DDE5E8"/>
+                      </a:solidFill>
+                      <a:prstDash val="solid"/>
+                      <a:round/>
+                      <a:headEnd type="none" w="med" len="med"/>
+                      <a:tailEnd type="none" w="med" len="med"/>
+                    </a:lnB>
+                  </a:tcPr>
+                </a:tc>
+                <a:tc>
+                  <a:txBody>
+                    <a:bodyPr/>
+                    <a:lstStyle/>
+                    <a:p>
+                      <a:pPr algn="ctr" indent="0" marL="0">
+                        <a:buNone/>
+                      </a:pPr>
+                      <a:r>
+                        <a:rPr lang="en-US" sz="1150" b="1" dirty="0">
+                          <a:solidFill>
+                            <a:srgbClr val="D2603A"/>
+                          </a:solidFill>
+                          <a:latin typeface="微软雅黑" pitchFamily="34" charset="0"/>
+                          <a:ea typeface="微软雅黑" pitchFamily="34" charset="-122"/>
+                          <a:cs typeface="微软雅黑" pitchFamily="34" charset="-120"/>
+                        </a:rPr>
+                        <a:t>Pos↑</a:t>
+                      </a:r>
+                      <a:endParaRPr lang="en-US" sz="1150" dirty="0">
+                        <a:latin typeface="微软雅黑" charset="0"/>
+                        <a:ea typeface="微软雅黑" charset="0"/>
+                        <a:cs typeface="微软雅黑" charset="0"/>
+                      </a:endParaRPr>
+                    </a:p>
+                  </a:txBody>
+                  <a:tcPr marL="91440" marR="91440" marT="45720" marB="45720" anchor="ctr">
+                    <a:lnL w="6350" cap="flat" cmpd="sng" algn="ctr">
+                      <a:solidFill>
+                        <a:srgbClr val="DDE5E8"/>
+                      </a:solidFill>
+                      <a:prstDash val="solid"/>
+                      <a:round/>
+                      <a:headEnd type="none" w="med" len="med"/>
+                      <a:tailEnd type="none" w="med" len="med"/>
+                    </a:lnL>
+                    <a:lnR w="6350" cap="flat" cmpd="sng" algn="ctr">
+                      <a:solidFill>
+                        <a:srgbClr val="DDE5E8"/>
+                      </a:solidFill>
+                      <a:prstDash val="solid"/>
+                      <a:round/>
+                      <a:headEnd type="none" w="med" len="med"/>
+                      <a:tailEnd type="none" w="med" len="med"/>
+                    </a:lnR>
+                    <a:lnT w="6350" cap="flat" cmpd="sng" algn="ctr">
+                      <a:solidFill>
+                        <a:srgbClr val="DDE5E8"/>
+                      </a:solidFill>
+                      <a:prstDash val="solid"/>
+                      <a:round/>
+                      <a:headEnd type="none" w="med" len="med"/>
+                      <a:tailEnd type="none" w="med" len="med"/>
+                    </a:lnT>
+                    <a:lnB w="6350" cap="flat" cmpd="sng" algn="ctr">
+                      <a:solidFill>
+                        <a:srgbClr val="DDE5E8"/>
+                      </a:solidFill>
+                      <a:prstDash val="solid"/>
+                      <a:round/>
+                      <a:headEnd type="none" w="med" len="med"/>
+                      <a:tailEnd type="none" w="med" len="med"/>
+                    </a:lnB>
+                    <a:solidFill>
+                      <a:srgbClr val="FBEDE7"/>
+                    </a:solidFill>
+                  </a:tcPr>
+                </a:tc>
+                <a:tc>
+                  <a:txBody>
+                    <a:bodyPr/>
+                    <a:lstStyle/>
+                    <a:p>
+                      <a:pPr algn="ctr" indent="0" marL="0">
+                        <a:buNone/>
+                      </a:pPr>
+                      <a:r>
+                        <a:rPr lang="en-US" sz="1150" dirty="0">
+                          <a:solidFill>
+                            <a:srgbClr val="16252C"/>
+                          </a:solidFill>
+                          <a:latin typeface="微软雅黑" pitchFamily="34" charset="0"/>
+                          <a:ea typeface="微软雅黑" pitchFamily="34" charset="-122"/>
+                          <a:cs typeface="微软雅黑" pitchFamily="34" charset="-120"/>
+                        </a:rPr>
+                        <a:t>0.0015</a:t>
+                      </a:r>
+                      <a:endParaRPr lang="en-US" sz="1150" dirty="0">
+                        <a:latin typeface="微软雅黑" charset="0"/>
+                        <a:ea typeface="微软雅黑" charset="0"/>
+                        <a:cs typeface="微软雅黑" charset="0"/>
+                      </a:endParaRPr>
+                    </a:p>
+                  </a:txBody>
+                  <a:tcPr marL="91440" marR="91440" marT="45720" marB="45720" anchor="ctr">
+                    <a:lnL w="6350" cap="flat" cmpd="sng" algn="ctr">
+                      <a:solidFill>
+                        <a:srgbClr val="DDE5E8"/>
+                      </a:solidFill>
+                      <a:prstDash val="solid"/>
+                      <a:round/>
+                      <a:headEnd type="none" w="med" len="med"/>
+                      <a:tailEnd type="none" w="med" len="med"/>
+                    </a:lnL>
+                    <a:lnR w="6350" cap="flat" cmpd="sng" algn="ctr">
+                      <a:solidFill>
+                        <a:srgbClr val="DDE5E8"/>
+                      </a:solidFill>
+                      <a:prstDash val="solid"/>
+                      <a:round/>
+                      <a:headEnd type="none" w="med" len="med"/>
+                      <a:tailEnd type="none" w="med" len="med"/>
+                    </a:lnR>
+                    <a:lnT w="6350" cap="flat" cmpd="sng" algn="ctr">
+                      <a:solidFill>
+                        <a:srgbClr val="DDE5E8"/>
+                      </a:solidFill>
+                      <a:prstDash val="solid"/>
+                      <a:round/>
+                      <a:headEnd type="none" w="med" len="med"/>
+                      <a:tailEnd type="none" w="med" len="med"/>
+                    </a:lnT>
+                    <a:lnB w="6350" cap="flat" cmpd="sng" algn="ctr">
+                      <a:solidFill>
+                        <a:srgbClr val="DDE5E8"/>
+                      </a:solidFill>
+                      <a:prstDash val="solid"/>
+                      <a:round/>
+                      <a:headEnd type="none" w="med" len="med"/>
+                      <a:tailEnd type="none" w="med" len="med"/>
+                    </a:lnB>
+                  </a:tcPr>
+                </a:tc>
+                <a:tc>
+                  <a:txBody>
+                    <a:bodyPr/>
+                    <a:lstStyle/>
+                    <a:p>
+                      <a:pPr algn="ctr" indent="0" marL="0">
+                        <a:buNone/>
+                      </a:pPr>
+                      <a:r>
+                        <a:rPr lang="en-US" sz="1150" b="1" dirty="0">
+                          <a:solidFill>
+                            <a:srgbClr val="D2603A"/>
+                          </a:solidFill>
+                          <a:latin typeface="微软雅黑" pitchFamily="34" charset="0"/>
+                          <a:ea typeface="微软雅黑" pitchFamily="34" charset="-122"/>
+                          <a:cs typeface="微软雅黑" pitchFamily="34" charset="-120"/>
+                        </a:rPr>
+                        <a:t>+5.64</a:t>
+                      </a:r>
+                      <a:endParaRPr lang="en-US" sz="1150" dirty="0">
+                        <a:latin typeface="微软雅黑" charset="0"/>
+                        <a:ea typeface="微软雅黑" charset="0"/>
+                        <a:cs typeface="微软雅黑" charset="0"/>
+                      </a:endParaRPr>
+                    </a:p>
+                  </a:txBody>
+                  <a:tcPr marL="91440" marR="91440" marT="45720" marB="45720" anchor="ctr">
+                    <a:lnL w="6350" cap="flat" cmpd="sng" algn="ctr">
+                      <a:solidFill>
+                        <a:srgbClr val="DDE5E8"/>
+                      </a:solidFill>
+                      <a:prstDash val="solid"/>
+                      <a:round/>
+                      <a:headEnd type="none" w="med" len="med"/>
+                      <a:tailEnd type="none" w="med" len="med"/>
+                    </a:lnL>
+                    <a:lnR w="6350" cap="flat" cmpd="sng" algn="ctr">
+                      <a:solidFill>
+                        <a:srgbClr val="DDE5E8"/>
+                      </a:solidFill>
+                      <a:prstDash val="solid"/>
+                      <a:round/>
+                      <a:headEnd type="none" w="med" len="med"/>
+                      <a:tailEnd type="none" w="med" len="med"/>
+                    </a:lnR>
+                    <a:lnT w="6350" cap="flat" cmpd="sng" algn="ctr">
+                      <a:solidFill>
+                        <a:srgbClr val="DDE5E8"/>
+                      </a:solidFill>
+                      <a:prstDash val="solid"/>
+                      <a:round/>
+                      <a:headEnd type="none" w="med" len="med"/>
+                      <a:tailEnd type="none" w="med" len="med"/>
+                    </a:lnT>
+                    <a:lnB w="6350" cap="flat" cmpd="sng" algn="ctr">
+                      <a:solidFill>
+                        <a:srgbClr val="DDE5E8"/>
+                      </a:solidFill>
+                      <a:prstDash val="solid"/>
+                      <a:round/>
+                      <a:headEnd type="none" w="med" len="med"/>
+                      <a:tailEnd type="none" w="med" len="med"/>
+                    </a:lnB>
+                  </a:tcPr>
+                </a:tc>
+                <a:tc>
+                  <a:txBody>
+                    <a:bodyPr/>
+                    <a:lstStyle/>
+                    <a:p>
+                      <a:pPr algn="ctr" indent="0" marL="0">
+                        <a:buNone/>
+                      </a:pPr>
+                      <a:r>
+                        <a:rPr lang="en-US" sz="1150" dirty="0">
+                          <a:solidFill>
+                            <a:srgbClr val="16252C"/>
+                          </a:solidFill>
+                          <a:latin typeface="微软雅黑" pitchFamily="34" charset="0"/>
+                          <a:ea typeface="微软雅黑" pitchFamily="34" charset="-122"/>
+                          <a:cs typeface="微软雅黑" pitchFamily="34" charset="-120"/>
+                        </a:rPr>
+                        <a:t>0.0004</a:t>
+                      </a:r>
+                      <a:endParaRPr lang="en-US" sz="1150" dirty="0">
+                        <a:latin typeface="微软雅黑" charset="0"/>
+                        <a:ea typeface="微软雅黑" charset="0"/>
+                        <a:cs typeface="微软雅黑" charset="0"/>
+                      </a:endParaRPr>
+                    </a:p>
+                  </a:txBody>
+                  <a:tcPr marL="91440" marR="91440" marT="45720" marB="45720" anchor="ctr">
+                    <a:lnL w="6350" cap="flat" cmpd="sng" algn="ctr">
+                      <a:solidFill>
+                        <a:srgbClr val="DDE5E8"/>
+                      </a:solidFill>
+                      <a:prstDash val="solid"/>
+                      <a:round/>
+                      <a:headEnd type="none" w="med" len="med"/>
+                      <a:tailEnd type="none" w="med" len="med"/>
+                    </a:lnL>
+                    <a:lnR w="6350" cap="flat" cmpd="sng" algn="ctr">
+                      <a:solidFill>
+                        <a:srgbClr val="DDE5E8"/>
+                      </a:solidFill>
+                      <a:prstDash val="solid"/>
+                      <a:round/>
+                      <a:headEnd type="none" w="med" len="med"/>
+                      <a:tailEnd type="none" w="med" len="med"/>
+                    </a:lnR>
+                    <a:lnT w="6350" cap="flat" cmpd="sng" algn="ctr">
+                      <a:solidFill>
+                        <a:srgbClr val="DDE5E8"/>
+                      </a:solidFill>
+                      <a:prstDash val="solid"/>
+                      <a:round/>
+                      <a:headEnd type="none" w="med" len="med"/>
+                      <a:tailEnd type="none" w="med" len="med"/>
+                    </a:lnT>
+                    <a:lnB w="6350" cap="flat" cmpd="sng" algn="ctr">
+                      <a:solidFill>
+                        <a:srgbClr val="DDE5E8"/>
+                      </a:solidFill>
+                      <a:prstDash val="solid"/>
+                      <a:round/>
+                      <a:headEnd type="none" w="med" len="med"/>
+                      <a:tailEnd type="none" w="med" len="med"/>
+                    </a:lnB>
+                  </a:tcPr>
+                </a:tc>
+              </a:tr>
+              <a:tr h="338328">
+                <a:tc>
+                  <a:txBody>
+                    <a:bodyPr/>
+                    <a:lstStyle/>
+                    <a:p>
+                      <a:pPr algn="ctr" indent="0" marL="0">
+                        <a:buNone/>
+                      </a:pPr>
+                      <a:r>
+                        <a:rPr lang="en-US" sz="1150" dirty="0">
+                          <a:solidFill>
+                            <a:srgbClr val="16252C"/>
+                          </a:solidFill>
+                          <a:latin typeface="微软雅黑" pitchFamily="34" charset="0"/>
+                          <a:ea typeface="微软雅黑" pitchFamily="34" charset="-122"/>
+                          <a:cs typeface="微软雅黑" pitchFamily="34" charset="-120"/>
+                        </a:rPr>
+                        <a:t>Pseudomonas</a:t>
+                      </a:r>
+                      <a:endParaRPr lang="en-US" sz="1150" dirty="0">
+                        <a:latin typeface="微软雅黑" charset="0"/>
+                        <a:ea typeface="微软雅黑" charset="0"/>
+                        <a:cs typeface="微软雅黑" charset="0"/>
+                      </a:endParaRPr>
+                    </a:p>
+                  </a:txBody>
+                  <a:tcPr marL="91440" marR="91440" marT="45720" marB="45720" anchor="ctr">
+                    <a:lnL w="6350" cap="flat" cmpd="sng" algn="ctr">
+                      <a:solidFill>
+                        <a:srgbClr val="DDE5E8"/>
+                      </a:solidFill>
+                      <a:prstDash val="solid"/>
+                      <a:round/>
+                      <a:headEnd type="none" w="med" len="med"/>
+                      <a:tailEnd type="none" w="med" len="med"/>
+                    </a:lnL>
+                    <a:lnR w="6350" cap="flat" cmpd="sng" algn="ctr">
+                      <a:solidFill>
+                        <a:srgbClr val="DDE5E8"/>
+                      </a:solidFill>
+                      <a:prstDash val="solid"/>
+                      <a:round/>
+                      <a:headEnd type="none" w="med" len="med"/>
+                      <a:tailEnd type="none" w="med" len="med"/>
+                    </a:lnR>
+                    <a:lnT w="6350" cap="flat" cmpd="sng" algn="ctr">
+                      <a:solidFill>
+                        <a:srgbClr val="DDE5E8"/>
+                      </a:solidFill>
+                      <a:prstDash val="solid"/>
+                      <a:round/>
+                      <a:headEnd type="none" w="med" len="med"/>
+                      <a:tailEnd type="none" w="med" len="med"/>
+                    </a:lnT>
+                    <a:lnB w="6350" cap="flat" cmpd="sng" algn="ctr">
+                      <a:solidFill>
+                        <a:srgbClr val="DDE5E8"/>
+                      </a:solidFill>
+                      <a:prstDash val="solid"/>
+                      <a:round/>
+                      <a:headEnd type="none" w="med" len="med"/>
+                      <a:tailEnd type="none" w="med" len="med"/>
+                    </a:lnB>
+                  </a:tcPr>
+                </a:tc>
+                <a:tc>
+                  <a:txBody>
+                    <a:bodyPr/>
+                    <a:lstStyle/>
+                    <a:p>
+                      <a:pPr algn="ctr" indent="0" marL="0">
+                        <a:buNone/>
+                      </a:pPr>
+                      <a:r>
+                        <a:rPr lang="en-US" sz="1150" dirty="0">
+                          <a:solidFill>
+                            <a:srgbClr val="16252C"/>
+                          </a:solidFill>
+                          <a:latin typeface="微软雅黑" pitchFamily="34" charset="0"/>
+                          <a:ea typeface="微软雅黑" pitchFamily="34" charset="-122"/>
+                          <a:cs typeface="微软雅黑" pitchFamily="34" charset="-120"/>
+                        </a:rPr>
+                        <a:t>Pseudomonadaceae</a:t>
+                      </a:r>
+                      <a:endParaRPr lang="en-US" sz="1150" dirty="0">
+                        <a:latin typeface="微软雅黑" charset="0"/>
+                        <a:ea typeface="微软雅黑" charset="0"/>
+                        <a:cs typeface="微软雅黑" charset="0"/>
+                      </a:endParaRPr>
+                    </a:p>
+                  </a:txBody>
+                  <a:tcPr marL="91440" marR="91440" marT="45720" marB="45720" anchor="ctr">
+                    <a:lnL w="6350" cap="flat" cmpd="sng" algn="ctr">
+                      <a:solidFill>
+                        <a:srgbClr val="DDE5E8"/>
+                      </a:solidFill>
+                      <a:prstDash val="solid"/>
+                      <a:round/>
+                      <a:headEnd type="none" w="med" len="med"/>
+                      <a:tailEnd type="none" w="med" len="med"/>
+                    </a:lnL>
+                    <a:lnR w="6350" cap="flat" cmpd="sng" algn="ctr">
+                      <a:solidFill>
+                        <a:srgbClr val="DDE5E8"/>
+                      </a:solidFill>
+                      <a:prstDash val="solid"/>
+                      <a:round/>
+                      <a:headEnd type="none" w="med" len="med"/>
+                      <a:tailEnd type="none" w="med" len="med"/>
+                    </a:lnR>
+                    <a:lnT w="6350" cap="flat" cmpd="sng" algn="ctr">
+                      <a:solidFill>
+                        <a:srgbClr val="DDE5E8"/>
+                      </a:solidFill>
+                      <a:prstDash val="solid"/>
+                      <a:round/>
+                      <a:headEnd type="none" w="med" len="med"/>
+                      <a:tailEnd type="none" w="med" len="med"/>
+                    </a:lnT>
+                    <a:lnB w="6350" cap="flat" cmpd="sng" algn="ctr">
+                      <a:solidFill>
+                        <a:srgbClr val="DDE5E8"/>
+                      </a:solidFill>
+                      <a:prstDash val="solid"/>
+                      <a:round/>
+                      <a:headEnd type="none" w="med" len="med"/>
+                      <a:tailEnd type="none" w="med" len="med"/>
+                    </a:lnB>
+                  </a:tcPr>
+                </a:tc>
+                <a:tc>
+                  <a:txBody>
+                    <a:bodyPr/>
+                    <a:lstStyle/>
+                    <a:p>
+                      <a:pPr algn="ctr" indent="0" marL="0">
+                        <a:buNone/>
+                      </a:pPr>
+                      <a:r>
+                        <a:rPr lang="en-US" sz="1150" b="1" dirty="0">
+                          <a:solidFill>
+                            <a:srgbClr val="D2603A"/>
+                          </a:solidFill>
+                          <a:latin typeface="微软雅黑" pitchFamily="34" charset="0"/>
+                          <a:ea typeface="微软雅黑" pitchFamily="34" charset="-122"/>
+                          <a:cs typeface="微软雅黑" pitchFamily="34" charset="-120"/>
+                        </a:rPr>
+                        <a:t>Pos↑</a:t>
+                      </a:r>
+                      <a:endParaRPr lang="en-US" sz="1150" dirty="0">
+                        <a:latin typeface="微软雅黑" charset="0"/>
+                        <a:ea typeface="微软雅黑" charset="0"/>
+                        <a:cs typeface="微软雅黑" charset="0"/>
+                      </a:endParaRPr>
+                    </a:p>
+                  </a:txBody>
+                  <a:tcPr marL="91440" marR="91440" marT="45720" marB="45720" anchor="ctr">
+                    <a:lnL w="6350" cap="flat" cmpd="sng" algn="ctr">
+                      <a:solidFill>
+                        <a:srgbClr val="DDE5E8"/>
+                      </a:solidFill>
+                      <a:prstDash val="solid"/>
+                      <a:round/>
+                      <a:headEnd type="none" w="med" len="med"/>
+                      <a:tailEnd type="none" w="med" len="med"/>
+                    </a:lnL>
+                    <a:lnR w="6350" cap="flat" cmpd="sng" algn="ctr">
+                      <a:solidFill>
+                        <a:srgbClr val="DDE5E8"/>
+                      </a:solidFill>
+                      <a:prstDash val="solid"/>
+                      <a:round/>
+                      <a:headEnd type="none" w="med" len="med"/>
+                      <a:tailEnd type="none" w="med" len="med"/>
+                    </a:lnR>
+                    <a:lnT w="6350" cap="flat" cmpd="sng" algn="ctr">
+                      <a:solidFill>
+                        <a:srgbClr val="DDE5E8"/>
+                      </a:solidFill>
+                      <a:prstDash val="solid"/>
+                      <a:round/>
+                      <a:headEnd type="none" w="med" len="med"/>
+                      <a:tailEnd type="none" w="med" len="med"/>
+                    </a:lnT>
+                    <a:lnB w="6350" cap="flat" cmpd="sng" algn="ctr">
+                      <a:solidFill>
+                        <a:srgbClr val="DDE5E8"/>
+                      </a:solidFill>
+                      <a:prstDash val="solid"/>
+                      <a:round/>
+                      <a:headEnd type="none" w="med" len="med"/>
+                      <a:tailEnd type="none" w="med" len="med"/>
+                    </a:lnB>
+                    <a:solidFill>
+                      <a:srgbClr val="FBEDE7"/>
+                    </a:solidFill>
+                  </a:tcPr>
+                </a:tc>
+                <a:tc>
+                  <a:txBody>
+                    <a:bodyPr/>
+                    <a:lstStyle/>
+                    <a:p>
+                      <a:pPr algn="ctr" indent="0" marL="0">
+                        <a:buNone/>
+                      </a:pPr>
+                      <a:r>
+                        <a:rPr lang="en-US" sz="1150" dirty="0">
+                          <a:solidFill>
+                            <a:srgbClr val="16252C"/>
+                          </a:solidFill>
+                          <a:latin typeface="微软雅黑" pitchFamily="34" charset="0"/>
+                          <a:ea typeface="微软雅黑" pitchFamily="34" charset="-122"/>
+                          <a:cs typeface="微软雅黑" pitchFamily="34" charset="-120"/>
+                        </a:rPr>
+                        <a:t>0.00004</a:t>
+                      </a:r>
+                      <a:endParaRPr lang="en-US" sz="1150" dirty="0">
+                        <a:latin typeface="微软雅黑" charset="0"/>
+                        <a:ea typeface="微软雅黑" charset="0"/>
+                        <a:cs typeface="微软雅黑" charset="0"/>
+                      </a:endParaRPr>
+                    </a:p>
+                  </a:txBody>
+                  <a:tcPr marL="91440" marR="91440" marT="45720" marB="45720" anchor="ctr">
+                    <a:lnL w="6350" cap="flat" cmpd="sng" algn="ctr">
+                      <a:solidFill>
+                        <a:srgbClr val="DDE5E8"/>
+                      </a:solidFill>
+                      <a:prstDash val="solid"/>
+                      <a:round/>
+                      <a:headEnd type="none" w="med" len="med"/>
+                      <a:tailEnd type="none" w="med" len="med"/>
+                    </a:lnL>
+                    <a:lnR w="6350" cap="flat" cmpd="sng" algn="ctr">
+                      <a:solidFill>
+                        <a:srgbClr val="DDE5E8"/>
+                      </a:solidFill>
+                      <a:prstDash val="solid"/>
+                      <a:round/>
+                      <a:headEnd type="none" w="med" len="med"/>
+                      <a:tailEnd type="none" w="med" len="med"/>
+                    </a:lnR>
+                    <a:lnT w="6350" cap="flat" cmpd="sng" algn="ctr">
+                      <a:solidFill>
+                        <a:srgbClr val="DDE5E8"/>
+                      </a:solidFill>
+                      <a:prstDash val="solid"/>
+                      <a:round/>
+                      <a:headEnd type="none" w="med" len="med"/>
+                      <a:tailEnd type="none" w="med" len="med"/>
+                    </a:lnT>
+                    <a:lnB w="6350" cap="flat" cmpd="sng" algn="ctr">
+                      <a:solidFill>
+                        <a:srgbClr val="DDE5E8"/>
+                      </a:solidFill>
+                      <a:prstDash val="solid"/>
+                      <a:round/>
+                      <a:headEnd type="none" w="med" len="med"/>
+                      <a:tailEnd type="none" w="med" len="med"/>
+                    </a:lnB>
+                  </a:tcPr>
+                </a:tc>
+                <a:tc>
+                  <a:txBody>
+                    <a:bodyPr/>
+                    <a:lstStyle/>
+                    <a:p>
+                      <a:pPr algn="ctr" indent="0" marL="0">
+                        <a:buNone/>
+                      </a:pPr>
+                      <a:r>
+                        <a:rPr lang="en-US" sz="1150" dirty="0">
+                          <a:solidFill>
+                            <a:srgbClr val="16252C"/>
+                          </a:solidFill>
+                          <a:latin typeface="微软雅黑" pitchFamily="34" charset="0"/>
+                          <a:ea typeface="微软雅黑" pitchFamily="34" charset="-122"/>
+                          <a:cs typeface="微软雅黑" pitchFamily="34" charset="-120"/>
+                        </a:rPr>
+                        <a:t>+3.49</a:t>
+                      </a:r>
+                      <a:endParaRPr lang="en-US" sz="1150" dirty="0">
+                        <a:latin typeface="微软雅黑" charset="0"/>
+                        <a:ea typeface="微软雅黑" charset="0"/>
+                        <a:cs typeface="微软雅黑" charset="0"/>
+                      </a:endParaRPr>
+                    </a:p>
+                  </a:txBody>
+                  <a:tcPr marL="91440" marR="91440" marT="45720" marB="45720" anchor="ctr">
+                    <a:lnL w="6350" cap="flat" cmpd="sng" algn="ctr">
+                      <a:solidFill>
+                        <a:srgbClr val="DDE5E8"/>
+                      </a:solidFill>
+                      <a:prstDash val="solid"/>
+                      <a:round/>
+                      <a:headEnd type="none" w="med" len="med"/>
+                      <a:tailEnd type="none" w="med" len="med"/>
+                    </a:lnL>
+                    <a:lnR w="6350" cap="flat" cmpd="sng" algn="ctr">
+                      <a:solidFill>
+                        <a:srgbClr val="DDE5E8"/>
+                      </a:solidFill>
+                      <a:prstDash val="solid"/>
+                      <a:round/>
+                      <a:headEnd type="none" w="med" len="med"/>
+                      <a:tailEnd type="none" w="med" len="med"/>
+                    </a:lnR>
+                    <a:lnT w="6350" cap="flat" cmpd="sng" algn="ctr">
+                      <a:solidFill>
+                        <a:srgbClr val="DDE5E8"/>
+                      </a:solidFill>
+                      <a:prstDash val="solid"/>
+                      <a:round/>
+                      <a:headEnd type="none" w="med" len="med"/>
+                      <a:tailEnd type="none" w="med" len="med"/>
+                    </a:lnT>
+                    <a:lnB w="6350" cap="flat" cmpd="sng" algn="ctr">
+                      <a:solidFill>
+                        <a:srgbClr val="DDE5E8"/>
+                      </a:solidFill>
+                      <a:prstDash val="solid"/>
+                      <a:round/>
+                      <a:headEnd type="none" w="med" len="med"/>
+                      <a:tailEnd type="none" w="med" len="med"/>
+                    </a:lnB>
+                  </a:tcPr>
+                </a:tc>
+                <a:tc>
+                  <a:txBody>
+                    <a:bodyPr/>
+                    <a:lstStyle/>
+                    <a:p>
+                      <a:pPr algn="ctr" indent="0" marL="0">
+                        <a:buNone/>
+                      </a:pPr>
+                      <a:r>
+                        <a:rPr lang="en-US" sz="1150" dirty="0">
+                          <a:solidFill>
+                            <a:srgbClr val="16252C"/>
+                          </a:solidFill>
+                          <a:latin typeface="微软雅黑" pitchFamily="34" charset="0"/>
+                          <a:ea typeface="微软雅黑" pitchFamily="34" charset="-122"/>
+                          <a:cs typeface="微软雅黑" pitchFamily="34" charset="-120"/>
+                        </a:rPr>
+                        <a:t>0.0057</a:t>
+                      </a:r>
+                      <a:endParaRPr lang="en-US" sz="1150" dirty="0">
+                        <a:latin typeface="微软雅黑" charset="0"/>
+                        <a:ea typeface="微软雅黑" charset="0"/>
+                        <a:cs typeface="微软雅黑" charset="0"/>
+                      </a:endParaRPr>
+                    </a:p>
+                  </a:txBody>
+                  <a:tcPr marL="91440" marR="91440" marT="45720" marB="45720" anchor="ctr">
+                    <a:lnL w="6350" cap="flat" cmpd="sng" algn="ctr">
+                      <a:solidFill>
+                        <a:srgbClr val="DDE5E8"/>
+                      </a:solidFill>
+                      <a:prstDash val="solid"/>
+                      <a:round/>
+                      <a:headEnd type="none" w="med" len="med"/>
+                      <a:tailEnd type="none" w="med" len="med"/>
+                    </a:lnL>
+                    <a:lnR w="6350" cap="flat" cmpd="sng" algn="ctr">
+                      <a:solidFill>
+                        <a:srgbClr val="DDE5E8"/>
+                      </a:solidFill>
+                      <a:prstDash val="solid"/>
+                      <a:round/>
+                      <a:headEnd type="none" w="med" len="med"/>
+                      <a:tailEnd type="none" w="med" len="med"/>
+                    </a:lnR>
+                    <a:lnT w="6350" cap="flat" cmpd="sng" algn="ctr">
+                      <a:solidFill>
+                        <a:srgbClr val="DDE5E8"/>
+                      </a:solidFill>
+                      <a:prstDash val="solid"/>
+                      <a:round/>
+                      <a:headEnd type="none" w="med" len="med"/>
+                      <a:tailEnd type="none" w="med" len="med"/>
+                    </a:lnT>
+                    <a:lnB w="6350" cap="flat" cmpd="sng" algn="ctr">
+                      <a:solidFill>
+                        <a:srgbClr val="DDE5E8"/>
+                      </a:solidFill>
+                      <a:prstDash val="solid"/>
+                      <a:round/>
+                      <a:headEnd type="none" w="med" len="med"/>
+                      <a:tailEnd type="none" w="med" len="med"/>
+                    </a:lnB>
+                  </a:tcPr>
+                </a:tc>
+              </a:tr>
+            </a:tbl>
+          </a:graphicData>
+        </a:graphic>
+      </p:graphicFrame>
+      <p:sp>
+        <p:nvSpPr>
+          <p:cNvPr id="8" name="Shape 5"/>
+          <p:cNvSpPr/>
+          <p:nvPr/>
+        </p:nvSpPr>
+        <p:spPr>
+          <a:xfrm>
+            <a:off x="548640" y="4572000"/>
+            <a:ext cx="5394960" cy="1325880"/>
+          </a:xfrm>
+          <a:prstGeom prst="rect">
+            <a:avLst/>
+          </a:prstGeom>
+          <a:solidFill>
+            <a:srgbClr val="FFFFFF"/>
+          </a:solidFill>
+          <a:ln/>
+          <a:effectLst>
+            <a:outerShdw sx="100000" sy="100000" kx="0" ky="0" algn="bl" rotWithShape="0" blurRad="101600" dist="25400" dir="8100000">
+              <a:srgbClr val="000000">
+                <a:alpha val="10000"/>
+              </a:srgbClr>
+            </a:outerShdw>
+          </a:effectLst>
+        </p:spPr>
+      </p:sp>
+      <p:sp>
+        <p:nvSpPr>
+          <p:cNvPr id="9" name="Shape 6"/>
+          <p:cNvSpPr/>
+          <p:nvPr/>
+        </p:nvSpPr>
+        <p:spPr>
+          <a:xfrm>
+            <a:off x="548640" y="4572000"/>
+            <a:ext cx="68580" cy="1325880"/>
+          </a:xfrm>
+          <a:prstGeom prst="rect">
+            <a:avLst/>
+          </a:prstGeom>
+          <a:solidFill>
+            <a:srgbClr val="8FB996"/>
+          </a:solidFill>
+          <a:ln/>
+        </p:spPr>
+      </p:sp>
+      <p:sp>
+        <p:nvSpPr>
+          <p:cNvPr id="10" name="Text 7"/>
+          <p:cNvSpPr/>
+          <p:nvPr/>
+        </p:nvSpPr>
+        <p:spPr>
+          <a:xfrm>
+            <a:off x="804672" y="4718304"/>
+            <a:ext cx="4937760" cy="329184"/>
+          </a:xfrm>
+          <a:prstGeom prst="rect">
+            <a:avLst/>
+          </a:prstGeom>
+          <a:noFill/>
+          <a:ln/>
+        </p:spPr>
+        <p:txBody>
+          <a:bodyPr wrap="square" lIns="0" tIns="0" rIns="0" bIns="0" rtlCol="0" anchor="t"/>
+          <a:lstStyle/>
+          <a:p>
+            <a:pPr indent="0" marL="0">
+              <a:buNone/>
+            </a:pPr>
+            <a:r>
+              <a:rPr lang="en-US" sz="1400" b="1" dirty="0">
+                <a:solidFill>
+                  <a:srgbClr val="16252C"/>
+                </a:solidFill>
+                <a:latin typeface="微软雅黑" pitchFamily="34" charset="0"/>
+                <a:ea typeface="微软雅黑" pitchFamily="34" charset="-122"/>
+                <a:cs typeface="微软雅黑" pitchFamily="34" charset="-120"/>
+              </a:rPr>
+              <a:t>模式符合免疫学预期</a:t>
+            </a:r>
+            <a:endParaRPr lang="en-US" sz="1400" dirty="0"/>
+          </a:p>
+        </p:txBody>
+      </p:sp>
+      <p:sp>
+        <p:nvSpPr>
+          <p:cNvPr id="11" name="Text 8"/>
+          <p:cNvSpPr/>
+          <p:nvPr/>
+        </p:nvSpPr>
+        <p:spPr>
+          <a:xfrm>
+            <a:off x="804672" y="5102352"/>
+            <a:ext cx="4937760" cy="667512"/>
+          </a:xfrm>
+          <a:prstGeom prst="rect">
+            <a:avLst/>
+          </a:prstGeom>
+          <a:noFill/>
+          <a:ln/>
+        </p:spPr>
+        <p:txBody>
+          <a:bodyPr wrap="square" lIns="0" tIns="0" rIns="0" bIns="0" rtlCol="0" anchor="t"/>
+          <a:lstStyle/>
+          <a:p>
+            <a:pPr indent="0" marL="0">
+              <a:lnSpc>
+                <a:spcPct val="112000"/>
+              </a:lnSpc>
+              <a:buNone/>
+            </a:pPr>
+            <a:r>
+              <a:rPr lang="en-US" sz="1100" dirty="0">
+                <a:solidFill>
+                  <a:srgbClr val="5F7580"/>
+                </a:solidFill>
+                <a:latin typeface="微软雅黑" pitchFamily="34" charset="0"/>
+                <a:ea typeface="微软雅黑" pitchFamily="34" charset="-122"/>
+                <a:cs typeface="微软雅黑" pitchFamily="34" charset="-120"/>
+              </a:rPr>
+              <a:t>乳酸菌科四个属中三个在感染组降低，机会致病菌 Escherichia-Shigella 与 Pseudomonas 升高——共生菌减少、机会致病菌扩张的典型菌群失调。</a:t>
+            </a:r>
+            <a:endParaRPr lang="en-US" sz="1100" dirty="0"/>
+          </a:p>
+        </p:txBody>
+      </p:sp>
+      <p:sp>
+        <p:nvSpPr>
+          <p:cNvPr id="12" name="Shape 9"/>
+          <p:cNvSpPr/>
+          <p:nvPr/>
+        </p:nvSpPr>
+        <p:spPr>
+          <a:xfrm>
+            <a:off x="6217920" y="4572000"/>
+            <a:ext cx="5394960" cy="1325880"/>
+          </a:xfrm>
+          <a:prstGeom prst="rect">
+            <a:avLst/>
+          </a:prstGeom>
+          <a:solidFill>
+            <a:srgbClr val="FBEDE7"/>
+          </a:solidFill>
+          <a:ln/>
+        </p:spPr>
+      </p:sp>
+      <p:sp>
+        <p:nvSpPr>
+          <p:cNvPr id="13" name="Shape 10"/>
+          <p:cNvSpPr/>
+          <p:nvPr/>
+        </p:nvSpPr>
+        <p:spPr>
+          <a:xfrm>
+            <a:off x="6217920" y="4572000"/>
+            <a:ext cx="68580" cy="1325880"/>
+          </a:xfrm>
+          <a:prstGeom prst="rect">
+            <a:avLst/>
+          </a:prstGeom>
+          <a:solidFill>
+            <a:srgbClr val="D2603A"/>
+          </a:solidFill>
+          <a:ln/>
+        </p:spPr>
+      </p:sp>
+      <p:sp>
+        <p:nvSpPr>
+          <p:cNvPr id="14" name="Text 11"/>
+          <p:cNvSpPr/>
+          <p:nvPr/>
+        </p:nvSpPr>
+        <p:spPr>
+          <a:xfrm>
+            <a:off x="6473952" y="4663440"/>
+            <a:ext cx="4937760" cy="1143000"/>
+          </a:xfrm>
+          <a:prstGeom prst="rect">
+            <a:avLst/>
+          </a:prstGeom>
+          <a:noFill/>
+          <a:ln/>
+        </p:spPr>
+        <p:txBody>
+          <a:bodyPr wrap="square" lIns="0" tIns="0" rIns="0" bIns="0" rtlCol="0" anchor="t"/>
+          <a:lstStyle/>
+          <a:p>
+            <a:pPr indent="0" marL="0">
+              <a:lnSpc>
+                <a:spcPct val="110000"/>
+              </a:lnSpc>
+              <a:buNone/>
+            </a:pPr>
+            <a:r>
+              <a:rPr lang="en-US" sz="1100" dirty="0">
+                <a:solidFill>
+                  <a:srgbClr val="7A2E14"/>
+                </a:solidFill>
+                <a:latin typeface="微软雅黑" pitchFamily="34" charset="0"/>
+                <a:ea typeface="微软雅黑" pitchFamily="34" charset="-122"/>
+                <a:cs typeface="微软雅黑" pitchFamily="34" charset="-120"/>
+              </a:rPr>
+              <a:t>被剔除的最强反例：Negativibacillus 的 importance 最高（0.0133）、t=+5.87、FDR&lt;0.0001，单看这两项会认为它是最好的 biomarker。但它在同为阳性的四个隔离器之间也显著不同，无法归因于感染。</a:t>
+            </a:r>
+            <a:endParaRPr lang="en-US" sz="1100" dirty="0"/>
+          </a:p>
+        </p:txBody>
+      </p:sp>
+    </p:spTree>
+  </p:cSld>
+  <p:clrMapOvr>
+    <a:masterClrMapping/>
+  </p:clrMapOvr>
+</p:sld>
+</file>
+
+<file path=ppt/slides/slide16.xml><?xml version="1.0" encoding="utf-8"?>
+<p:sld xmlns:a="http://schemas.openxmlformats.org/drawingml/2006/main" xmlns:r="http://schemas.openxmlformats.org/officeDocument/2006/relationships" xmlns:p="http://schemas.openxmlformats.org/presentationml/2006/main">
+  <p:cSld name="Slide 16">
+    <p:bg>
+      <p:bgPr>
+        <a:solidFill>
+          <a:srgbClr val="0B3C49"/>
+        </a:solidFill>
+      </p:bgPr>
+    </p:bg>
+    <p:spTree>
+      <p:nvGrpSpPr>
+        <p:cNvPr id="1" name=""/>
+        <p:cNvGrpSpPr/>
+        <p:nvPr/>
+      </p:nvGrpSpPr>
+      <p:grpSpPr>
+        <a:xfrm>
+          <a:off x="0" y="0"/>
+          <a:ext cx="0" cy="0"/>
+          <a:chOff x="0" y="0"/>
+          <a:chExt cx="0" cy="0"/>
+        </a:xfrm>
+      </p:grpSpPr>
+      <p:sp>
+        <p:nvSpPr>
+          <p:cNvPr id="2" name="Shape 0"/>
+          <p:cNvSpPr/>
+          <p:nvPr/>
+        </p:nvSpPr>
+        <p:spPr>
+          <a:xfrm>
+            <a:off x="0" y="0"/>
+            <a:ext cx="256032" cy="6858000"/>
+          </a:xfrm>
+          <a:prstGeom prst="rect">
+            <a:avLst/>
+          </a:prstGeom>
+          <a:solidFill>
+            <a:srgbClr val="8FB996"/>
+          </a:solidFill>
+          <a:ln/>
+        </p:spPr>
+      </p:sp>
+      <p:sp>
+        <p:nvSpPr>
+          <p:cNvPr id="3" name="Text 1"/>
+          <p:cNvSpPr/>
+          <p:nvPr/>
+        </p:nvSpPr>
+        <p:spPr>
+          <a:xfrm>
+            <a:off x="1005840" y="2057400"/>
+            <a:ext cx="2011680" cy="1463040"/>
+          </a:xfrm>
+          <a:prstGeom prst="rect">
+            <a:avLst/>
+          </a:prstGeom>
+          <a:noFill/>
+          <a:ln/>
+        </p:spPr>
+        <p:txBody>
+          <a:bodyPr wrap="square" lIns="0" tIns="0" rIns="0" bIns="0" rtlCol="0" anchor="ctr"/>
+          <a:lstStyle/>
+          <a:p>
+            <a:pPr indent="0" marL="0">
+              <a:buNone/>
+            </a:pPr>
+            <a:r>
+              <a:rPr lang="en-US" sz="9600" b="1" dirty="0">
+                <a:solidFill>
+                  <a:srgbClr val="4E9FAD"/>
+                </a:solidFill>
+                <a:latin typeface="微软雅黑" pitchFamily="34" charset="0"/>
+                <a:ea typeface="微软雅黑" pitchFamily="34" charset="-122"/>
+                <a:cs typeface="微软雅黑" pitchFamily="34" charset="-120"/>
+              </a:rPr>
+              <a:t>03</a:t>
+            </a:r>
+            <a:endParaRPr lang="en-US" sz="9600" dirty="0"/>
+          </a:p>
+        </p:txBody>
+      </p:sp>
+      <p:sp>
+        <p:nvSpPr>
+          <p:cNvPr id="4" name="Text 2"/>
+          <p:cNvSpPr/>
+          <p:nvPr/>
+        </p:nvSpPr>
+        <p:spPr>
+          <a:xfrm>
+            <a:off x="2834640" y="2286000"/>
+            <a:ext cx="8412480" cy="868680"/>
+          </a:xfrm>
+          <a:prstGeom prst="rect">
+            <a:avLst/>
+          </a:prstGeom>
+          <a:noFill/>
+          <a:ln/>
+        </p:spPr>
+        <p:txBody>
+          <a:bodyPr wrap="square" lIns="0" tIns="0" rIns="0" bIns="0" rtlCol="0" anchor="ctr"/>
+          <a:lstStyle/>
+          <a:p>
+            <a:pPr indent="0" marL="0">
+              <a:buNone/>
+            </a:pPr>
+            <a:r>
+              <a:rPr lang="en-US" sz="3800" b="1" dirty="0">
+                <a:solidFill>
+                  <a:srgbClr val="FFFFFF"/>
+                </a:solidFill>
+                <a:latin typeface="微软雅黑" pitchFamily="34" charset="0"/>
+                <a:ea typeface="微软雅黑" pitchFamily="34" charset="-122"/>
+                <a:cs typeface="微软雅黑" pitchFamily="34" charset="-120"/>
+              </a:rPr>
               <a:t>结论</a:t>
             </a:r>
             <a:endParaRPr lang="en-US" sz="3800" dirty="0"/>
@@ -6171,9 +14782,9 @@
 </p:sld>
 </file>
 
-<file path=ppt/slides/slide13.xml><?xml version="1.0" encoding="utf-8"?>
+<file path=ppt/slides/slide17.xml><?xml version="1.0" encoding="utf-8"?>
 <p:sld xmlns:a="http://schemas.openxmlformats.org/drawingml/2006/main" xmlns:r="http://schemas.openxmlformats.org/officeDocument/2006/relationships" xmlns:p="http://schemas.openxmlformats.org/presentationml/2006/main">
-  <p:cSld name="Slide 13">
+  <p:cSld name="Slide 17">
     <p:bg>
       <p:bgPr>
         <a:solidFill>
@@ -6326,7 +14937,7 @@
                 <a:ea typeface="微软雅黑" pitchFamily="34" charset="-122"/>
                 <a:cs typeface="微软雅黑" pitchFamily="34" charset="-120"/>
               </a:rPr>
-              <a:t>13</a:t>
+              <a:t>17</a:t>
             </a:r>
             <a:endParaRPr lang="en-US" sz="1000" dirty="0"/>
           </a:p>
@@ -6721,7 +15332,7 @@
             <a:avLst/>
           </a:prstGeom>
           <a:solidFill>
-            <a:srgbClr val="FFFFFF"/>
+            <a:srgbClr val="FBEDE7"/>
           </a:solidFill>
           <a:ln/>
           <a:effectLst>
@@ -6748,7 +15359,7 @@
             <a:avLst/>
           </a:prstGeom>
           <a:solidFill>
-            <a:srgbClr val="8FB996"/>
+            <a:srgbClr val="D2603A"/>
           </a:solidFill>
           <a:ln/>
         </p:spPr>
@@ -6845,7 +15456,7 @@
                 <a:ea typeface="微软雅黑" pitchFamily="34" charset="-122"/>
                 <a:cs typeface="微软雅黑" pitchFamily="34" charset="-120"/>
               </a:rPr>
-              <a:t>火鸡单独是本项目除主队列外最好的结果</a:t>
+              <a:t>火鸡单独更好，但那个 0.930 不能当作感染信号来读</a:t>
             </a:r>
             <a:endParaRPr lang="en-US" sz="1500" dirty="0"/>
           </a:p>
@@ -6881,13 +15492,13 @@
             <a:r>
               <a:rPr lang="en-US" sz="1150" dirty="0">
                 <a:solidFill>
-                  <a:srgbClr val="5F7580"/>
+                  <a:srgbClr val="7A2E14"/>
                 </a:solidFill>
                 <a:latin typeface="微软雅黑" pitchFamily="34" charset="0"/>
                 <a:ea typeface="微软雅黑" pitchFamily="34" charset="-122"/>
                 <a:cs typeface="微软雅黑" pitchFamily="34" charset="-120"/>
               </a:rPr>
-              <a:t>AUC 0.930、MCC 0.647、F1 0.905。虽然 n=45 很小，但它内部同质（单一宿主、单一中心、单一建库方法），不存在合并带来的技术异质性。</a:t>
+              <a:t>AUC 0.930、MCC 0.647、F1 0.905，且内部同质（单一宿主、单一中心、单一建库方法）。但隔离器与感染状态完全共线，纯笼效应平均 0.908，报告时必须把笼效应一并给出。</a:t>
             </a:r>
             <a:endParaRPr lang="en-US" sz="1150" dirty="0"/>
           </a:p>
@@ -6901,9 +15512,9 @@
 </p:sld>
 </file>
 
-<file path=ppt/slides/slide14.xml><?xml version="1.0" encoding="utf-8"?>
+<file path=ppt/slides/slide18.xml><?xml version="1.0" encoding="utf-8"?>
 <p:sld xmlns:a="http://schemas.openxmlformats.org/drawingml/2006/main" xmlns:r="http://schemas.openxmlformats.org/officeDocument/2006/relationships" xmlns:p="http://schemas.openxmlformats.org/presentationml/2006/main">
-  <p:cSld name="Slide 14">
+  <p:cSld name="Slide 18">
     <p:bg>
       <p:bgPr>
         <a:solidFill>
@@ -7017,7 +15628,7 @@
                 <a:ea typeface="微软雅黑" pitchFamily="34" charset="-122"/>
                 <a:cs typeface="微软雅黑" pitchFamily="34" charset="-120"/>
               </a:rPr>
-              <a:t>n=45、少数类 13，比主队列小 5 倍，需要同等强度的审查</a:t>
+              <a:t>前三项（混杂结构、驱动菌、跨宿主比较）已完成，见第 13–15 页；下面是剩下的</a:t>
             </a:r>
             <a:endParaRPr lang="en-US" sz="1400" dirty="0"/>
           </a:p>
@@ -7096,7 +15707,7 @@
                 <a:ea typeface="微软雅黑" pitchFamily="34" charset="-122"/>
                 <a:cs typeface="微软雅黑" pitchFamily="34" charset="-120"/>
               </a:rPr>
-              <a:t>队列内部的混杂结构</a:t>
+              <a:t>拆分笼效应与感染效应需要重做实验</a:t>
             </a:r>
             <a:endParaRPr lang="en-US" sz="1500" dirty="0"/>
           </a:p>
@@ -7135,7 +15746,7 @@
                 <a:ea typeface="微软雅黑" pitchFamily="34" charset="-122"/>
                 <a:cs typeface="微软雅黑" pitchFamily="34" charset="-120"/>
               </a:rPr>
-              <a:t>PRJNA644054 是否存在类似主队列「采样月份」的时间或批次结构</a:t>
+              <a:t>每个隔离器内同时放阳性与阴性个体。这是设计问题，不是分析问题，现有数据无法补救</a:t>
             </a:r>
             <a:endParaRPr lang="en-US" sz="1150" dirty="0"/>
           </a:p>
@@ -7214,7 +15825,7 @@
                 <a:ea typeface="微软雅黑" pitchFamily="34" charset="-122"/>
                 <a:cs typeface="微软雅黑" pitchFamily="34" charset="-120"/>
               </a:rPr>
-              <a:t>Permutation importance 与差异丰度</a:t>
+              <a:t>在两队列特征交集上重做跨宿主检验</a:t>
             </a:r>
             <a:endParaRPr lang="en-US" sz="1500" dirty="0"/>
           </a:p>
@@ -7253,7 +15864,7 @@
                 <a:ea typeface="微软雅黑" pitchFamily="34" charset="-122"/>
                 <a:cs typeface="微软雅黑" pitchFamily="34" charset="-120"/>
               </a:rPr>
-              <a:t>找出驱动预测的菌，并给出效应方向</a:t>
+              <a:t>火鸡只保留 62 个特征，鸭队列九菌中多数根本没进候选池——目前的「不一致」更可能是特征空间不同所致</a:t>
             </a:r>
             <a:endParaRPr lang="en-US" sz="1150" dirty="0"/>
           </a:p>
@@ -7308,124 +15919,6 @@
         <p:spPr>
           <a:xfrm>
             <a:off x="1234440" y="4471416"/>
-            <a:ext cx="9692640" cy="292608"/>
-          </a:xfrm>
-          <a:prstGeom prst="rect">
-            <a:avLst/>
-          </a:prstGeom>
-          <a:noFill/>
-          <a:ln/>
-        </p:spPr>
-        <p:txBody>
-          <a:bodyPr wrap="square" lIns="0" tIns="0" rIns="0" bIns="0" rtlCol="0" anchor="ctr"/>
-          <a:lstStyle/>
-          <a:p>
-            <a:pPr indent="0" marL="0">
-              <a:buNone/>
-            </a:pPr>
-            <a:r>
-              <a:rPr lang="en-US" sz="1500" b="1" dirty="0">
-                <a:solidFill>
-                  <a:srgbClr val="FFFFFF"/>
-                </a:solidFill>
-                <a:latin typeface="微软雅黑" pitchFamily="34" charset="0"/>
-                <a:ea typeface="微软雅黑" pitchFamily="34" charset="-122"/>
-                <a:cs typeface="微软雅黑" pitchFamily="34" charset="-120"/>
-              </a:rPr>
-              <a:t>与鸭队列九菌交集是否重叠</a:t>
-            </a:r>
-            <a:endParaRPr lang="en-US" sz="1500" dirty="0"/>
-          </a:p>
-        </p:txBody>
-      </p:sp>
-      <p:sp>
-        <p:nvSpPr>
-          <p:cNvPr id="16" name="Text 14"/>
-          <p:cNvSpPr/>
-          <p:nvPr/>
-        </p:nvSpPr>
-        <p:spPr>
-          <a:xfrm>
-            <a:off x="1234440" y="4782312"/>
-            <a:ext cx="9692640" cy="310896"/>
-          </a:xfrm>
-          <a:prstGeom prst="rect">
-            <a:avLst/>
-          </a:prstGeom>
-          <a:noFill/>
-          <a:ln/>
-        </p:spPr>
-        <p:txBody>
-          <a:bodyPr wrap="square" lIns="0" tIns="0" rIns="0" bIns="0" rtlCol="0" anchor="ctr"/>
-          <a:lstStyle/>
-          <a:p>
-            <a:pPr indent="0" marL="0">
-              <a:buNone/>
-            </a:pPr>
-            <a:r>
-              <a:rPr lang="en-US" sz="1150" dirty="0">
-                <a:solidFill>
-                  <a:srgbClr val="8FB996"/>
-                </a:solidFill>
-                <a:latin typeface="微软雅黑" pitchFamily="34" charset="0"/>
-                <a:ea typeface="微软雅黑" pitchFamily="34" charset="-122"/>
-                <a:cs typeface="微软雅黑" pitchFamily="34" charset="-120"/>
-              </a:rPr>
-              <a:t>跨宿主一致性的间接证据——若重叠，说明信号不限于单一宿主</a:t>
-            </a:r>
-            <a:endParaRPr lang="en-US" sz="1150" dirty="0"/>
-          </a:p>
-        </p:txBody>
-      </p:sp>
-      <p:sp>
-        <p:nvSpPr>
-          <p:cNvPr id="17" name="Shape 15"/>
-          <p:cNvSpPr/>
-          <p:nvPr/>
-        </p:nvSpPr>
-        <p:spPr>
-          <a:xfrm>
-            <a:off x="914400" y="5312664"/>
-            <a:ext cx="10332720" cy="777240"/>
-          </a:xfrm>
-          <a:prstGeom prst="rect">
-            <a:avLst/>
-          </a:prstGeom>
-          <a:solidFill>
-            <a:srgbClr val="12505F"/>
-          </a:solidFill>
-          <a:ln/>
-        </p:spPr>
-      </p:sp>
-      <p:sp>
-        <p:nvSpPr>
-          <p:cNvPr id="18" name="Shape 16"/>
-          <p:cNvSpPr/>
-          <p:nvPr/>
-        </p:nvSpPr>
-        <p:spPr>
-          <a:xfrm>
-            <a:off x="914400" y="5312664"/>
-            <a:ext cx="68580" cy="777240"/>
-          </a:xfrm>
-          <a:prstGeom prst="rect">
-            <a:avLst/>
-          </a:prstGeom>
-          <a:solidFill>
-            <a:srgbClr val="8FB996"/>
-          </a:solidFill>
-          <a:ln/>
-        </p:spPr>
-      </p:sp>
-      <p:sp>
-        <p:nvSpPr>
-          <p:cNvPr id="19" name="Text 17"/>
-          <p:cNvSpPr/>
-          <p:nvPr/>
-        </p:nvSpPr>
-        <p:spPr>
-          <a:xfrm>
-            <a:off x="1234440" y="5404104"/>
             <a:ext cx="9692640" cy="292608"/>
           </a:xfrm>
           <a:prstGeom prst="rect">
@@ -7458,13 +15951,13 @@
       </p:sp>
       <p:sp>
         <p:nvSpPr>
-          <p:cNvPr id="20" name="Text 18"/>
+          <p:cNvPr id="16" name="Text 14"/>
           <p:cNvSpPr/>
           <p:nvPr/>
         </p:nvSpPr>
         <p:spPr>
           <a:xfrm>
-            <a:off x="1234440" y="5715000"/>
+            <a:off x="1234440" y="4782312"/>
             <a:ext cx="9692640" cy="310896"/>
           </a:xfrm>
           <a:prstGeom prst="rect">
@@ -7497,6 +15990,124 @@
       </p:sp>
       <p:sp>
         <p:nvSpPr>
+          <p:cNvPr id="17" name="Shape 15"/>
+          <p:cNvSpPr/>
+          <p:nvPr/>
+        </p:nvSpPr>
+        <p:spPr>
+          <a:xfrm>
+            <a:off x="914400" y="5312664"/>
+            <a:ext cx="10332720" cy="777240"/>
+          </a:xfrm>
+          <a:prstGeom prst="rect">
+            <a:avLst/>
+          </a:prstGeom>
+          <a:solidFill>
+            <a:srgbClr val="12505F"/>
+          </a:solidFill>
+          <a:ln/>
+        </p:spPr>
+      </p:sp>
+      <p:sp>
+        <p:nvSpPr>
+          <p:cNvPr id="18" name="Shape 16"/>
+          <p:cNvSpPr/>
+          <p:nvPr/>
+        </p:nvSpPr>
+        <p:spPr>
+          <a:xfrm>
+            <a:off x="914400" y="5312664"/>
+            <a:ext cx="68580" cy="777240"/>
+          </a:xfrm>
+          <a:prstGeom prst="rect">
+            <a:avLst/>
+          </a:prstGeom>
+          <a:solidFill>
+            <a:srgbClr val="8FB996"/>
+          </a:solidFill>
+          <a:ln/>
+        </p:spPr>
+      </p:sp>
+      <p:sp>
+        <p:nvSpPr>
+          <p:cNvPr id="19" name="Text 17"/>
+          <p:cNvSpPr/>
+          <p:nvPr/>
+        </p:nvSpPr>
+        <p:spPr>
+          <a:xfrm>
+            <a:off x="1234440" y="5404104"/>
+            <a:ext cx="9692640" cy="292608"/>
+          </a:xfrm>
+          <a:prstGeom prst="rect">
+            <a:avLst/>
+          </a:prstGeom>
+          <a:noFill/>
+          <a:ln/>
+        </p:spPr>
+        <p:txBody>
+          <a:bodyPr wrap="square" lIns="0" tIns="0" rIns="0" bIns="0" rtlCol="0" anchor="ctr"/>
+          <a:lstStyle/>
+          <a:p>
+            <a:pPr indent="0" marL="0">
+              <a:buNone/>
+            </a:pPr>
+            <a:r>
+              <a:rPr lang="en-US" sz="1500" b="1" dirty="0">
+                <a:solidFill>
+                  <a:srgbClr val="FFFFFF"/>
+                </a:solidFill>
+                <a:latin typeface="微软雅黑" pitchFamily="34" charset="0"/>
+                <a:ea typeface="微软雅黑" pitchFamily="34" charset="-122"/>
+                <a:cs typeface="微软雅黑" pitchFamily="34" charset="-120"/>
+              </a:rPr>
+              <a:t>核实两列体重数据重复的问题</a:t>
+            </a:r>
+            <a:endParaRPr lang="en-US" sz="1500" dirty="0"/>
+          </a:p>
+        </p:txBody>
+      </p:sp>
+      <p:sp>
+        <p:nvSpPr>
+          <p:cNvPr id="20" name="Text 18"/>
+          <p:cNvSpPr/>
+          <p:nvPr/>
+        </p:nvSpPr>
+        <p:spPr>
+          <a:xfrm>
+            <a:off x="1234440" y="5715000"/>
+            <a:ext cx="9692640" cy="310896"/>
+          </a:xfrm>
+          <a:prstGeom prst="rect">
+            <a:avLst/>
+          </a:prstGeom>
+          <a:noFill/>
+          <a:ln/>
+        </p:spPr>
+        <p:txBody>
+          <a:bodyPr wrap="square" lIns="0" tIns="0" rIns="0" bIns="0" rtlCol="0" anchor="ctr"/>
+          <a:lstStyle/>
+          <a:p>
+            <a:pPr indent="0" marL="0">
+              <a:buNone/>
+            </a:pPr>
+            <a:r>
+              <a:rPr lang="en-US" sz="1150" dirty="0">
+                <a:solidFill>
+                  <a:srgbClr val="8FB996"/>
+                </a:solidFill>
+                <a:latin typeface="微软雅黑" pitchFamily="34" charset="0"/>
+                <a:ea typeface="微软雅黑" pitchFamily="34" charset="-122"/>
+                <a:cs typeface="微软雅黑" pitchFamily="34" charset="-120"/>
+              </a:rPr>
+              <a:t>Bird_weight.g. 与 Bursa.BodyWeight.Ratio1000 数值完全相同，需联系数据提供方</a:t>
+            </a:r>
+            <a:endParaRPr lang="en-US" sz="1150" dirty="0"/>
+          </a:p>
+        </p:txBody>
+      </p:sp>
+      <p:sp>
+        <p:nvSpPr>
           <p:cNvPr id="21" name="Text 19"/>
           <p:cNvSpPr/>
           <p:nvPr/>
@@ -7528,7 +16139,7 @@
                 <a:ea typeface="微软雅黑" pitchFamily="34" charset="-122"/>
                 <a:cs typeface="微软雅黑" pitchFamily="34" charset="-120"/>
               </a:rPr>
-              <a:t>完整结果见 summary_Chicken_51_sample.md ｜ 复现：python3 poultry_cohort.py</a:t>
+              <a:t>完整结果见 summary_Chicken_51_sample.md 与 summary_Turkey_45_sample.md ｜ 复现：poultry_cohort.py、turkey_confounding_biomarkers.py、turkey_strain_cage.py</a:t>
             </a:r>
             <a:endParaRPr lang="en-US" sz="1200" dirty="0"/>
           </a:p>
@@ -8332,7 +16943,7 @@
                 <a:ea typeface="微软雅黑" pitchFamily="34" charset="-122"/>
                 <a:cs typeface="微软雅黑" pitchFamily="34" charset="-120"/>
               </a:rPr>
-              <a:t>对火鸡队列（PRJNA644054，n=45）单独建模，再与并入鸡队列（PRJNA379944，n=6）后的 51 样本队列对照。两者用完全相同的无泄漏流程：原始计数 + PrevalenceCLR 折内拟合，嵌套 CV（外层 5×10，内层 4 折）。</a:t>
+              <a:t>对火鸡队列 PRJNA644054（n=45）单独建模，再与并入鸡队列 PRJNA379944（n=6）后的 51 样本队列对照。两者用完全相同的无泄漏流程：原始计数 + PrevalenceCLR 折内拟合，嵌套 CV（外层 5×10，内层 4 折）。</a:t>
             </a:r>
             <a:endParaRPr lang="en-US" sz="1200" dirty="0"/>
           </a:p>
@@ -8418,7 +17029,7 @@
                 <a:ea typeface="微软雅黑" pitchFamily="34" charset="-122"/>
                 <a:cs typeface="微软雅黑" pitchFamily="34" charset="-120"/>
               </a:rPr>
-              <a:t>结论</a:t>
+              <a:t>两个结论</a:t>
             </a:r>
             <a:endParaRPr lang="en-US" sz="1500" dirty="0"/>
           </a:p>
@@ -8460,7 +17071,27 @@
                 <a:ea typeface="微软雅黑" pitchFamily="34" charset="-122"/>
                 <a:cs typeface="微软雅黑" pitchFamily="34" charset="-120"/>
               </a:rPr>
-              <a:t>合并没有带来任何收益。批次检查显示两个 project 的菌群完全可分（AUC 1.000），但 project 归属与感染状态无关（0.499）——那 6 个鸡样本对模型是纯噪声。</a:t>
+              <a:t>（1）合并没有带来任何收益，6 个鸡样本对模型是纯噪声。</a:t>
+            </a:r>
+            <a:endParaRPr lang="en-US" sz="1200" dirty="0"/>
+          </a:p>
+          <a:p>
+            <a:pPr indent="0" marL="0">
+              <a:lnSpc>
+                <a:spcPct val="112000"/>
+              </a:lnSpc>
+              <a:buNone/>
+            </a:pPr>
+            <a:r>
+              <a:rPr lang="en-US" sz="1200" dirty="0">
+                <a:solidFill>
+                  <a:srgbClr val="5F7580"/>
+                </a:solidFill>
+                <a:latin typeface="微软雅黑" pitchFamily="34" charset="0"/>
+                <a:ea typeface="微软雅黑" pitchFamily="34" charset="-122"/>
+                <a:cs typeface="微软雅黑" pitchFamily="34" charset="-120"/>
+              </a:rPr>
+              <a:t>（2）但火鸡队列单独也不能直接解读：隔离器与感染状态完全共线，纯笼效应平均 AUC 0.908，与感染效应 0.967 同量级。</a:t>
             </a:r>
             <a:endParaRPr lang="en-US" sz="1200" dirty="0"/>
           </a:p>
@@ -8475,7 +17106,7 @@
         <p:spPr>
           <a:xfrm>
             <a:off x="548640" y="4800600"/>
-            <a:ext cx="11064240" cy="914400"/>
+            <a:ext cx="11064240" cy="1051560"/>
           </a:xfrm>
           <a:prstGeom prst="rect">
             <a:avLst/>
@@ -8495,7 +17126,7 @@
         <p:spPr>
           <a:xfrm>
             <a:off x="548640" y="4800600"/>
-            <a:ext cx="68580" cy="914400"/>
+            <a:ext cx="68580" cy="1051560"/>
           </a:xfrm>
           <a:prstGeom prst="rect">
             <a:avLst/>
@@ -8515,7 +17146,7 @@
         <p:spPr>
           <a:xfrm>
             <a:off x="804672" y="4892040"/>
-            <a:ext cx="10607040" cy="731520"/>
+            <a:ext cx="10607040" cy="868680"/>
           </a:xfrm>
           <a:prstGeom prst="rect">
             <a:avLst/>
@@ -8542,7 +17173,7 @@
                 <a:ea typeface="微软雅黑" pitchFamily="34" charset="-122"/>
                 <a:cs typeface="微软雅黑" pitchFamily="34" charset="-120"/>
               </a:rPr>
-              <a:t>两条边界：（1）n=51、少数类仅 16，特异度 0.581 的置信区间极宽；（2）流行度 ≥10% 时 p/n = 1.33，已是 p &gt; n 的高维问题——与主队列（鸭，n=260，p/n=0.27）不可直接类比。</a:t>
+              <a:t>三条边界：（1）n=51、少数类仅 16，特异度 0.581 的置信区间极宽。（2）流行度 ≥10% 时 p/n = 1.33，已是 p &gt; n 的高维问题，与主队列的鸭群不可直接类比。（3）AUC 0.930 中有多少来自感染、多少来自笼号，本设计下无法拆分。</a:t>
             </a:r>
             <a:endParaRPr lang="en-US" sz="1200" dirty="0"/>
           </a:p>
